--- a/docs/Marine-AI-Pitch-Deck.pptx
+++ b/docs/Marine-AI-Pitch-Deck.pptx
@@ -672,7 +672,7 @@
           </a:p>
           <a:p>
             <a:r>
-              <a:t>tested (276 tests green). The learned forecaster is **built** as of</a:t>
+              <a:t>tested (334 tests green). The learned forecaster is **built** as of</a:t>
             </a:r>
           </a:p>
           <a:p>
@@ -2155,32 +2155,72 @@
           </a:p>
           <a:p>
             <a:r>
-              <a:t>and rendered in the bridge Health zone. The demo beat to rehearse: open the</a:t>
-            </a:r>
-          </a:p>
-          <a:p>
-            <a:r>
-              <a:t>throttle and coolant *and* exhaust temperature both rise, and the panel stays</a:t>
-            </a:r>
-          </a:p>
-          <a:p>
-            <a:r>
-              <a:t>**nominal** (measured anomaly score 0.09) — because that correlation is what a</a:t>
-            </a:r>
-          </a:p>
-          <a:p>
-            <a:r>
-              <a:t>healthy engine does and the joint model learned it. Then inject a coolant creep</a:t>
-            </a:r>
-          </a:p>
-          <a:p>
-            <a:r>
-              <a:t>alone and it flags at 0.99, naming the coolant stream. A threshold detector</a:t>
-            </a:r>
-          </a:p>
-          <a:p>
-            <a:r>
-              <a:t>would have alarmed on the first and it is worth saying so out loud.</a:t>
+              <a:t>and rendered in the bridge Health zone.</a:t>
+            </a:r>
+          </a:p>
+          <a:p>
+            <a:r>
+              <a:t>The demo beat to rehearse, **re-measured live against the running API on</a:t>
+            </a:r>
+          </a:p>
+          <a:p>
+            <a:r>
+              <a:t>2026-08-03**: hold the coolant gauge at the *same* reading, 87.4 °C, and change</a:t>
+            </a:r>
+          </a:p>
+          <a:p>
+            <a:r>
+              <a:t>only how it got there. Reached by a load-coupled rise — coolant, exhaust</a:t>
+            </a:r>
+          </a:p>
+          <a:p>
+            <a:r>
+              <a:t>temperature, NOx and vibration all moving together the way they do when the</a:t>
+            </a:r>
+          </a:p>
+          <a:p>
+            <a:r>
+              <a:t>throttle opens — it scores **0.30 and stays nominal**. Reached by a coolant</a:t>
+            </a:r>
+          </a:p>
+          <a:p>
+            <a:r>
+              <a:t>creep on its own it scores **0.62 and flags**, naming the coolant stream. Same</a:t>
+            </a:r>
+          </a:p>
+          <a:p>
+            <a:r>
+              <a:t>number on the gauge, opposite verdict: that correlation is what the PCA half</a:t>
+            </a:r>
+          </a:p>
+          <a:p>
+            <a:r>
+              <a:t>learned, and a threshold detector cannot tell the two apart. Push the creep</a:t>
+            </a:r>
+          </a:p>
+          <a:p>
+            <a:r>
+              <a:t>further and it saturates — coolant at 98 °C alone scores **0.9998**.</a:t>
+            </a:r>
+          </a:p>
+          <a:p>
+            <a:r>
+              <a:t>The old "0.09 vs 0.99" pair in this note was **not reproducible** from the API</a:t>
+            </a:r>
+          </a:p>
+          <a:p>
+            <a:r>
+              <a:t>and has been replaced by the measured figures above. Quote the constant-gauge</a:t>
+            </a:r>
+          </a:p>
+          <a:p>
+            <a:r>
+              <a:t>pair, not a lone low number: holding the reading fixed is what makes the point</a:t>
+            </a:r>
+          </a:p>
+          <a:p>
+            <a:r>
+              <a:t>unarguable.</a:t>
             </a:r>
           </a:p>
         </p:txBody>
@@ -5879,7 +5919,7 @@
                 </a:solidFill>
                 <a:latin typeface="Segoe UI"/>
               </a:rPr>
-              <a:t>trained on 2.6 years of real Open-Meteo reanalysis data</a:t>
+              <a:t>trained on 2.5 years of real Open-Meteo reanalysis data</a:t>
             </a:r>
             <a:r>
               <a:rPr sz="1600" b="0">
@@ -9757,7 +9797,43 @@
                 </a:solidFill>
                 <a:latin typeface="Segoe UI"/>
               </a:rPr>
-              <a:t> EGT-excess-over-baseline as the wear signal (r=0.99 in training), ratio-against-healthy to cancel boundary bias.</a:t>
+              <a:t> EGT-excess-over-baseline as the wear signal (</a:t>
+            </a:r>
+            <a:r>
+              <a:rPr sz="1600" b="1">
+                <a:solidFill>
+                  <a:srgbClr val="F8FAFC"/>
+                </a:solidFill>
+                <a:latin typeface="Segoe UI"/>
+              </a:rPr>
+              <a:t>r = 0.97–0.997 at fixed load</a:t>
+            </a:r>
+            <a:r>
+              <a:rPr sz="1600" b="0">
+                <a:solidFill>
+                  <a:srgbClr val="F8FAFC"/>
+                </a:solidFill>
+                <a:latin typeface="Segoe UI"/>
+              </a:rPr>
+              <a:t>, mean 0.986 across the seven load points), ratio-against-healthy to cancel boundary bias. Say "at fixed load" out loud: pooled across loads r is 0.86, because load moves both variables, and that is exactly why </a:t>
+            </a:r>
+            <a:r>
+              <a:rPr sz="1400" b="0">
+                <a:solidFill>
+                  <a:srgbClr val="B6C2D4"/>
+                </a:solidFill>
+                <a:latin typeface="Consolas"/>
+              </a:rPr>
+              <a:t>load_fraction</a:t>
+            </a:r>
+            <a:r>
+              <a:rPr sz="1600" b="0">
+                <a:solidFill>
+                  <a:srgbClr val="F8FAFC"/>
+                </a:solidFill>
+                <a:latin typeface="Segoe UI"/>
+              </a:rPr>
+              <a:t> is the model's second feature rather than a nuisance to be averaged away.</a:t>
             </a:r>
           </a:p>
           <a:p>

--- a/docs/Marine-AI-Pitch-Deck.pptx
+++ b/docs/Marine-AI-Pitch-Deck.pptx
@@ -651,7 +651,7 @@
           <a:p/>
           <a:p>
             <a:r>
-              <a:t>SERVES (rubric): Innovation &amp; Scalability; AI Strategy.</a:t>
+              <a:t>SERVES (rubric): Innovation &amp; Impact; AI Architecture &amp; Model Fit.</a:t>
             </a:r>
           </a:p>
           <a:p/>
@@ -848,7 +848,7 @@
           <a:p/>
           <a:p>
             <a:r>
-              <a:t>SERVES (rubric): Presentation (15%); Impact (usability by a non-engineer captain).</a:t>
+              <a:t>SERVES (rubric): Presentation (10%); Innovation &amp; Impact (usability by a non-engineer captain is the impact claim).</a:t>
             </a:r>
           </a:p>
         </p:txBody>
@@ -1016,7 +1016,7 @@
           <a:p/>
           <a:p>
             <a:r>
-              <a:t>SERVES (rubric): Ethics/Bias (15% semi-final).</a:t>
+              <a:t>SERVES (rubric): Data Strategy &amp; Ethics — 25% of Technical Soundness, so **12.5% of the total**, more than Presentation is worth.</a:t>
             </a:r>
           </a:p>
           <a:p/>
@@ -1173,7 +1173,7 @@
           <a:p/>
           <a:p>
             <a:r>
-              <a:t>SERVES (rubric): Data Integrity (20% semi-final); the brief's citation requirement.</a:t>
+              <a:t>SERVES (rubric): Data Strategy &amp; Ethics (12.5% of the total); the brief's citation requirement. Full licence disclosure lives in `docs/THIRD-PARTY.md`.</a:t>
             </a:r>
           </a:p>
         </p:txBody>
@@ -1329,23 +1329,64 @@
           <a:lstStyle/>
           <a:p>
             <a:r>
-              <a:t>Feasibility is the retrofit story plus the cost story. We're</a:t>
-            </a:r>
-          </a:p>
-          <a:p>
-            <a:r>
-              <a:t>not asking an operator to buy a boat; we're asking them to bolt on a sensor kit</a:t>
-            </a:r>
-          </a:p>
-          <a:p>
-            <a:r>
-              <a:t>that pays for itself in fuel.</a:t>
+              <a:t>This criterion is now explicitly about *path to adoption,</a:t>
+            </a:r>
+          </a:p>
+          <a:p>
+            <a:r>
+              <a:t>sustainability as a venture, and capacity to scale beyond the prototype* — so</a:t>
+            </a:r>
+          </a:p>
+          <a:p>
+            <a:r>
+              <a:t>lead with the business mechanism, not the technology. We're not asking an</a:t>
+            </a:r>
+          </a:p>
+          <a:p>
+            <a:r>
+              <a:t>operator to buy a boat; we're asking them to bolt on a sensor kit that pays for</a:t>
+            </a:r>
+          </a:p>
+          <a:p>
+            <a:r>
+              <a:t>itself in fuel, and the emissions report gives a cooperative or lender a reason</a:t>
+            </a:r>
+          </a:p>
+          <a:p>
+            <a:r>
+              <a:t>to underwrite the kit up front.</a:t>
             </a:r>
           </a:p>
           <a:p/>
           <a:p>
             <a:r>
-              <a:t>SERVES (rubric): Impact &amp; Feasibility (25%); Scalability (10%).</a:t>
+              <a:t>Be ready for the venture question: who buys the first hundred units, and what</a:t>
+            </a:r>
+          </a:p>
+          <a:p>
+            <a:r>
+              <a:t>does the second year look like. The honest framing is a cooperative-level sale —</a:t>
+            </a:r>
+          </a:p>
+          <a:p>
+            <a:r>
+              <a:t>one operator with a dozen boats — rather than a hundred individual captains,</a:t>
+            </a:r>
+          </a:p>
+          <a:p>
+            <a:r>
+              <a:t>because the emissions evidence has value at the fleet level where an LGU or</a:t>
+            </a:r>
+          </a:p>
+          <a:p>
+            <a:r>
+              <a:t>lender is already looking.</a:t>
+            </a:r>
+          </a:p>
+          <a:p/>
+          <a:p>
+            <a:r>
+              <a:t>SERVES (rubric): Feasibility &amp; Scalability (25%).</a:t>
             </a:r>
           </a:p>
         </p:txBody>
@@ -1431,7 +1472,33 @@
           <a:p/>
           <a:p>
             <a:r>
-              <a:t>SERVES (rubric): Innovation &amp; Scalability (10%).</a:t>
+              <a:t>Note the scaling limit honestly if asked: the route forecaster is trained on a</a:t>
+            </a:r>
+          </a:p>
+          <a:p>
+            <a:r>
+              <a:t>9-point grid over one strait, so a new region is a retraining task on the same</a:t>
+            </a:r>
+          </a:p>
+          <a:p>
+            <a:r>
+              <a:t>pipeline — not a code change, but not free either. `DATA.md` §Representativeness</a:t>
+            </a:r>
+          </a:p>
+          <a:p>
+            <a:r>
+              <a:t>states this unprompted, which is the better place for a judge to find it than in</a:t>
+            </a:r>
+          </a:p>
+          <a:p>
+            <a:r>
+              <a:t>your answer to a hostile question.</a:t>
+            </a:r>
+          </a:p>
+          <a:p/>
+          <a:p>
+            <a:r>
+              <a:t>SERVES (rubric): Feasibility &amp; Scalability (25%); Innovation &amp; Impact (15%).</a:t>
             </a:r>
           </a:p>
         </p:txBody>
@@ -1598,7 +1665,7 @@
           <a:p/>
           <a:p>
             <a:r>
-              <a:t>SERVES (rubric): Impact &amp; Feasibility (25%). Ground the pitch in a real operator, the captain from [`PRODUCT.md`](../PRODUCT.md).</a:t>
+              <a:t>SERVES (rubric): Innovation &amp; Impact (15%); Local Relevance (12.5%). Ground the pitch in a real operator, the captain from [`PRODUCT.md`](../PRODUCT.md).</a:t>
             </a:r>
           </a:p>
         </p:txBody>
@@ -1689,7 +1756,7 @@
           <a:p/>
           <a:p>
             <a:r>
-              <a:t>SERVES (rubric): Innovation &amp; Scalability; AI Strategy / Model Fit.</a:t>
+              <a:t>SERVES (rubric): Innovation &amp; Impact; AI Architecture &amp; Model Fit.</a:t>
             </a:r>
           </a:p>
         </p:txBody>
@@ -1866,7 +1933,7 @@
           <a:p/>
           <a:p>
             <a:r>
-              <a:t>SERVES (rubric): Technical Execution; the live-demo moment.</a:t>
+              <a:t>SERVES (rubric): Functional Prototype (10% — the working demo); the live-demo moment.</a:t>
             </a:r>
           </a:p>
         </p:txBody>
@@ -1957,7 +2024,7 @@
           <a:p/>
           <a:p>
             <a:r>
-              <a:t>SERVES (rubric): AI Strategy / Data Integrity / Model Fit (20% semi-final). See [`docs/DEVIATIONS.md`](DEVIATIONS.md) §1.</a:t>
+              <a:t>SERVES (rubric): AI Architecture &amp; Model Fit — 30% of Technical Soundness, so **15% of the total grade**, the single largest sub-criterion there is. See [`docs/DEVIATIONS.md`](DEVIATIONS.md) §1.</a:t>
             </a:r>
           </a:p>
         </p:txBody>
@@ -2337,7 +2404,7 @@
           <a:p/>
           <a:p>
             <a:r>
-              <a:t>SERVES (rubric): Impact &amp; Feasibility (the only deliverable aimed at the LGU / MARINA / green-finance stakeholder — a third of the problem statement).</a:t>
+              <a:t>SERVES (rubric): Feasibility &amp; Scalability (the only deliverable aimed at the LGU / MARINA / green-finance stakeholder — a third of the problem statement).</a:t>
             </a:r>
           </a:p>
           <a:p/>
@@ -8536,7 +8603,7 @@
                 </a:solidFill>
                 <a:latin typeface="Segoe UI"/>
               </a:rPr>
-              <a:t>Impact &amp; feasibility</a:t>
+              <a:t>Feasibility &amp; scalability (PATH TO ADOPTION)</a:t>
             </a:r>
           </a:p>
         </p:txBody>
@@ -8656,13 +8723,22 @@
               <a:t>— </a:t>
             </a:r>
             <a:r>
+              <a:rPr sz="1800" b="1">
+                <a:solidFill>
+                  <a:srgbClr val="F8FAFC"/>
+                </a:solidFill>
+                <a:latin typeface="Segoe UI"/>
+              </a:rPr>
+              <a:t>Who pays, and why they say yes:</a:t>
+            </a:r>
+            <a:r>
               <a:rPr sz="1800" b="0">
                 <a:solidFill>
                   <a:srgbClr val="F8FAFC"/>
                 </a:solidFill>
                 <a:latin typeface="Segoe UI"/>
               </a:rPr>
-              <a:t>Measured outcomes: litres/nm down, pesos/voyage down, unscheduled downtime converted to scheduled dry-docking, CO₂-avoided evidence produced monthly.</a:t>
+              <a:t> the kit is bought out of the fuel it saves. The operator's decision is a payback period, not a capital purchase.</a:t>
             </a:r>
           </a:p>
           <a:p>
@@ -8687,7 +8763,7 @@
                 </a:solidFill>
                 <a:latin typeface="Segoe UI"/>
               </a:rPr>
-              <a:t>Three stakeholders, three surfaces: captain (bridge screen), owner/cooperative (savings + emissions report), LGU/MARINA/ESG lenders (exported evidence).</a:t>
+              <a:t>Three stakeholders, three surfaces: captain (bridge screen), owner/cooperative (savings + emissions report), LGU/MARINA/ESG lenders (exported evidence) — and the third is what makes this fundable rather than merely useful.</a:t>
             </a:r>
           </a:p>
           <a:p>

--- a/docs/Marine-AI-Pitch-Deck.pptx
+++ b/docs/Marine-AI-Pitch-Deck.pptx
@@ -7041,6 +7041,94 @@
                 <a:latin typeface="Segoe UI"/>
               </a:rPr>
               <a:t> on every frame names who wrote what the captain is reading.</a:t>
+            </a:r>
+          </a:p>
+          <a:p>
+            <a:pPr>
+              <a:spcAft>
+                <a:spcPts val="900"/>
+              </a:spcAft>
+            </a:pPr>
+            <a:r>
+              <a:rPr sz="1600">
+                <a:solidFill>
+                  <a:srgbClr val="F97316"/>
+                </a:solidFill>
+                <a:latin typeface="Segoe UI"/>
+              </a:rPr>
+              <a:t>— </a:t>
+            </a:r>
+            <a:r>
+              <a:rPr sz="1600" b="1">
+                <a:solidFill>
+                  <a:srgbClr val="F8FAFC"/>
+                </a:solidFill>
+                <a:latin typeface="Segoe UI"/>
+              </a:rPr>
+              <a:t>The model is sized to the job, and we measured it.</a:t>
+            </a:r>
+            <a:r>
+              <a:rPr sz="1600" b="0">
+                <a:solidFill>
+                  <a:srgbClr val="F8FAFC"/>
+                </a:solidFill>
+                <a:latin typeface="Segoe UI"/>
+              </a:rPr>
+              <a:t> Rewriting one 180-character sentence does not need a frontier model. Both were run on the same three advisories: </a:t>
+            </a:r>
+            <a:r>
+              <a:rPr sz="1400" b="0">
+                <a:solidFill>
+                  <a:srgbClr val="B6C2D4"/>
+                </a:solidFill>
+                <a:latin typeface="Consolas"/>
+              </a:rPr>
+              <a:t>claude-opus-5</a:t>
+            </a:r>
+            <a:r>
+              <a:rPr sz="1600" b="0">
+                <a:solidFill>
+                  <a:srgbClr val="F8FAFC"/>
+                </a:solidFill>
+                <a:latin typeface="Segoe UI"/>
+              </a:rPr>
+              <a:t> and </a:t>
+            </a:r>
+            <a:r>
+              <a:rPr sz="1400" b="0">
+                <a:solidFill>
+                  <a:srgbClr val="B6C2D4"/>
+                </a:solidFill>
+                <a:latin typeface="Consolas"/>
+              </a:rPr>
+              <a:t>claude-haiku-4-5</a:t>
+            </a:r>
+            <a:r>
+              <a:rPr sz="1600" b="0">
+                <a:solidFill>
+                  <a:srgbClr val="F8FAFC"/>
+                </a:solidFill>
+                <a:latin typeface="Segoe UI"/>
+              </a:rPr>
+              <a:t> each passed the guard 3/3 with every number preserved, and Haiku was </a:t>
+            </a:r>
+            <a:r>
+              <a:rPr sz="1600" b="1">
+                <a:solidFill>
+                  <a:srgbClr val="F8FAFC"/>
+                </a:solidFill>
+                <a:latin typeface="Segoe UI"/>
+              </a:rPr>
+              <a:t>2.2× faster at ⅕ the cost</a:t>
+            </a:r>
+            <a:r>
+              <a:rPr sz="1600" b="0">
+                <a:solidFill>
+                  <a:srgbClr val="F8FAFC"/>
+                </a:solidFill>
+                <a:latin typeface="Segoe UI"/>
+              </a:rPr>
+              <a:t>. The guard is provider-agnostic by design — Gemini passes it too — so the layer is a slot, not a dependency.</a:t>
             </a:r>
           </a:p>
         </p:txBody>

--- a/docs/Marine-AI-Pitch-Deck.pptx
+++ b/docs/Marine-AI-Pitch-Deck.pptx
@@ -7120,6 +7120,24 @@
                 <a:latin typeface="Segoe UI"/>
               </a:rPr>
               <a:t>2.2× faster at ⅕ the cost</a:t>
+            </a:r>
+            <a:r>
+              <a:rPr sz="1600" b="0">
+                <a:solidFill>
+                  <a:srgbClr val="F8FAFC"/>
+                </a:solidFill>
+                <a:latin typeface="Segoe UI"/>
+              </a:rPr>
+              <a:t> — so </a:t>
+            </a:r>
+            <a:r>
+              <a:rPr sz="1600" b="1">
+                <a:solidFill>
+                  <a:srgbClr val="F8FAFC"/>
+                </a:solidFill>
+                <a:latin typeface="Segoe UI"/>
+              </a:rPr>
+              <a:t>Haiku is what ships</a:t>
             </a:r>
             <a:r>
               <a:rPr sz="1600" b="0">

--- a/docs/Marine-AI-Pitch-Deck.pptx
+++ b/docs/Marine-AI-Pitch-Deck.pptx
@@ -10697,7 +10697,865 @@
         <p:spPr>
           <a:xfrm>
             <a:off x="658368" y="1600200"/>
-            <a:ext cx="10874959" cy="4434840"/>
+            <a:ext cx="2880360" cy="274320"/>
+          </a:xfrm>
+          <a:prstGeom prst="rect">
+            <a:avLst/>
+          </a:prstGeom>
+          <a:noFill/>
+        </p:spPr>
+        <p:txBody>
+          <a:bodyPr wrap="none">
+            <a:spAutoFit/>
+          </a:bodyPr>
+          <a:lstStyle/>
+          <a:p>
+            <a:pPr algn="ctr"/>
+            <a:r>
+              <a:rPr sz="950" b="1">
+                <a:solidFill>
+                  <a:srgbClr val="F97316"/>
+                </a:solidFill>
+                <a:latin typeface="Consolas"/>
+              </a:rPr>
+              <a:t>SENSE</a:t>
+            </a:r>
+          </a:p>
+        </p:txBody>
+      </p:sp>
+      <p:sp>
+        <p:nvSpPr>
+          <p:cNvPr id="5" name="TextBox 4"/>
+          <p:cNvSpPr txBox="1"/>
+          <p:nvPr/>
+        </p:nvSpPr>
+        <p:spPr>
+          <a:xfrm>
+            <a:off x="4572000" y="1600200"/>
+            <a:ext cx="3291840" cy="274320"/>
+          </a:xfrm>
+          <a:prstGeom prst="rect">
+            <a:avLst/>
+          </a:prstGeom>
+          <a:noFill/>
+        </p:spPr>
+        <p:txBody>
+          <a:bodyPr wrap="none">
+            <a:spAutoFit/>
+          </a:bodyPr>
+          <a:lstStyle/>
+          <a:p>
+            <a:pPr algn="ctr"/>
+            <a:r>
+              <a:rPr sz="950" b="1">
+                <a:solidFill>
+                  <a:srgbClr val="F97316"/>
+                </a:solidFill>
+                <a:latin typeface="Consolas"/>
+              </a:rPr>
+              <a:t>DECIDE  ·  DETERMINISTIC</a:t>
+            </a:r>
+          </a:p>
+        </p:txBody>
+      </p:sp>
+      <p:sp>
+        <p:nvSpPr>
+          <p:cNvPr id="6" name="TextBox 5"/>
+          <p:cNvSpPr txBox="1"/>
+          <p:nvPr/>
+        </p:nvSpPr>
+        <p:spPr>
+          <a:xfrm>
+            <a:off x="8686800" y="1600200"/>
+            <a:ext cx="2880360" cy="274320"/>
+          </a:xfrm>
+          <a:prstGeom prst="rect">
+            <a:avLst/>
+          </a:prstGeom>
+          <a:noFill/>
+        </p:spPr>
+        <p:txBody>
+          <a:bodyPr wrap="none">
+            <a:spAutoFit/>
+          </a:bodyPr>
+          <a:lstStyle/>
+          <a:p>
+            <a:pPr algn="ctr"/>
+            <a:r>
+              <a:rPr sz="950" b="1">
+                <a:solidFill>
+                  <a:srgbClr val="F97316"/>
+                </a:solidFill>
+                <a:latin typeface="Consolas"/>
+              </a:rPr>
+              <a:t>SHOW</a:t>
+            </a:r>
+          </a:p>
+        </p:txBody>
+      </p:sp>
+      <p:sp>
+        <p:nvSpPr>
+          <p:cNvPr id="7" name="Rounded Rectangle 6"/>
+          <p:cNvSpPr/>
+          <p:nvPr/>
+        </p:nvSpPr>
+        <p:spPr>
+          <a:xfrm>
+            <a:off x="658368" y="1929384"/>
+            <a:ext cx="2880360" cy="566928"/>
+          </a:xfrm>
+          <a:prstGeom prst="roundRect">
+            <a:avLst>
+              <a:gd name="adj" fmla="val 12000"/>
+            </a:avLst>
+          </a:prstGeom>
+          <a:solidFill>
+            <a:srgbClr val="0B1220"/>
+          </a:solidFill>
+          <a:ln w="12700">
+            <a:solidFill>
+              <a:srgbClr val="1E293B"/>
+            </a:solidFill>
+          </a:ln>
+          <a:effectLst/>
+        </p:spPr>
+        <p:style>
+          <a:lnRef idx="1">
+            <a:schemeClr val="accent1"/>
+          </a:lnRef>
+          <a:fillRef idx="3">
+            <a:schemeClr val="accent1"/>
+          </a:fillRef>
+          <a:effectRef idx="2">
+            <a:schemeClr val="accent1"/>
+          </a:effectRef>
+          <a:fontRef idx="minor">
+            <a:schemeClr val="lt1"/>
+          </a:fontRef>
+        </p:style>
+        <p:txBody>
+          <a:bodyPr rtlCol="0" anchor="ctr" wrap="square" lIns="73152" rIns="73152" tIns="36576" bIns="36576"/>
+          <a:lstStyle/>
+          <a:p>
+            <a:pPr algn="ctr"/>
+            <a:r>
+              <a:rPr sz="1250" b="1">
+                <a:solidFill>
+                  <a:srgbClr val="F8FAFC"/>
+                </a:solidFill>
+                <a:latin typeface="Segoe UI"/>
+              </a:rPr>
+              <a:t>Engine loom</a:t>
+            </a:r>
+          </a:p>
+          <a:p>
+            <a:pPr algn="ctr"/>
+            <a:r>
+              <a:rPr sz="950">
+                <a:solidFill>
+                  <a:srgbClr val="B6C2D4"/>
+                </a:solidFill>
+                <a:latin typeface="Consolas"/>
+              </a:rPr>
+              <a:t>7 streams · 1 Hz</a:t>
+            </a:r>
+          </a:p>
+        </p:txBody>
+      </p:sp>
+      <p:sp>
+        <p:nvSpPr>
+          <p:cNvPr id="8" name="Rounded Rectangle 7"/>
+          <p:cNvSpPr/>
+          <p:nvPr/>
+        </p:nvSpPr>
+        <p:spPr>
+          <a:xfrm>
+            <a:off x="658368" y="2660904"/>
+            <a:ext cx="2880360" cy="566928"/>
+          </a:xfrm>
+          <a:prstGeom prst="roundRect">
+            <a:avLst>
+              <a:gd name="adj" fmla="val 12000"/>
+            </a:avLst>
+          </a:prstGeom>
+          <a:solidFill>
+            <a:srgbClr val="0B1220"/>
+          </a:solidFill>
+          <a:ln w="12700">
+            <a:solidFill>
+              <a:srgbClr val="1E293B"/>
+            </a:solidFill>
+          </a:ln>
+          <a:effectLst/>
+        </p:spPr>
+        <p:style>
+          <a:lnRef idx="1">
+            <a:schemeClr val="accent1"/>
+          </a:lnRef>
+          <a:fillRef idx="3">
+            <a:schemeClr val="accent1"/>
+          </a:fillRef>
+          <a:effectRef idx="2">
+            <a:schemeClr val="accent1"/>
+          </a:effectRef>
+          <a:fontRef idx="minor">
+            <a:schemeClr val="lt1"/>
+          </a:fontRef>
+        </p:style>
+        <p:txBody>
+          <a:bodyPr rtlCol="0" anchor="ctr" wrap="square" lIns="73152" rIns="73152" tIns="36576" bIns="36576"/>
+          <a:lstStyle/>
+          <a:p>
+            <a:pPr algn="ctr"/>
+            <a:r>
+              <a:rPr sz="1250" b="1">
+                <a:solidFill>
+                  <a:srgbClr val="F8FAFC"/>
+                </a:solidFill>
+                <a:latin typeface="Segoe UI"/>
+              </a:rPr>
+              <a:t>GNSS</a:t>
+            </a:r>
+          </a:p>
+          <a:p>
+            <a:pPr algn="ctr"/>
+            <a:r>
+              <a:rPr sz="950">
+                <a:solidFill>
+                  <a:srgbClr val="B6C2D4"/>
+                </a:solidFill>
+                <a:latin typeface="Consolas"/>
+              </a:rPr>
+              <a:t>position · speed</a:t>
+            </a:r>
+          </a:p>
+        </p:txBody>
+      </p:sp>
+      <p:sp>
+        <p:nvSpPr>
+          <p:cNvPr id="9" name="Rounded Rectangle 8"/>
+          <p:cNvSpPr/>
+          <p:nvPr/>
+        </p:nvSpPr>
+        <p:spPr>
+          <a:xfrm>
+            <a:off x="658368" y="3392424"/>
+            <a:ext cx="2880360" cy="566928"/>
+          </a:xfrm>
+          <a:prstGeom prst="roundRect">
+            <a:avLst>
+              <a:gd name="adj" fmla="val 12000"/>
+            </a:avLst>
+          </a:prstGeom>
+          <a:solidFill>
+            <a:srgbClr val="0B1220"/>
+          </a:solidFill>
+          <a:ln w="12700">
+            <a:solidFill>
+              <a:srgbClr val="1E293B"/>
+            </a:solidFill>
+          </a:ln>
+          <a:effectLst/>
+        </p:spPr>
+        <p:style>
+          <a:lnRef idx="1">
+            <a:schemeClr val="accent1"/>
+          </a:lnRef>
+          <a:fillRef idx="3">
+            <a:schemeClr val="accent1"/>
+          </a:fillRef>
+          <a:effectRef idx="2">
+            <a:schemeClr val="accent1"/>
+          </a:effectRef>
+          <a:fontRef idx="minor">
+            <a:schemeClr val="lt1"/>
+          </a:fontRef>
+        </p:style>
+        <p:txBody>
+          <a:bodyPr rtlCol="0" anchor="ctr" wrap="square" lIns="73152" rIns="73152" tIns="36576" bIns="36576"/>
+          <a:lstStyle/>
+          <a:p>
+            <a:pPr algn="ctr"/>
+            <a:r>
+              <a:rPr sz="1250" b="1">
+                <a:solidFill>
+                  <a:srgbClr val="F8FAFC"/>
+                </a:solidFill>
+                <a:latin typeface="Segoe UI"/>
+              </a:rPr>
+              <a:t>Metocean</a:t>
+            </a:r>
+          </a:p>
+          <a:p>
+            <a:pPr algn="ctr"/>
+            <a:r>
+              <a:rPr sz="950">
+                <a:solidFill>
+                  <a:srgbClr val="B6C2D4"/>
+                </a:solidFill>
+                <a:latin typeface="Consolas"/>
+              </a:rPr>
+              <a:t>wind · wave · current</a:t>
+            </a:r>
+          </a:p>
+        </p:txBody>
+      </p:sp>
+      <p:sp>
+        <p:nvSpPr>
+          <p:cNvPr id="10" name="Rounded Rectangle 9"/>
+          <p:cNvSpPr/>
+          <p:nvPr/>
+        </p:nvSpPr>
+        <p:spPr>
+          <a:xfrm>
+            <a:off x="4572000" y="1929384"/>
+            <a:ext cx="3291840" cy="566928"/>
+          </a:xfrm>
+          <a:prstGeom prst="roundRect">
+            <a:avLst>
+              <a:gd name="adj" fmla="val 12000"/>
+            </a:avLst>
+          </a:prstGeom>
+          <a:solidFill>
+            <a:srgbClr val="0B1220"/>
+          </a:solidFill>
+          <a:ln w="19050">
+            <a:solidFill>
+              <a:srgbClr val="F97316"/>
+            </a:solidFill>
+          </a:ln>
+          <a:effectLst/>
+        </p:spPr>
+        <p:style>
+          <a:lnRef idx="1">
+            <a:schemeClr val="accent1"/>
+          </a:lnRef>
+          <a:fillRef idx="3">
+            <a:schemeClr val="accent1"/>
+          </a:fillRef>
+          <a:effectRef idx="2">
+            <a:schemeClr val="accent1"/>
+          </a:effectRef>
+          <a:fontRef idx="minor">
+            <a:schemeClr val="lt1"/>
+          </a:fontRef>
+        </p:style>
+        <p:txBody>
+          <a:bodyPr rtlCol="0" anchor="ctr" wrap="square" lIns="73152" rIns="73152" tIns="36576" bIns="36576"/>
+          <a:lstStyle/>
+          <a:p>
+            <a:pPr algn="ctr"/>
+            <a:r>
+              <a:rPr sz="1250" b="1">
+                <a:solidFill>
+                  <a:srgbClr val="F8FAFC"/>
+                </a:solidFill>
+                <a:latin typeface="Segoe UI"/>
+              </a:rPr>
+              <a:t>Speed Optimization</a:t>
+            </a:r>
+          </a:p>
+          <a:p>
+            <a:pPr algn="ctr"/>
+            <a:r>
+              <a:rPr sz="950">
+                <a:solidFill>
+                  <a:srgbClr val="F97316"/>
+                </a:solidFill>
+                <a:latin typeface="Consolas"/>
+              </a:rPr>
+              <a:t>physics + XGBoost wear</a:t>
+            </a:r>
+          </a:p>
+        </p:txBody>
+      </p:sp>
+      <p:sp>
+        <p:nvSpPr>
+          <p:cNvPr id="11" name="Rounded Rectangle 10"/>
+          <p:cNvSpPr/>
+          <p:nvPr/>
+        </p:nvSpPr>
+        <p:spPr>
+          <a:xfrm>
+            <a:off x="4572000" y="2660904"/>
+            <a:ext cx="3291840" cy="566928"/>
+          </a:xfrm>
+          <a:prstGeom prst="roundRect">
+            <a:avLst>
+              <a:gd name="adj" fmla="val 12000"/>
+            </a:avLst>
+          </a:prstGeom>
+          <a:solidFill>
+            <a:srgbClr val="0B1220"/>
+          </a:solidFill>
+          <a:ln w="19050">
+            <a:solidFill>
+              <a:srgbClr val="F97316"/>
+            </a:solidFill>
+          </a:ln>
+          <a:effectLst/>
+        </p:spPr>
+        <p:style>
+          <a:lnRef idx="1">
+            <a:schemeClr val="accent1"/>
+          </a:lnRef>
+          <a:fillRef idx="3">
+            <a:schemeClr val="accent1"/>
+          </a:fillRef>
+          <a:effectRef idx="2">
+            <a:schemeClr val="accent1"/>
+          </a:effectRef>
+          <a:fontRef idx="minor">
+            <a:schemeClr val="lt1"/>
+          </a:fontRef>
+        </p:style>
+        <p:txBody>
+          <a:bodyPr rtlCol="0" anchor="ctr" wrap="square" lIns="73152" rIns="73152" tIns="36576" bIns="36576"/>
+          <a:lstStyle/>
+          <a:p>
+            <a:pPr algn="ctr"/>
+            <a:r>
+              <a:rPr sz="1250" b="1">
+                <a:solidFill>
+                  <a:srgbClr val="F8FAFC"/>
+                </a:solidFill>
+                <a:latin typeface="Segoe UI"/>
+              </a:rPr>
+              <a:t>Route Optimization</a:t>
+            </a:r>
+          </a:p>
+          <a:p>
+            <a:pPr algn="ctr"/>
+            <a:r>
+              <a:rPr sz="950">
+                <a:solidFill>
+                  <a:srgbClr val="F97316"/>
+                </a:solidFill>
+                <a:latin typeface="Consolas"/>
+              </a:rPr>
+              <a:t>same fuel model per leg</a:t>
+            </a:r>
+          </a:p>
+        </p:txBody>
+      </p:sp>
+      <p:sp>
+        <p:nvSpPr>
+          <p:cNvPr id="12" name="Rounded Rectangle 11"/>
+          <p:cNvSpPr/>
+          <p:nvPr/>
+        </p:nvSpPr>
+        <p:spPr>
+          <a:xfrm>
+            <a:off x="4572000" y="3392424"/>
+            <a:ext cx="3291840" cy="566928"/>
+          </a:xfrm>
+          <a:prstGeom prst="roundRect">
+            <a:avLst>
+              <a:gd name="adj" fmla="val 12000"/>
+            </a:avLst>
+          </a:prstGeom>
+          <a:solidFill>
+            <a:srgbClr val="0B1220"/>
+          </a:solidFill>
+          <a:ln w="19050">
+            <a:solidFill>
+              <a:srgbClr val="F97316"/>
+            </a:solidFill>
+          </a:ln>
+          <a:effectLst/>
+        </p:spPr>
+        <p:style>
+          <a:lnRef idx="1">
+            <a:schemeClr val="accent1"/>
+          </a:lnRef>
+          <a:fillRef idx="3">
+            <a:schemeClr val="accent1"/>
+          </a:fillRef>
+          <a:effectRef idx="2">
+            <a:schemeClr val="accent1"/>
+          </a:effectRef>
+          <a:fontRef idx="minor">
+            <a:schemeClr val="lt1"/>
+          </a:fontRef>
+        </p:style>
+        <p:txBody>
+          <a:bodyPr rtlCol="0" anchor="ctr" wrap="square" lIns="73152" rIns="73152" tIns="36576" bIns="36576"/>
+          <a:lstStyle/>
+          <a:p>
+            <a:pPr algn="ctr"/>
+            <a:r>
+              <a:rPr sz="1250" b="1">
+                <a:solidFill>
+                  <a:srgbClr val="F8FAFC"/>
+                </a:solidFill>
+                <a:latin typeface="Segoe UI"/>
+              </a:rPr>
+              <a:t>Predictive Maintenance</a:t>
+            </a:r>
+          </a:p>
+          <a:p>
+            <a:pPr algn="ctr"/>
+            <a:r>
+              <a:rPr sz="950">
+                <a:solidFill>
+                  <a:srgbClr val="F97316"/>
+                </a:solidFill>
+                <a:latin typeface="Consolas"/>
+              </a:rPr>
+              <a:t>z-score + PCA autoencoder</a:t>
+            </a:r>
+          </a:p>
+        </p:txBody>
+      </p:sp>
+      <p:sp>
+        <p:nvSpPr>
+          <p:cNvPr id="13" name="Rounded Rectangle 12"/>
+          <p:cNvSpPr/>
+          <p:nvPr/>
+        </p:nvSpPr>
+        <p:spPr>
+          <a:xfrm>
+            <a:off x="4572000" y="4123944"/>
+            <a:ext cx="3291840" cy="566928"/>
+          </a:xfrm>
+          <a:prstGeom prst="roundRect">
+            <a:avLst>
+              <a:gd name="adj" fmla="val 12000"/>
+            </a:avLst>
+          </a:prstGeom>
+          <a:solidFill>
+            <a:srgbClr val="0B1220"/>
+          </a:solidFill>
+          <a:ln w="12700">
+            <a:solidFill>
+              <a:srgbClr val="1E293B"/>
+            </a:solidFill>
+          </a:ln>
+          <a:effectLst/>
+        </p:spPr>
+        <p:style>
+          <a:lnRef idx="1">
+            <a:schemeClr val="accent1"/>
+          </a:lnRef>
+          <a:fillRef idx="3">
+            <a:schemeClr val="accent1"/>
+          </a:fillRef>
+          <a:effectRef idx="2">
+            <a:schemeClr val="accent1"/>
+          </a:effectRef>
+          <a:fontRef idx="minor">
+            <a:schemeClr val="lt1"/>
+          </a:fontRef>
+        </p:style>
+        <p:txBody>
+          <a:bodyPr rtlCol="0" anchor="ctr" wrap="square" lIns="73152" rIns="73152" tIns="36576" bIns="36576"/>
+          <a:lstStyle/>
+          <a:p>
+            <a:pPr algn="ctr"/>
+            <a:r>
+              <a:rPr sz="1250" b="1">
+                <a:solidFill>
+                  <a:srgbClr val="F8FAFC"/>
+                </a:solidFill>
+                <a:latin typeface="Segoe UI"/>
+              </a:rPr>
+              <a:t>Safety cut-offs</a:t>
+            </a:r>
+          </a:p>
+          <a:p>
+            <a:pPr algn="ctr"/>
+            <a:r>
+              <a:rPr sz="950">
+                <a:solidFill>
+                  <a:srgbClr val="B6C2D4"/>
+                </a:solidFill>
+                <a:latin typeface="Consolas"/>
+              </a:rPr>
+              <a:t>rules only · imports no model</a:t>
+            </a:r>
+          </a:p>
+        </p:txBody>
+      </p:sp>
+      <p:sp>
+        <p:nvSpPr>
+          <p:cNvPr id="14" name="Rounded Rectangle 13"/>
+          <p:cNvSpPr/>
+          <p:nvPr/>
+        </p:nvSpPr>
+        <p:spPr>
+          <a:xfrm>
+            <a:off x="8686800" y="2295144"/>
+            <a:ext cx="2880360" cy="1280160"/>
+          </a:xfrm>
+          <a:prstGeom prst="roundRect">
+            <a:avLst>
+              <a:gd name="adj" fmla="val 12000"/>
+            </a:avLst>
+          </a:prstGeom>
+          <a:solidFill>
+            <a:srgbClr val="0B1220"/>
+          </a:solidFill>
+          <a:ln w="12700">
+            <a:solidFill>
+              <a:srgbClr val="1E293B"/>
+            </a:solidFill>
+          </a:ln>
+          <a:effectLst/>
+        </p:spPr>
+        <p:style>
+          <a:lnRef idx="1">
+            <a:schemeClr val="accent1"/>
+          </a:lnRef>
+          <a:fillRef idx="3">
+            <a:schemeClr val="accent1"/>
+          </a:fillRef>
+          <a:effectRef idx="2">
+            <a:schemeClr val="accent1"/>
+          </a:effectRef>
+          <a:fontRef idx="minor">
+            <a:schemeClr val="lt1"/>
+          </a:fontRef>
+        </p:style>
+        <p:txBody>
+          <a:bodyPr rtlCol="0" anchor="ctr" wrap="square" lIns="73152" rIns="73152" tIns="36576" bIns="36576"/>
+          <a:lstStyle/>
+          <a:p>
+            <a:pPr algn="ctr"/>
+            <a:r>
+              <a:rPr sz="1250" b="1">
+                <a:solidFill>
+                  <a:srgbClr val="F8FAFC"/>
+                </a:solidFill>
+                <a:latin typeface="Segoe UI"/>
+              </a:rPr>
+              <a:t>One bridge display</a:t>
+            </a:r>
+          </a:p>
+          <a:p>
+            <a:pPr algn="ctr"/>
+            <a:r>
+              <a:rPr sz="950">
+                <a:solidFill>
+                  <a:srgbClr val="B6C2D4"/>
+                </a:solidFill>
+                <a:latin typeface="Consolas"/>
+              </a:rPr>
+              <a:t>console · captain view</a:t>
+            </a:r>
+          </a:p>
+        </p:txBody>
+      </p:sp>
+      <p:sp>
+        <p:nvSpPr>
+          <p:cNvPr id="15" name="Rounded Rectangle 14"/>
+          <p:cNvSpPr/>
+          <p:nvPr/>
+        </p:nvSpPr>
+        <p:spPr>
+          <a:xfrm>
+            <a:off x="8686800" y="3849624"/>
+            <a:ext cx="2880360" cy="566928"/>
+          </a:xfrm>
+          <a:prstGeom prst="roundRect">
+            <a:avLst>
+              <a:gd name="adj" fmla="val 12000"/>
+            </a:avLst>
+          </a:prstGeom>
+          <a:solidFill>
+            <a:srgbClr val="0B1220"/>
+          </a:solidFill>
+          <a:ln w="12700">
+            <a:solidFill>
+              <a:srgbClr val="1E293B"/>
+            </a:solidFill>
+          </a:ln>
+          <a:effectLst/>
+        </p:spPr>
+        <p:style>
+          <a:lnRef idx="1">
+            <a:schemeClr val="accent1"/>
+          </a:lnRef>
+          <a:fillRef idx="3">
+            <a:schemeClr val="accent1"/>
+          </a:fillRef>
+          <a:effectRef idx="2">
+            <a:schemeClr val="accent1"/>
+          </a:effectRef>
+          <a:fontRef idx="minor">
+            <a:schemeClr val="lt1"/>
+          </a:fontRef>
+        </p:style>
+        <p:txBody>
+          <a:bodyPr rtlCol="0" anchor="ctr" wrap="square" lIns="73152" rIns="73152" tIns="36576" bIns="36576"/>
+          <a:lstStyle/>
+          <a:p>
+            <a:pPr algn="ctr"/>
+            <a:r>
+              <a:rPr sz="1250" b="1">
+                <a:solidFill>
+                  <a:srgbClr val="B6C2D4"/>
+                </a:solidFill>
+                <a:latin typeface="Segoe UI"/>
+              </a:rPr>
+              <a:t>Advisory phrasing</a:t>
+            </a:r>
+          </a:p>
+          <a:p>
+            <a:pPr algn="ctr"/>
+            <a:r>
+              <a:rPr sz="950">
+                <a:solidFill>
+                  <a:srgbClr val="B6C2D4"/>
+                </a:solidFill>
+                <a:latin typeface="Consolas"/>
+              </a:rPr>
+              <a:t>Claude · guarded</a:t>
+            </a:r>
+          </a:p>
+        </p:txBody>
+      </p:sp>
+      <p:sp>
+        <p:nvSpPr>
+          <p:cNvPr id="16" name="Right Arrow 15"/>
+          <p:cNvSpPr/>
+          <p:nvPr/>
+        </p:nvSpPr>
+        <p:spPr>
+          <a:xfrm>
+            <a:off x="3648456" y="2889504"/>
+            <a:ext cx="502920" cy="114300"/>
+          </a:xfrm>
+          <a:prstGeom prst="rightArrow">
+            <a:avLst/>
+          </a:prstGeom>
+          <a:solidFill>
+            <a:srgbClr val="1E293B"/>
+          </a:solidFill>
+          <a:ln>
+            <a:noFill/>
+          </a:ln>
+          <a:effectLst/>
+        </p:spPr>
+        <p:style>
+          <a:lnRef idx="1">
+            <a:schemeClr val="accent1"/>
+          </a:lnRef>
+          <a:fillRef idx="3">
+            <a:schemeClr val="accent1"/>
+          </a:fillRef>
+          <a:effectRef idx="2">
+            <a:schemeClr val="accent1"/>
+          </a:effectRef>
+          <a:fontRef idx="minor">
+            <a:schemeClr val="lt1"/>
+          </a:fontRef>
+        </p:style>
+        <p:txBody>
+          <a:bodyPr rtlCol="0" anchor="ctr"/>
+          <a:lstStyle/>
+          <a:p>
+            <a:pPr algn="ctr"/>
+          </a:p>
+        </p:txBody>
+      </p:sp>
+      <p:sp>
+        <p:nvSpPr>
+          <p:cNvPr id="17" name="Right Arrow 16"/>
+          <p:cNvSpPr/>
+          <p:nvPr/>
+        </p:nvSpPr>
+        <p:spPr>
+          <a:xfrm>
+            <a:off x="7973568" y="2889504"/>
+            <a:ext cx="502920" cy="114300"/>
+          </a:xfrm>
+          <a:prstGeom prst="rightArrow">
+            <a:avLst/>
+          </a:prstGeom>
+          <a:solidFill>
+            <a:srgbClr val="1E293B"/>
+          </a:solidFill>
+          <a:ln>
+            <a:noFill/>
+          </a:ln>
+          <a:effectLst/>
+        </p:spPr>
+        <p:style>
+          <a:lnRef idx="1">
+            <a:schemeClr val="accent1"/>
+          </a:lnRef>
+          <a:fillRef idx="3">
+            <a:schemeClr val="accent1"/>
+          </a:fillRef>
+          <a:effectRef idx="2">
+            <a:schemeClr val="accent1"/>
+          </a:effectRef>
+          <a:fontRef idx="minor">
+            <a:schemeClr val="lt1"/>
+          </a:fontRef>
+        </p:style>
+        <p:txBody>
+          <a:bodyPr rtlCol="0" anchor="ctr"/>
+          <a:lstStyle/>
+          <a:p>
+            <a:pPr algn="ctr"/>
+          </a:p>
+        </p:txBody>
+      </p:sp>
+      <p:sp>
+        <p:nvSpPr>
+          <p:cNvPr id="18" name="TextBox 17"/>
+          <p:cNvSpPr txBox="1"/>
+          <p:nvPr/>
+        </p:nvSpPr>
+        <p:spPr>
+          <a:xfrm>
+            <a:off x="658368" y="4965192"/>
+            <a:ext cx="10874959" cy="384048"/>
+          </a:xfrm>
+          <a:prstGeom prst="rect">
+            <a:avLst/>
+          </a:prstGeom>
+          <a:noFill/>
+        </p:spPr>
+        <p:txBody>
+          <a:bodyPr wrap="square">
+            <a:spAutoFit/>
+          </a:bodyPr>
+          <a:lstStyle/>
+          <a:p>
+            <a:pPr algn="ctr"/>
+            <a:r>
+              <a:rPr sz="1100" b="1">
+                <a:solidFill>
+                  <a:srgbClr val="B6C2D4"/>
+                </a:solidFill>
+                <a:latin typeface="Segoe UI"/>
+              </a:rPr>
+              <a:t>The models predict and detect. They never decide.</a:t>
+            </a:r>
+            <a:r>
+              <a:rPr sz="1100" b="0">
+                <a:solidFill>
+                  <a:srgbClr val="B6C2D4"/>
+                </a:solidFill>
+                <a:latin typeface="Segoe UI"/>
+              </a:rPr>
+              <a:t> The optimiser picks the RPM, the planner picks the track, a rule table trips the alarms — and a test fails if a model is ever imported into the safety path.</a:t>
+            </a:r>
+          </a:p>
+        </p:txBody>
+      </p:sp>
+      <p:sp>
+        <p:nvSpPr>
+          <p:cNvPr id="19" name="TextBox 18"/>
+          <p:cNvSpPr txBox="1"/>
+          <p:nvPr/>
+        </p:nvSpPr>
+        <p:spPr>
+          <a:xfrm>
+            <a:off x="658368" y="5422392"/>
+            <a:ext cx="10874959" cy="612648"/>
           </a:xfrm>
           <a:prstGeom prst="rect">
             <a:avLst/>
@@ -10731,7 +11589,7 @@
                 </a:solidFill>
                 <a:latin typeface="Segoe UI"/>
               </a:rPr>
-              <a:t>Three sensor systems → three parallel AI modules → </a:t>
+              <a:t>Cross-cutting: the </a:t>
             </a:r>
             <a:r>
               <a:rPr sz="1800" b="1">
@@ -10740,7 +11598,7 @@
                 </a:solidFill>
                 <a:latin typeface="Segoe UI"/>
               </a:rPr>
-              <a:t>one bridge display</a:t>
+              <a:t>Auditable Emissions Layer</a:t>
             </a:r>
             <a:r>
               <a:rPr sz="1800" b="0">
@@ -10749,111 +11607,14 @@
                 </a:solidFill>
                 <a:latin typeface="Segoe UI"/>
               </a:rPr>
-              <a:t>. 1. </a:t>
-            </a:r>
-            <a:r>
-              <a:rPr sz="1800" b="1">
-                <a:solidFill>
-                  <a:srgbClr val="F8FAFC"/>
-                </a:solidFill>
-                <a:latin typeface="Segoe UI"/>
-              </a:rPr>
-              <a:t>Speed Optimization</a:t>
-            </a:r>
-            <a:r>
-              <a:rPr sz="1800" b="0">
-                <a:solidFill>
-                  <a:srgbClr val="F8FAFC"/>
-                </a:solidFill>
-                <a:latin typeface="Segoe UI"/>
-              </a:rPr>
-              <a:t> — cheapest throttle that still meets the schedule. 2. </a:t>
-            </a:r>
-            <a:r>
-              <a:rPr sz="1800" b="1">
-                <a:solidFill>
-                  <a:srgbClr val="F8FAFC"/>
-                </a:solidFill>
-                <a:latin typeface="Segoe UI"/>
-              </a:rPr>
-              <a:t>Route Optimization</a:t>
-            </a:r>
-            <a:r>
-              <a:rPr sz="1800" b="0">
-                <a:solidFill>
-                  <a:srgbClr val="F8FAFC"/>
-                </a:solidFill>
-                <a:latin typeface="Segoe UI"/>
-              </a:rPr>
-              <a:t> — cheapest lawful track for the same arrival. 3. </a:t>
-            </a:r>
-            <a:r>
-              <a:rPr sz="1800" b="1">
-                <a:solidFill>
-                  <a:srgbClr val="F8FAFC"/>
-                </a:solidFill>
-                <a:latin typeface="Segoe UI"/>
-              </a:rPr>
-              <a:t>Predictive Maintenance</a:t>
-            </a:r>
-            <a:r>
-              <a:rPr sz="1800" b="0">
-                <a:solidFill>
-                  <a:srgbClr val="F8FAFC"/>
-                </a:solidFill>
-                <a:latin typeface="Segoe UI"/>
-              </a:rPr>
-              <a:t> — engine health, honest about its own maturity.</a:t>
-            </a:r>
-          </a:p>
-          <a:p>
-            <a:pPr>
-              <a:spcAft>
-                <a:spcPts val="900"/>
-              </a:spcAft>
-            </a:pPr>
-            <a:r>
-              <a:rPr sz="1800">
-                <a:solidFill>
-                  <a:srgbClr val="F97316"/>
-                </a:solidFill>
-                <a:latin typeface="Segoe UI"/>
-              </a:rPr>
-              <a:t>— </a:t>
-            </a:r>
-            <a:r>
-              <a:rPr sz="1800" b="0">
-                <a:solidFill>
-                  <a:srgbClr val="F8FAFC"/>
-                </a:solidFill>
-                <a:latin typeface="Segoe UI"/>
-              </a:rPr>
-              <a:t>Cross-cutting: </a:t>
-            </a:r>
-            <a:r>
-              <a:rPr sz="1800" b="1">
-                <a:solidFill>
-                  <a:srgbClr val="F8FAFC"/>
-                </a:solidFill>
-                <a:latin typeface="Segoe UI"/>
-              </a:rPr>
-              <a:t>Auditable Emissions Layer</a:t>
-            </a:r>
-            <a:r>
-              <a:rPr sz="1800" b="0">
-                <a:solidFill>
-                  <a:srgbClr val="F8FAFC"/>
-                </a:solidFill>
-                <a:latin typeface="Segoe UI"/>
-              </a:rPr>
-              <a:t> (Problem 3) rides on the fuel model.</a:t>
-            </a:r>
-          </a:p>
-        </p:txBody>
-      </p:sp>
-      <p:sp>
-        <p:nvSpPr>
-          <p:cNvPr id="5" name="Rectangle 4"/>
+              <a:t> rides on the same fuel model, so it needs no sensor the other three have not already earned.</a:t>
+            </a:r>
+          </a:p>
+        </p:txBody>
+      </p:sp>
+      <p:sp>
+        <p:nvSpPr>
+          <p:cNvPr id="20" name="Rectangle 19"/>
           <p:cNvSpPr/>
           <p:nvPr/>
         </p:nvSpPr>
@@ -10897,7 +11658,7 @@
       </p:sp>
       <p:sp>
         <p:nvSpPr>
-          <p:cNvPr id="6" name="TextBox 5"/>
+          <p:cNvPr id="21" name="TextBox 20"/>
           <p:cNvSpPr txBox="1"/>
           <p:nvPr/>
         </p:nvSpPr>
@@ -10931,7 +11692,7 @@
       </p:sp>
       <p:sp>
         <p:nvSpPr>
-          <p:cNvPr id="7" name="TextBox 6"/>
+          <p:cNvPr id="22" name="TextBox 21"/>
           <p:cNvSpPr txBox="1"/>
           <p:nvPr/>
         </p:nvSpPr>
@@ -12927,36 +13688,515 @@
               <a:t>). The honesty commitment is a validator.</a:t>
             </a:r>
           </a:p>
-          <a:p>
-            <a:pPr>
-              <a:spcAft>
-                <a:spcPts val="900"/>
-              </a:spcAft>
-            </a:pPr>
-            <a:r>
-              <a:rPr sz="1800">
+        </p:txBody>
+      </p:sp>
+      <p:sp>
+        <p:nvSpPr>
+          <p:cNvPr id="5" name="Rounded Rectangle 4"/>
+          <p:cNvSpPr/>
+          <p:nvPr/>
+        </p:nvSpPr>
+        <p:spPr>
+          <a:xfrm>
+            <a:off x="4480560" y="1600200"/>
+            <a:ext cx="3200400" cy="713232"/>
+          </a:xfrm>
+          <a:prstGeom prst="roundRect">
+            <a:avLst>
+              <a:gd name="adj" fmla="val 12000"/>
+            </a:avLst>
+          </a:prstGeom>
+          <a:solidFill>
+            <a:srgbClr val="0B1220"/>
+          </a:solidFill>
+          <a:ln w="19050">
+            <a:solidFill>
+              <a:srgbClr val="F97316"/>
+            </a:solidFill>
+          </a:ln>
+          <a:effectLst/>
+        </p:spPr>
+        <p:style>
+          <a:lnRef idx="1">
+            <a:schemeClr val="accent1"/>
+          </a:lnRef>
+          <a:fillRef idx="3">
+            <a:schemeClr val="accent1"/>
+          </a:fillRef>
+          <a:effectRef idx="2">
+            <a:schemeClr val="accent1"/>
+          </a:effectRef>
+          <a:fontRef idx="minor">
+            <a:schemeClr val="lt1"/>
+          </a:fontRef>
+        </p:style>
+        <p:txBody>
+          <a:bodyPr rtlCol="0" anchor="ctr" wrap="square" lIns="73152" rIns="73152" tIns="36576" bIns="36576"/>
+          <a:lstStyle/>
+          <a:p>
+            <a:pPr algn="ctr"/>
+            <a:r>
+              <a:rPr sz="1250" b="1">
+                <a:solidFill>
+                  <a:srgbClr val="F8FAFC"/>
+                </a:solidFill>
+                <a:latin typeface="Segoe UI"/>
+              </a:rPr>
+              <a:t>Exhaust gas temperature</a:t>
+            </a:r>
+          </a:p>
+          <a:p>
+            <a:pPr algn="ctr"/>
+            <a:r>
+              <a:rPr sz="950">
                 <a:solidFill>
                   <a:srgbClr val="F97316"/>
                 </a:solidFill>
-                <a:latin typeface="Segoe UI"/>
-              </a:rPr>
-              <a:t>— </a:t>
-            </a:r>
-            <a:r>
-              <a:rPr sz="1800" b="0">
-                <a:solidFill>
-                  <a:srgbClr val="F8FAFC"/>
-                </a:solidFill>
-                <a:latin typeface="Segoe UI"/>
-              </a:rPr>
-              <a:t>The Problem 1 → Problem 2 link is priced: a worn engine's fuel penalty is a line item in litres/hour and pesos/hour.</a:t>
-            </a:r>
-          </a:p>
-        </p:txBody>
-      </p:sp>
-      <p:sp>
-        <p:nvSpPr>
-          <p:cNvPr id="5" name="Rectangle 4"/>
+                <a:latin typeface="Consolas"/>
+              </a:rPr>
+              <a:t>one sensor, over baseline</a:t>
+            </a:r>
+          </a:p>
+        </p:txBody>
+      </p:sp>
+      <p:sp>
+        <p:nvSpPr>
+          <p:cNvPr id="6" name="Rounded Rectangle 5"/>
+          <p:cNvSpPr/>
+          <p:nvPr/>
+        </p:nvSpPr>
+        <p:spPr>
+          <a:xfrm>
+            <a:off x="658368" y="2834640"/>
+            <a:ext cx="3017520" cy="713232"/>
+          </a:xfrm>
+          <a:prstGeom prst="roundRect">
+            <a:avLst>
+              <a:gd name="adj" fmla="val 12000"/>
+            </a:avLst>
+          </a:prstGeom>
+          <a:solidFill>
+            <a:srgbClr val="0B1220"/>
+          </a:solidFill>
+          <a:ln w="12700">
+            <a:solidFill>
+              <a:srgbClr val="1E293B"/>
+            </a:solidFill>
+          </a:ln>
+          <a:effectLst/>
+        </p:spPr>
+        <p:style>
+          <a:lnRef idx="1">
+            <a:schemeClr val="accent1"/>
+          </a:lnRef>
+          <a:fillRef idx="3">
+            <a:schemeClr val="accent1"/>
+          </a:fillRef>
+          <a:effectRef idx="2">
+            <a:schemeClr val="accent1"/>
+          </a:effectRef>
+          <a:fontRef idx="minor">
+            <a:schemeClr val="lt1"/>
+          </a:fontRef>
+        </p:style>
+        <p:txBody>
+          <a:bodyPr rtlCol="0" anchor="ctr" wrap="square" lIns="73152" rIns="73152" tIns="36576" bIns="36576"/>
+          <a:lstStyle/>
+          <a:p>
+            <a:pPr algn="ctr"/>
+            <a:r>
+              <a:rPr sz="1250" b="1">
+                <a:solidFill>
+                  <a:srgbClr val="F8FAFC"/>
+                </a:solidFill>
+                <a:latin typeface="Segoe UI"/>
+              </a:rPr>
+              <a:t>Robust z-score + PCA</a:t>
+            </a:r>
+          </a:p>
+          <a:p>
+            <a:pPr algn="ctr"/>
+            <a:r>
+              <a:rPr sz="950">
+                <a:solidFill>
+                  <a:srgbClr val="B6C2D4"/>
+                </a:solidFill>
+                <a:latin typeface="Consolas"/>
+              </a:rPr>
+              <a:t>learns healthy correlations</a:t>
+            </a:r>
+          </a:p>
+        </p:txBody>
+      </p:sp>
+      <p:sp>
+        <p:nvSpPr>
+          <p:cNvPr id="7" name="Rounded Rectangle 6"/>
+          <p:cNvSpPr/>
+          <p:nvPr/>
+        </p:nvSpPr>
+        <p:spPr>
+          <a:xfrm>
+            <a:off x="8549640" y="2834640"/>
+            <a:ext cx="3017520" cy="713232"/>
+          </a:xfrm>
+          <a:prstGeom prst="roundRect">
+            <a:avLst>
+              <a:gd name="adj" fmla="val 12000"/>
+            </a:avLst>
+          </a:prstGeom>
+          <a:solidFill>
+            <a:srgbClr val="0B1220"/>
+          </a:solidFill>
+          <a:ln w="12700">
+            <a:solidFill>
+              <a:srgbClr val="1E293B"/>
+            </a:solidFill>
+          </a:ln>
+          <a:effectLst/>
+        </p:spPr>
+        <p:style>
+          <a:lnRef idx="1">
+            <a:schemeClr val="accent1"/>
+          </a:lnRef>
+          <a:fillRef idx="3">
+            <a:schemeClr val="accent1"/>
+          </a:fillRef>
+          <a:effectRef idx="2">
+            <a:schemeClr val="accent1"/>
+          </a:effectRef>
+          <a:fontRef idx="minor">
+            <a:schemeClr val="lt1"/>
+          </a:fontRef>
+        </p:style>
+        <p:txBody>
+          <a:bodyPr rtlCol="0" anchor="ctr" wrap="square" lIns="73152" rIns="73152" tIns="36576" bIns="36576"/>
+          <a:lstStyle/>
+          <a:p>
+            <a:pPr algn="ctr"/>
+            <a:r>
+              <a:rPr sz="1250" b="1">
+                <a:solidFill>
+                  <a:srgbClr val="F8FAFC"/>
+                </a:solidFill>
+                <a:latin typeface="Segoe UI"/>
+              </a:rPr>
+              <a:t>XGBoost wear model</a:t>
+            </a:r>
+          </a:p>
+          <a:p>
+            <a:pPr algn="ctr"/>
+            <a:r>
+              <a:rPr sz="950">
+                <a:solidFill>
+                  <a:srgbClr val="B6C2D4"/>
+                </a:solidFill>
+                <a:latin typeface="Consolas"/>
+              </a:rPr>
+              <a:t>1,326 degradation states</a:t>
+            </a:r>
+          </a:p>
+        </p:txBody>
+      </p:sp>
+      <p:sp>
+        <p:nvSpPr>
+          <p:cNvPr id="8" name="Rounded Rectangle 7"/>
+          <p:cNvSpPr/>
+          <p:nvPr/>
+        </p:nvSpPr>
+        <p:spPr>
+          <a:xfrm>
+            <a:off x="658368" y="3886200"/>
+            <a:ext cx="3017520" cy="713232"/>
+          </a:xfrm>
+          <a:prstGeom prst="roundRect">
+            <a:avLst>
+              <a:gd name="adj" fmla="val 12000"/>
+            </a:avLst>
+          </a:prstGeom>
+          <a:solidFill>
+            <a:srgbClr val="0B1220"/>
+          </a:solidFill>
+          <a:ln w="12700">
+            <a:solidFill>
+              <a:srgbClr val="1E293B"/>
+            </a:solidFill>
+          </a:ln>
+          <a:effectLst/>
+        </p:spPr>
+        <p:style>
+          <a:lnRef idx="1">
+            <a:schemeClr val="accent1"/>
+          </a:lnRef>
+          <a:fillRef idx="3">
+            <a:schemeClr val="accent1"/>
+          </a:fillRef>
+          <a:effectRef idx="2">
+            <a:schemeClr val="accent1"/>
+          </a:effectRef>
+          <a:fontRef idx="minor">
+            <a:schemeClr val="lt1"/>
+          </a:fontRef>
+        </p:style>
+        <p:txBody>
+          <a:bodyPr rtlCol="0" anchor="ctr" wrap="square" lIns="73152" rIns="73152" tIns="36576" bIns="36576"/>
+          <a:lstStyle/>
+          <a:p>
+            <a:pPr algn="ctr"/>
+            <a:r>
+              <a:rPr sz="1250" b="1">
+                <a:solidFill>
+                  <a:srgbClr val="F8FAFC"/>
+                </a:solidFill>
+                <a:latin typeface="Segoe UI"/>
+              </a:rPr>
+              <a:t>"Coolant is drifting"</a:t>
+            </a:r>
+          </a:p>
+          <a:p>
+            <a:pPr algn="ctr"/>
+            <a:r>
+              <a:rPr sz="950">
+                <a:solidFill>
+                  <a:srgbClr val="B6C2D4"/>
+                </a:solidFill>
+                <a:latin typeface="Consolas"/>
+              </a:rPr>
+              <a:t>names the stream, never a date</a:t>
+            </a:r>
+          </a:p>
+        </p:txBody>
+      </p:sp>
+      <p:sp>
+        <p:nvSpPr>
+          <p:cNvPr id="9" name="Rounded Rectangle 8"/>
+          <p:cNvSpPr/>
+          <p:nvPr/>
+        </p:nvSpPr>
+        <p:spPr>
+          <a:xfrm>
+            <a:off x="8549640" y="3886200"/>
+            <a:ext cx="3017520" cy="713232"/>
+          </a:xfrm>
+          <a:prstGeom prst="roundRect">
+            <a:avLst>
+              <a:gd name="adj" fmla="val 12000"/>
+            </a:avLst>
+          </a:prstGeom>
+          <a:solidFill>
+            <a:srgbClr val="0B1220"/>
+          </a:solidFill>
+          <a:ln w="12700">
+            <a:solidFill>
+              <a:srgbClr val="1E293B"/>
+            </a:solidFill>
+          </a:ln>
+          <a:effectLst/>
+        </p:spPr>
+        <p:style>
+          <a:lnRef idx="1">
+            <a:schemeClr val="accent1"/>
+          </a:lnRef>
+          <a:fillRef idx="3">
+            <a:schemeClr val="accent1"/>
+          </a:fillRef>
+          <a:effectRef idx="2">
+            <a:schemeClr val="accent1"/>
+          </a:effectRef>
+          <a:fontRef idx="minor">
+            <a:schemeClr val="lt1"/>
+          </a:fontRef>
+        </p:style>
+        <p:txBody>
+          <a:bodyPr rtlCol="0" anchor="ctr" wrap="square" lIns="73152" rIns="73152" tIns="36576" bIns="36576"/>
+          <a:lstStyle/>
+          <a:p>
+            <a:pPr algn="ctr"/>
+            <a:r>
+              <a:rPr sz="1250" b="1">
+                <a:solidFill>
+                  <a:srgbClr val="F8FAFC"/>
+                </a:solidFill>
+                <a:latin typeface="Segoe UI"/>
+              </a:rPr>
+              <a:t>+ litres / hour</a:t>
+            </a:r>
+          </a:p>
+          <a:p>
+            <a:pPr algn="ctr"/>
+            <a:r>
+              <a:rPr sz="950">
+                <a:solidFill>
+                  <a:srgbClr val="B6C2D4"/>
+                </a:solidFill>
+                <a:latin typeface="Consolas"/>
+              </a:rPr>
+              <a:t>the wear priced in fuel</a:t>
+            </a:r>
+          </a:p>
+        </p:txBody>
+      </p:sp>
+      <p:sp>
+        <p:nvSpPr>
+          <p:cNvPr id="10" name="Can 9"/>
+          <p:cNvSpPr/>
+          <p:nvPr/>
+        </p:nvSpPr>
+        <p:spPr>
+          <a:xfrm>
+            <a:off x="3703320" y="1837944"/>
+            <a:ext cx="640080" cy="114300"/>
+          </a:xfrm>
+          <a:prstGeom prst="can">
+            <a:avLst/>
+          </a:prstGeom>
+          <a:solidFill>
+            <a:srgbClr val="1E293B"/>
+          </a:solidFill>
+          <a:ln>
+            <a:noFill/>
+          </a:ln>
+          <a:effectLst/>
+        </p:spPr>
+        <p:style>
+          <a:lnRef idx="1">
+            <a:schemeClr val="accent1"/>
+          </a:lnRef>
+          <a:fillRef idx="3">
+            <a:schemeClr val="accent1"/>
+          </a:fillRef>
+          <a:effectRef idx="2">
+            <a:schemeClr val="accent1"/>
+          </a:effectRef>
+          <a:fontRef idx="minor">
+            <a:schemeClr val="lt1"/>
+          </a:fontRef>
+        </p:style>
+        <p:txBody>
+          <a:bodyPr rtlCol="0" anchor="ctr"/>
+          <a:lstStyle/>
+          <a:p>
+            <a:pPr algn="ctr"/>
+          </a:p>
+        </p:txBody>
+      </p:sp>
+      <p:sp>
+        <p:nvSpPr>
+          <p:cNvPr id="11" name="Right Arrow 10"/>
+          <p:cNvSpPr/>
+          <p:nvPr/>
+        </p:nvSpPr>
+        <p:spPr>
+          <a:xfrm>
+            <a:off x="7772400" y="1837944"/>
+            <a:ext cx="640080" cy="114300"/>
+          </a:xfrm>
+          <a:prstGeom prst="rightArrow">
+            <a:avLst/>
+          </a:prstGeom>
+          <a:solidFill>
+            <a:srgbClr val="1E293B"/>
+          </a:solidFill>
+          <a:ln>
+            <a:noFill/>
+          </a:ln>
+          <a:effectLst/>
+        </p:spPr>
+        <p:style>
+          <a:lnRef idx="1">
+            <a:schemeClr val="accent1"/>
+          </a:lnRef>
+          <a:fillRef idx="3">
+            <a:schemeClr val="accent1"/>
+          </a:fillRef>
+          <a:effectRef idx="2">
+            <a:schemeClr val="accent1"/>
+          </a:effectRef>
+          <a:fontRef idx="minor">
+            <a:schemeClr val="lt1"/>
+          </a:fontRef>
+        </p:style>
+        <p:txBody>
+          <a:bodyPr rtlCol="0" anchor="ctr"/>
+          <a:lstStyle/>
+          <a:p>
+            <a:pPr algn="ctr"/>
+          </a:p>
+        </p:txBody>
+      </p:sp>
+      <p:sp>
+        <p:nvSpPr>
+          <p:cNvPr id="12" name="TextBox 11"/>
+          <p:cNvSpPr txBox="1"/>
+          <p:nvPr/>
+        </p:nvSpPr>
+        <p:spPr>
+          <a:xfrm>
+            <a:off x="658368" y="4754880"/>
+            <a:ext cx="10874959" cy="384048"/>
+          </a:xfrm>
+          <a:prstGeom prst="rect">
+            <a:avLst/>
+          </a:prstGeom>
+          <a:noFill/>
+        </p:spPr>
+        <p:txBody>
+          <a:bodyPr wrap="square">
+            <a:spAutoFit/>
+          </a:bodyPr>
+          <a:lstStyle/>
+          <a:p>
+            <a:pPr algn="ctr"/>
+            <a:r>
+              <a:rPr sz="1100" b="0">
+                <a:solidFill>
+                  <a:srgbClr val="B6C2D4"/>
+                </a:solidFill>
+                <a:latin typeface="Segoe UI"/>
+              </a:rPr>
+              <a:t>A worn engine runs hotter at the same load. The </a:t>
+            </a:r>
+            <a:r>
+              <a:rPr sz="1100" b="1">
+                <a:solidFill>
+                  <a:srgbClr val="B6C2D4"/>
+                </a:solidFill>
+                <a:latin typeface="Segoe UI"/>
+              </a:rPr>
+              <a:t>detector</a:t>
+            </a:r>
+            <a:r>
+              <a:rPr sz="1100" b="0">
+                <a:solidFill>
+                  <a:srgbClr val="B6C2D4"/>
+                </a:solidFill>
+                <a:latin typeface="Segoe UI"/>
+              </a:rPr>
+              <a:t> reads that as an anomaly; the </a:t>
+            </a:r>
+            <a:r>
+              <a:rPr sz="1100" b="1">
+                <a:solidFill>
+                  <a:srgbClr val="B6C2D4"/>
+                </a:solidFill>
+                <a:latin typeface="Segoe UI"/>
+              </a:rPr>
+              <a:t>fuel model</a:t>
+            </a:r>
+            <a:r>
+              <a:rPr sz="1100" b="0">
+                <a:solidFill>
+                  <a:srgbClr val="B6C2D4"/>
+                </a:solidFill>
+                <a:latin typeface="Segoe UI"/>
+              </a:rPr>
+              <a:t> prices it in litres per hour. So "your engine is degrading" and "it is costing you money" are not two claims — they are one measurement, read twice.</a:t>
+            </a:r>
+          </a:p>
+        </p:txBody>
+      </p:sp>
+      <p:sp>
+        <p:nvSpPr>
+          <p:cNvPr id="13" name="Rectangle 12"/>
           <p:cNvSpPr/>
           <p:nvPr/>
         </p:nvSpPr>
@@ -13000,7 +14240,7 @@
       </p:sp>
       <p:sp>
         <p:nvSpPr>
-          <p:cNvPr id="6" name="TextBox 5"/>
+          <p:cNvPr id="14" name="TextBox 13"/>
           <p:cNvSpPr txBox="1"/>
           <p:nvPr/>
         </p:nvSpPr>
@@ -13034,7 +14274,7 @@
       </p:sp>
       <p:sp>
         <p:nvSpPr>
-          <p:cNvPr id="7" name="TextBox 6"/>
+          <p:cNvPr id="15" name="TextBox 14"/>
           <p:cNvSpPr txBox="1"/>
           <p:nvPr/>
         </p:nvSpPr>

--- a/docs/Marine-AI-Pitch-Deck.pptx
+++ b/docs/Marine-AI-Pitch-Deck.pptx
@@ -23,6 +23,13 @@
     <p:sldId id="271" r:id="rId23"/>
     <p:sldId id="272" r:id="rId24"/>
     <p:sldId id="273" r:id="rId25"/>
+    <p:sldId id="274" r:id="rId26"/>
+    <p:sldId id="275" r:id="rId27"/>
+    <p:sldId id="276" r:id="rId28"/>
+    <p:sldId id="277" r:id="rId29"/>
+    <p:sldId id="278" r:id="rId30"/>
+    <p:sldId id="279" r:id="rId31"/>
+    <p:sldId id="280" r:id="rId32"/>
   </p:sldIdLst>
   <p:sldSz cx="12191695" cy="6858000" type="screen4x3"/>
   <p:notesSz cx="6858000" cy="9144000"/>
@@ -1568,12 +1575,204 @@
           <a:lstStyle/>
           <a:p>
             <a:r>
-              <a:t>Close on the retrofit promise and the honesty posture. Invite</a:t>
-            </a:r>
-          </a:p>
-          <a:p>
-            <a:r>
-              <a:t>the Q&amp;A — the deviations slide means we welcome the hard questions.</a:t>
+              <a:t>The rubric asks why this team is credible to build AND scale it.</a:t>
+            </a:r>
+          </a:p>
+          <a:p>
+            <a:r>
+              <a:t>Answer with the split: a hardware-majority team means the sensor spec and the failure</a:t>
+            </a:r>
+          </a:p>
+          <a:p>
+            <a:r>
+              <a:t>modes are real engineering judgement, not guesses from a laptop — and the AI lead built</a:t>
+            </a:r>
+          </a:p>
+          <a:p>
+            <a:r>
+              <a:t>the whole software stack, so nothing here is outsourced or glued together. Close on the</a:t>
+            </a:r>
+          </a:p>
+          <a:p>
+            <a:r>
+              <a:t>retrofit promise and the honesty posture, then invite Q&amp;A: the deviations slide means</a:t>
+            </a:r>
+          </a:p>
+          <a:p>
+            <a:r>
+              <a:t>we welcome the hard questions.</a:t>
+            </a:r>
+          </a:p>
+          <a:p/>
+          <a:p>
+            <a:r>
+              <a:t>---</a:t>
+            </a:r>
+          </a:p>
+        </p:txBody>
+      </p:sp>
+      <p:sp>
+        <p:nvSpPr>
+          <p:cNvPr id="4" name="Slide Number Placeholder 3"/>
+          <p:cNvSpPr>
+            <a:spLocks noGrp="1"/>
+          </p:cNvSpPr>
+          <p:nvPr>
+            <p:ph type="sldNum" idx="5" sz="quarter"/>
+          </p:nvPr>
+        </p:nvSpPr>
+        <p:spPr/>
+      </p:sp>
+    </p:spTree>
+  </p:cSld>
+  <p:clrMapOvr>
+    <a:masterClrMapping/>
+  </p:clrMapOvr>
+</p:notes>
+</file>
+
+<file path=ppt/notesSlides/notesSlide18.xml><?xml version="1.0" encoding="utf-8"?>
+<p:notes xmlns:a="http://schemas.openxmlformats.org/drawingml/2006/main" xmlns:p="http://schemas.openxmlformats.org/presentationml/2006/main" xmlns:r="http://schemas.openxmlformats.org/officeDocument/2006/relationships">
+  <p:cSld>
+    <p:spTree>
+      <p:nvGrpSpPr>
+        <p:cNvPr id="1" name=""/>
+        <p:cNvGrpSpPr/>
+        <p:nvPr/>
+      </p:nvGrpSpPr>
+      <p:grpSpPr>
+        <a:xfrm>
+          <a:off x="0" y="0"/>
+          <a:ext cx="0" cy="0"/>
+          <a:chOff x="0" y="0"/>
+          <a:chExt cx="0" cy="0"/>
+        </a:xfrm>
+      </p:grpSpPr>
+      <p:sp>
+        <p:nvSpPr>
+          <p:cNvPr id="2" name="Slide Image Placeholder 1"/>
+          <p:cNvSpPr>
+            <a:spLocks noGrp="1"/>
+          </p:cNvSpPr>
+          <p:nvPr>
+            <p:ph type="sldImg" idx="2"/>
+          </p:nvPr>
+        </p:nvSpPr>
+        <p:spPr/>
+      </p:sp>
+      <p:sp>
+        <p:nvSpPr>
+          <p:cNvPr id="3" name="Notes Placeholder 2"/>
+          <p:cNvSpPr>
+            <a:spLocks noGrp="1"/>
+          </p:cNvSpPr>
+          <p:nvPr>
+            <p:ph type="body" idx="3" sz="quarter"/>
+          </p:nvPr>
+        </p:nvSpPr>
+        <p:spPr/>
+        <p:txBody>
+          <a:bodyPr/>
+          <a:lstStyle/>
+          <a:p>
+            <a:r>
+              <a:t>Lead with the registry: the code cannot fetch an undeclared source.</a:t>
+            </a:r>
+          </a:p>
+          <a:p>
+            <a:r>
+              <a:t>If asked whether anything is scraped, the answer is no and the enforcement is</a:t>
+            </a:r>
+          </a:p>
+          <a:p>
+            <a:r>
+              <a:t>mechanical. Volunteer C-MAPSS before they find it.</a:t>
+            </a:r>
+          </a:p>
+          <a:p/>
+          <a:p>
+            <a:r>
+              <a:t>---</a:t>
+            </a:r>
+          </a:p>
+        </p:txBody>
+      </p:sp>
+      <p:sp>
+        <p:nvSpPr>
+          <p:cNvPr id="4" name="Slide Number Placeholder 3"/>
+          <p:cNvSpPr>
+            <a:spLocks noGrp="1"/>
+          </p:cNvSpPr>
+          <p:nvPr>
+            <p:ph type="sldNum" idx="5" sz="quarter"/>
+          </p:nvPr>
+        </p:nvSpPr>
+        <p:spPr/>
+      </p:sp>
+    </p:spTree>
+  </p:cSld>
+  <p:clrMapOvr>
+    <a:masterClrMapping/>
+  </p:clrMapOvr>
+</p:notes>
+</file>
+
+<file path=ppt/notesSlides/notesSlide19.xml><?xml version="1.0" encoding="utf-8"?>
+<p:notes xmlns:a="http://schemas.openxmlformats.org/drawingml/2006/main" xmlns:p="http://schemas.openxmlformats.org/presentationml/2006/main" xmlns:r="http://schemas.openxmlformats.org/officeDocument/2006/relationships">
+  <p:cSld>
+    <p:spTree>
+      <p:nvGrpSpPr>
+        <p:cNvPr id="1" name=""/>
+        <p:cNvGrpSpPr/>
+        <p:nvPr/>
+      </p:nvGrpSpPr>
+      <p:grpSpPr>
+        <a:xfrm>
+          <a:off x="0" y="0"/>
+          <a:ext cx="0" cy="0"/>
+          <a:chOff x="0" y="0"/>
+          <a:chExt cx="0" cy="0"/>
+        </a:xfrm>
+      </p:grpSpPr>
+      <p:sp>
+        <p:nvSpPr>
+          <p:cNvPr id="2" name="Slide Image Placeholder 1"/>
+          <p:cNvSpPr>
+            <a:spLocks noGrp="1"/>
+          </p:cNvSpPr>
+          <p:nvPr>
+            <p:ph type="sldImg" idx="2"/>
+          </p:nvPr>
+        </p:nvSpPr>
+        <p:spPr/>
+      </p:sp>
+      <p:sp>
+        <p:nvSpPr>
+          <p:cNvPr id="3" name="Notes Placeholder 2"/>
+          <p:cNvSpPr>
+            <a:spLocks noGrp="1"/>
+          </p:cNvSpPr>
+          <p:nvPr>
+            <p:ph type="body" idx="3" sz="quarter"/>
+          </p:nvPr>
+        </p:nvSpPr>
+        <p:spPr/>
+        <p:txBody>
+          <a:bodyPr/>
+          <a:lstStyle/>
+          <a:p>
+            <a:r>
+              <a:t>The question behind this slide is "how much of your AI is just an</a:t>
+            </a:r>
+          </a:p>
+          <a:p>
+            <a:r>
+              <a:t>API call?" Answer: the API call writes English. Everything that produces a number was</a:t>
+            </a:r>
+          </a:p>
+          <a:p>
+            <a:r>
+              <a:t>trained or written by us. Point at the provenance badge on the live console.</a:t>
             </a:r>
           </a:p>
           <a:p/>
@@ -1666,6 +1865,527 @@
           <a:p>
             <a:r>
               <a:t>SERVES (rubric): Innovation &amp; Impact (15%); Local Relevance (12.5%). Ground the pitch in a real operator, the captain from [`PRODUCT.md`](../PRODUCT.md).</a:t>
+            </a:r>
+          </a:p>
+        </p:txBody>
+      </p:sp>
+      <p:sp>
+        <p:nvSpPr>
+          <p:cNvPr id="4" name="Slide Number Placeholder 3"/>
+          <p:cNvSpPr>
+            <a:spLocks noGrp="1"/>
+          </p:cNvSpPr>
+          <p:nvPr>
+            <p:ph type="sldNum" idx="5" sz="quarter"/>
+          </p:nvPr>
+        </p:nvSpPr>
+        <p:spPr/>
+      </p:sp>
+    </p:spTree>
+  </p:cSld>
+  <p:clrMapOvr>
+    <a:masterClrMapping/>
+  </p:clrMapOvr>
+</p:notes>
+</file>
+
+<file path=ppt/notesSlides/notesSlide20.xml><?xml version="1.0" encoding="utf-8"?>
+<p:notes xmlns:a="http://schemas.openxmlformats.org/drawingml/2006/main" xmlns:p="http://schemas.openxmlformats.org/presentationml/2006/main" xmlns:r="http://schemas.openxmlformats.org/officeDocument/2006/relationships">
+  <p:cSld>
+    <p:spTree>
+      <p:nvGrpSpPr>
+        <p:cNvPr id="1" name=""/>
+        <p:cNvGrpSpPr/>
+        <p:nvPr/>
+      </p:nvGrpSpPr>
+      <p:grpSpPr>
+        <a:xfrm>
+          <a:off x="0" y="0"/>
+          <a:ext cx="0" cy="0"/>
+          <a:chOff x="0" y="0"/>
+          <a:chExt cx="0" cy="0"/>
+        </a:xfrm>
+      </p:grpSpPr>
+      <p:sp>
+        <p:nvSpPr>
+          <p:cNvPr id="2" name="Slide Image Placeholder 1"/>
+          <p:cNvSpPr>
+            <a:spLocks noGrp="1"/>
+          </p:cNvSpPr>
+          <p:nvPr>
+            <p:ph type="sldImg" idx="2"/>
+          </p:nvPr>
+        </p:nvSpPr>
+        <p:spPr/>
+      </p:sp>
+      <p:sp>
+        <p:nvSpPr>
+          <p:cNvPr id="3" name="Notes Placeholder 2"/>
+          <p:cNvSpPr>
+            <a:spLocks noGrp="1"/>
+          </p:cNvSpPr>
+          <p:nvPr>
+            <p:ph type="body" idx="3" sz="quarter"/>
+          </p:nvPr>
+        </p:nvSpPr>
+        <p:spPr/>
+        <p:txBody>
+          <a:bodyPr/>
+          <a:lstStyle/>
+          <a:p>
+            <a:r>
+              <a:t>Say "no hardware" first, without hedging — the brief requires the</a:t>
+            </a:r>
+          </a:p>
+          <a:p>
+            <a:r>
+              <a:t>declaration in the deck. Then pivot: we know exactly what to buy and in what order,</a:t>
+            </a:r>
+          </a:p>
+          <a:p>
+            <a:r>
+              <a:t>and the fuel-flow meter is first because it closes the loop on the model.</a:t>
+            </a:r>
+          </a:p>
+          <a:p/>
+          <a:p>
+            <a:r>
+              <a:t>---</a:t>
+            </a:r>
+          </a:p>
+        </p:txBody>
+      </p:sp>
+      <p:sp>
+        <p:nvSpPr>
+          <p:cNvPr id="4" name="Slide Number Placeholder 3"/>
+          <p:cNvSpPr>
+            <a:spLocks noGrp="1"/>
+          </p:cNvSpPr>
+          <p:nvPr>
+            <p:ph type="sldNum" idx="5" sz="quarter"/>
+          </p:nvPr>
+        </p:nvSpPr>
+        <p:spPr/>
+      </p:sp>
+    </p:spTree>
+  </p:cSld>
+  <p:clrMapOvr>
+    <a:masterClrMapping/>
+  </p:clrMapOvr>
+</p:notes>
+</file>
+
+<file path=ppt/notesSlides/notesSlide21.xml><?xml version="1.0" encoding="utf-8"?>
+<p:notes xmlns:a="http://schemas.openxmlformats.org/drawingml/2006/main" xmlns:p="http://schemas.openxmlformats.org/presentationml/2006/main" xmlns:r="http://schemas.openxmlformats.org/officeDocument/2006/relationships">
+  <p:cSld>
+    <p:spTree>
+      <p:nvGrpSpPr>
+        <p:cNvPr id="1" name=""/>
+        <p:cNvGrpSpPr/>
+        <p:nvPr/>
+      </p:nvGrpSpPr>
+      <p:grpSpPr>
+        <a:xfrm>
+          <a:off x="0" y="0"/>
+          <a:ext cx="0" cy="0"/>
+          <a:chOff x="0" y="0"/>
+          <a:chExt cx="0" cy="0"/>
+        </a:xfrm>
+      </p:grpSpPr>
+      <p:sp>
+        <p:nvSpPr>
+          <p:cNvPr id="2" name="Slide Image Placeholder 1"/>
+          <p:cNvSpPr>
+            <a:spLocks noGrp="1"/>
+          </p:cNvSpPr>
+          <p:nvPr>
+            <p:ph type="sldImg" idx="2"/>
+          </p:nvPr>
+        </p:nvSpPr>
+        <p:spPr/>
+      </p:sp>
+      <p:sp>
+        <p:nvSpPr>
+          <p:cNvPr id="3" name="Notes Placeholder 2"/>
+          <p:cNvSpPr>
+            <a:spLocks noGrp="1"/>
+          </p:cNvSpPr>
+          <p:nvPr>
+            <p:ph type="body" idx="3" sz="quarter"/>
+          </p:nvPr>
+        </p:nvSpPr>
+        <p:spPr/>
+        <p:txBody>
+          <a:bodyPr/>
+          <a:lstStyle/>
+          <a:p>
+            <a:r>
+              <a:t>The strongest slide in the reserve deck. Bias 3 is the one to demo</a:t>
+            </a:r>
+          </a:p>
+          <a:p>
+            <a:r>
+              <a:t>if there is time — a measured before/after, not a claim. The "no baseline" rows are</a:t>
+            </a:r>
+          </a:p>
+          <a:p>
+            <a:r>
+              <a:t>the point, not a gap.</a:t>
+            </a:r>
+          </a:p>
+          <a:p/>
+          <a:p>
+            <a:r>
+              <a:t>---</a:t>
+            </a:r>
+          </a:p>
+        </p:txBody>
+      </p:sp>
+      <p:sp>
+        <p:nvSpPr>
+          <p:cNvPr id="4" name="Slide Number Placeholder 3"/>
+          <p:cNvSpPr>
+            <a:spLocks noGrp="1"/>
+          </p:cNvSpPr>
+          <p:nvPr>
+            <p:ph type="sldNum" idx="5" sz="quarter"/>
+          </p:nvPr>
+        </p:nvSpPr>
+        <p:spPr/>
+      </p:sp>
+    </p:spTree>
+  </p:cSld>
+  <p:clrMapOvr>
+    <a:masterClrMapping/>
+  </p:clrMapOvr>
+</p:notes>
+</file>
+
+<file path=ppt/notesSlides/notesSlide22.xml><?xml version="1.0" encoding="utf-8"?>
+<p:notes xmlns:a="http://schemas.openxmlformats.org/drawingml/2006/main" xmlns:p="http://schemas.openxmlformats.org/presentationml/2006/main" xmlns:r="http://schemas.openxmlformats.org/officeDocument/2006/relationships">
+  <p:cSld>
+    <p:spTree>
+      <p:nvGrpSpPr>
+        <p:cNvPr id="1" name=""/>
+        <p:cNvGrpSpPr/>
+        <p:nvPr/>
+      </p:nvGrpSpPr>
+      <p:grpSpPr>
+        <a:xfrm>
+          <a:off x="0" y="0"/>
+          <a:ext cx="0" cy="0"/>
+          <a:chOff x="0" y="0"/>
+          <a:chExt cx="0" cy="0"/>
+        </a:xfrm>
+      </p:grpSpPr>
+      <p:sp>
+        <p:nvSpPr>
+          <p:cNvPr id="2" name="Slide Image Placeholder 1"/>
+          <p:cNvSpPr>
+            <a:spLocks noGrp="1"/>
+          </p:cNvSpPr>
+          <p:nvPr>
+            <p:ph type="sldImg" idx="2"/>
+          </p:nvPr>
+        </p:nvSpPr>
+        <p:spPr/>
+      </p:sp>
+      <p:sp>
+        <p:nvSpPr>
+          <p:cNvPr id="3" name="Notes Placeholder 2"/>
+          <p:cNvSpPr>
+            <a:spLocks noGrp="1"/>
+          </p:cNvSpPr>
+          <p:nvPr>
+            <p:ph type="body" idx="3" sz="quarter"/>
+          </p:nvPr>
+        </p:nvSpPr>
+        <p:spPr/>
+        <p:txBody>
+          <a:bodyPr/>
+          <a:lstStyle/>
+          <a:p>
+            <a:r>
+              <a:t>If they ask one architecture question it will be "where does the LLM</a:t>
+            </a:r>
+          </a:p>
+          <a:p>
+            <a:r>
+              <a:t>sit?" — that is the first line. The two boundary tests are the credibility moment: we</a:t>
+            </a:r>
+          </a:p>
+          <a:p>
+            <a:r>
+              <a:t>did not describe the boundary, we made it fail the build.</a:t>
+            </a:r>
+          </a:p>
+          <a:p/>
+          <a:p>
+            <a:r>
+              <a:t>---</a:t>
+            </a:r>
+          </a:p>
+        </p:txBody>
+      </p:sp>
+      <p:sp>
+        <p:nvSpPr>
+          <p:cNvPr id="4" name="Slide Number Placeholder 3"/>
+          <p:cNvSpPr>
+            <a:spLocks noGrp="1"/>
+          </p:cNvSpPr>
+          <p:nvPr>
+            <p:ph type="sldNum" idx="5" sz="quarter"/>
+          </p:nvPr>
+        </p:nvSpPr>
+        <p:spPr/>
+      </p:sp>
+    </p:spTree>
+  </p:cSld>
+  <p:clrMapOvr>
+    <a:masterClrMapping/>
+  </p:clrMapOvr>
+</p:notes>
+</file>
+
+<file path=ppt/notesSlides/notesSlide23.xml><?xml version="1.0" encoding="utf-8"?>
+<p:notes xmlns:a="http://schemas.openxmlformats.org/drawingml/2006/main" xmlns:p="http://schemas.openxmlformats.org/presentationml/2006/main" xmlns:r="http://schemas.openxmlformats.org/officeDocument/2006/relationships">
+  <p:cSld>
+    <p:spTree>
+      <p:nvGrpSpPr>
+        <p:cNvPr id="1" name=""/>
+        <p:cNvGrpSpPr/>
+        <p:nvPr/>
+      </p:nvGrpSpPr>
+      <p:grpSpPr>
+        <a:xfrm>
+          <a:off x="0" y="0"/>
+          <a:ext cx="0" cy="0"/>
+          <a:chOff x="0" y="0"/>
+          <a:chExt cx="0" cy="0"/>
+        </a:xfrm>
+      </p:grpSpPr>
+      <p:sp>
+        <p:nvSpPr>
+          <p:cNvPr id="2" name="Slide Image Placeholder 1"/>
+          <p:cNvSpPr>
+            <a:spLocks noGrp="1"/>
+          </p:cNvSpPr>
+          <p:nvPr>
+            <p:ph type="sldImg" idx="2"/>
+          </p:nvPr>
+        </p:nvSpPr>
+        <p:spPr/>
+      </p:sp>
+      <p:sp>
+        <p:nvSpPr>
+          <p:cNvPr id="3" name="Notes Placeholder 2"/>
+          <p:cNvSpPr>
+            <a:spLocks noGrp="1"/>
+          </p:cNvSpPr>
+          <p:nvPr>
+            <p:ph type="body" idx="3" sz="quarter"/>
+          </p:nvPr>
+        </p:nvSpPr>
+        <p:spPr/>
+        <p:txBody>
+          <a:bodyPr/>
+          <a:lstStyle/>
+          <a:p>
+            <a:r>
+              <a:t>If a judge doubts the ML is real, this is the slide. The 0.86 pooled</a:t>
+            </a:r>
+          </a:p>
+          <a:p>
+            <a:r>
+              <a:t>figure is deliberately on it — volunteering the weaker number is what makes the</a:t>
+            </a:r>
+          </a:p>
+          <a:p>
+            <a:r>
+              <a:t>stronger one believable.</a:t>
+            </a:r>
+          </a:p>
+          <a:p/>
+          <a:p>
+            <a:r>
+              <a:t>---</a:t>
+            </a:r>
+          </a:p>
+        </p:txBody>
+      </p:sp>
+      <p:sp>
+        <p:nvSpPr>
+          <p:cNvPr id="4" name="Slide Number Placeholder 3"/>
+          <p:cNvSpPr>
+            <a:spLocks noGrp="1"/>
+          </p:cNvSpPr>
+          <p:nvPr>
+            <p:ph type="sldNum" idx="5" sz="quarter"/>
+          </p:nvPr>
+        </p:nvSpPr>
+        <p:spPr/>
+      </p:sp>
+    </p:spTree>
+  </p:cSld>
+  <p:clrMapOvr>
+    <a:masterClrMapping/>
+  </p:clrMapOvr>
+</p:notes>
+</file>
+
+<file path=ppt/notesSlides/notesSlide24.xml><?xml version="1.0" encoding="utf-8"?>
+<p:notes xmlns:a="http://schemas.openxmlformats.org/drawingml/2006/main" xmlns:p="http://schemas.openxmlformats.org/presentationml/2006/main" xmlns:r="http://schemas.openxmlformats.org/officeDocument/2006/relationships">
+  <p:cSld>
+    <p:spTree>
+      <p:nvGrpSpPr>
+        <p:cNvPr id="1" name=""/>
+        <p:cNvGrpSpPr/>
+        <p:nvPr/>
+      </p:nvGrpSpPr>
+      <p:grpSpPr>
+        <a:xfrm>
+          <a:off x="0" y="0"/>
+          <a:ext cx="0" cy="0"/>
+          <a:chOff x="0" y="0"/>
+          <a:chExt cx="0" cy="0"/>
+        </a:xfrm>
+      </p:grpSpPr>
+      <p:sp>
+        <p:nvSpPr>
+          <p:cNvPr id="2" name="Slide Image Placeholder 1"/>
+          <p:cNvSpPr>
+            <a:spLocks noGrp="1"/>
+          </p:cNvSpPr>
+          <p:nvPr>
+            <p:ph type="sldImg" idx="2"/>
+          </p:nvPr>
+        </p:nvSpPr>
+        <p:spPr/>
+      </p:sp>
+      <p:sp>
+        <p:nvSpPr>
+          <p:cNvPr id="3" name="Notes Placeholder 2"/>
+          <p:cNvSpPr>
+            <a:spLocks noGrp="1"/>
+          </p:cNvSpPr>
+          <p:nvPr>
+            <p:ph type="body" idx="3" sz="quarter"/>
+          </p:nvPr>
+        </p:nvSpPr>
+        <p:spPr/>
+        <p:txBody>
+          <a:bodyPr/>
+          <a:lstStyle/>
+          <a:p>
+            <a:r>
+              <a:t>The organisers asked these three literally. Lead with "no new</a:t>
+            </a:r>
+          </a:p>
+          <a:p>
+            <a:r>
+              <a:t>hardware to evaluate it" — the lowest-friction sentence we own. The per-vessel baseline</a:t>
+            </a:r>
+          </a:p>
+          <a:p>
+            <a:r>
+              <a:t>is the technical fact that makes the scaling answer credible rather than aspirational.</a:t>
+            </a:r>
+          </a:p>
+          <a:p/>
+          <a:p>
+            <a:r>
+              <a:t>---</a:t>
+            </a:r>
+          </a:p>
+        </p:txBody>
+      </p:sp>
+      <p:sp>
+        <p:nvSpPr>
+          <p:cNvPr id="4" name="Slide Number Placeholder 3"/>
+          <p:cNvSpPr>
+            <a:spLocks noGrp="1"/>
+          </p:cNvSpPr>
+          <p:nvPr>
+            <p:ph type="sldNum" idx="5" sz="quarter"/>
+          </p:nvPr>
+        </p:nvSpPr>
+        <p:spPr/>
+      </p:sp>
+    </p:spTree>
+  </p:cSld>
+  <p:clrMapOvr>
+    <a:masterClrMapping/>
+  </p:clrMapOvr>
+</p:notes>
+</file>
+
+<file path=ppt/notesSlides/notesSlide25.xml><?xml version="1.0" encoding="utf-8"?>
+<p:notes xmlns:a="http://schemas.openxmlformats.org/drawingml/2006/main" xmlns:p="http://schemas.openxmlformats.org/presentationml/2006/main" xmlns:r="http://schemas.openxmlformats.org/officeDocument/2006/relationships">
+  <p:cSld>
+    <p:spTree>
+      <p:nvGrpSpPr>
+        <p:cNvPr id="1" name=""/>
+        <p:cNvGrpSpPr/>
+        <p:nvPr/>
+      </p:nvGrpSpPr>
+      <p:grpSpPr>
+        <a:xfrm>
+          <a:off x="0" y="0"/>
+          <a:ext cx="0" cy="0"/>
+          <a:chOff x="0" y="0"/>
+          <a:chExt cx="0" cy="0"/>
+        </a:xfrm>
+      </p:grpSpPr>
+      <p:sp>
+        <p:nvSpPr>
+          <p:cNvPr id="2" name="Slide Image Placeholder 1"/>
+          <p:cNvSpPr>
+            <a:spLocks noGrp="1"/>
+          </p:cNvSpPr>
+          <p:nvPr>
+            <p:ph type="sldImg" idx="2"/>
+          </p:nvPr>
+        </p:nvSpPr>
+        <p:spPr/>
+      </p:sp>
+      <p:sp>
+        <p:nvSpPr>
+          <p:cNvPr id="3" name="Notes Placeholder 2"/>
+          <p:cNvSpPr>
+            <a:spLocks noGrp="1"/>
+          </p:cNvSpPr>
+          <p:nvPr>
+            <p:ph type="body" idx="3" sz="quarter"/>
+          </p:nvPr>
+        </p:nvSpPr>
+        <p:spPr/>
+        <p:txBody>
+          <a:bodyPr/>
+          <a:lstStyle/>
+          <a:p>
+            <a:r>
+              <a:t>Bring this out *before* they find it. A judge who discovers an</a:t>
+            </a:r>
+          </a:p>
+          <a:p>
+            <a:r>
+              <a:t>unbuilt claim scores it as an overclaim; a team that tabled it first is scored as</a:t>
+            </a:r>
+          </a:p>
+          <a:p>
+            <a:r>
+              <a:t>rigorous. If asked "what would you fix with one more week?" — the TS test runner, and</a:t>
+            </a:r>
+          </a:p>
+          <a:p>
+            <a:r>
+              <a:t>the fuel-flow calibration path.</a:t>
+            </a:r>
+          </a:p>
+          <a:p/>
+          <a:p>
+            <a:r>
+              <a:t>---</a:t>
             </a:r>
           </a:p>
         </p:txBody>
@@ -5678,7 +6398,7 @@
                 </a:solidFill>
                 <a:latin typeface="Segoe UI"/>
               </a:rPr>
-              <a:t>Public demo URL · public repo URL (both must resolve — required, or DQ)</a:t>
+              <a:t>Public demo URL (must resolve signed-out, or DQ) · private repo URL, organizers added as viewers</a:t>
             </a:r>
           </a:p>
         </p:txBody>
@@ -6144,7 +6864,7 @@
                 </a:solidFill>
                 <a:latin typeface="Consolas"/>
               </a:rPr>
-              <a:t>9/17</a:t>
+              <a:t>9/24</a:t>
             </a:r>
           </a:p>
         </p:txBody>
@@ -6662,7 +7382,7 @@
                 </a:solidFill>
                 <a:latin typeface="Consolas"/>
               </a:rPr>
-              <a:t>10/17</a:t>
+              <a:t>10/24</a:t>
             </a:r>
           </a:p>
         </p:txBody>
@@ -7259,7 +7979,7 @@
                 </a:solidFill>
                 <a:latin typeface="Consolas"/>
               </a:rPr>
-              <a:t>11/17</a:t>
+              <a:t>11/24</a:t>
             </a:r>
           </a:p>
         </p:txBody>
@@ -8149,7 +8869,7 @@
                 </a:solidFill>
                 <a:latin typeface="Consolas"/>
               </a:rPr>
-              <a:t>12/17</a:t>
+              <a:t>12/24</a:t>
             </a:r>
           </a:p>
         </p:txBody>
@@ -8649,7 +9369,7 @@
                 </a:solidFill>
                 <a:latin typeface="Consolas"/>
               </a:rPr>
-              <a:t>13/17</a:t>
+              <a:t>13/24</a:t>
             </a:r>
           </a:p>
         </p:txBody>
@@ -9025,7 +9745,7 @@
                 </a:solidFill>
                 <a:latin typeface="Consolas"/>
               </a:rPr>
-              <a:t>14/17</a:t>
+              <a:t>14/24</a:t>
             </a:r>
           </a:p>
         </p:txBody>
@@ -9401,7 +10121,7 @@
                 </a:solidFill>
                 <a:latin typeface="Consolas"/>
               </a:rPr>
-              <a:t>15/17</a:t>
+              <a:t>15/24</a:t>
             </a:r>
           </a:p>
         </p:txBody>
@@ -9510,16 +10230,451 @@
           </a:p>
         </p:txBody>
       </p:sp>
-      <p:sp>
-        <p:nvSpPr>
-          <p:cNvPr id="4" name="TextBox 3"/>
+      <p:graphicFrame>
+        <p:nvGraphicFramePr>
+          <p:cNvPr id="4" name="Table 3"/>
+          <p:cNvGraphicFramePr>
+            <a:graphicFrameLocks noGrp="1"/>
+          </p:cNvGraphicFramePr>
+          <p:nvPr/>
+        </p:nvGraphicFramePr>
+        <p:xfrm>
+          <a:off x="658368" y="1600200"/>
+          <a:ext cx="10874959" cy="2304288"/>
+        </p:xfrm>
+        <a:graphic>
+          <a:graphicData uri="http://schemas.openxmlformats.org/drawingml/2006/table">
+            <a:tbl>
+              <a:tblPr firstRow="1" bandRow="1">
+                <a:tableStyleId>{5C22544A-7EE6-4342-B048-85BDC9FD1C3A}</a:tableStyleId>
+              </a:tblPr>
+              <a:tblGrid>
+                <a:gridCol w="3624986"/>
+                <a:gridCol w="3624986"/>
+                <a:gridCol w="3624987"/>
+              </a:tblGrid>
+              <a:tr h="384048">
+                <a:tc>
+                  <a:txBody>
+                    <a:bodyPr wrap="square"/>
+                    <a:lstStyle/>
+                    <a:p>
+                      <a:r>
+                        <a:rPr sz="1300" b="1">
+                          <a:solidFill>
+                            <a:srgbClr val="F8FAFC"/>
+                          </a:solidFill>
+                          <a:latin typeface="Segoe UI"/>
+                        </a:rPr>
+                        <a:t>Member</a:t>
+                      </a:r>
+                    </a:p>
+                  </a:txBody>
+                  <a:tcPr marL="109728" marR="109728" marT="45720" marB="45720">
+                    <a:solidFill>
+                      <a:srgbClr val="1E293B"/>
+                    </a:solidFill>
+                  </a:tcPr>
+                </a:tc>
+                <a:tc>
+                  <a:txBody>
+                    <a:bodyPr wrap="square"/>
+                    <a:lstStyle/>
+                    <a:p>
+                      <a:r>
+                        <a:rPr sz="1300" b="1">
+                          <a:solidFill>
+                            <a:srgbClr val="F8FAFC"/>
+                          </a:solidFill>
+                          <a:latin typeface="Segoe UI"/>
+                        </a:rPr>
+                        <a:t>Role</a:t>
+                      </a:r>
+                    </a:p>
+                  </a:txBody>
+                  <a:tcPr marL="109728" marR="109728" marT="45720" marB="45720">
+                    <a:solidFill>
+                      <a:srgbClr val="1E293B"/>
+                    </a:solidFill>
+                  </a:tcPr>
+                </a:tc>
+                <a:tc>
+                  <a:txBody>
+                    <a:bodyPr wrap="square"/>
+                    <a:lstStyle/>
+                    <a:p>
+                      <a:r>
+                        <a:rPr sz="1300" b="1">
+                          <a:solidFill>
+                            <a:srgbClr val="F8FAFC"/>
+                          </a:solidFill>
+                          <a:latin typeface="Segoe UI"/>
+                        </a:rPr>
+                        <a:t>Contribution</a:t>
+                      </a:r>
+                    </a:p>
+                  </a:txBody>
+                  <a:tcPr marL="109728" marR="109728" marT="45720" marB="45720">
+                    <a:solidFill>
+                      <a:srgbClr val="1E293B"/>
+                    </a:solidFill>
+                  </a:tcPr>
+                </a:tc>
+              </a:tr>
+              <a:tr h="384048">
+                <a:tc>
+                  <a:txBody>
+                    <a:bodyPr wrap="square"/>
+                    <a:lstStyle/>
+                    <a:p>
+                      <a:r>
+                        <a:rPr sz="1300" b="1">
+                          <a:solidFill>
+                            <a:srgbClr val="B6C2D4"/>
+                          </a:solidFill>
+                          <a:latin typeface="Segoe UI"/>
+                        </a:rPr>
+                        <a:t>Jan Lynnard Sanchez Rolando</a:t>
+                      </a:r>
+                    </a:p>
+                  </a:txBody>
+                  <a:tcPr marL="109728" marR="109728" marT="45720" marB="45720">
+                    <a:solidFill>
+                      <a:srgbClr val="0B1220"/>
+                    </a:solidFill>
+                  </a:tcPr>
+                </a:tc>
+                <a:tc>
+                  <a:txBody>
+                    <a:bodyPr wrap="square"/>
+                    <a:lstStyle/>
+                    <a:p>
+                      <a:r>
+                        <a:rPr sz="1300" b="0">
+                          <a:solidFill>
+                            <a:srgbClr val="B6C2D4"/>
+                          </a:solidFill>
+                          <a:latin typeface="Segoe UI"/>
+                        </a:rPr>
+                        <a:t>Project Lead</a:t>
+                      </a:r>
+                    </a:p>
+                  </a:txBody>
+                  <a:tcPr marL="109728" marR="109728" marT="45720" marB="45720">
+                    <a:solidFill>
+                      <a:srgbClr val="0B1220"/>
+                    </a:solidFill>
+                  </a:tcPr>
+                </a:tc>
+                <a:tc>
+                  <a:txBody>
+                    <a:bodyPr wrap="square"/>
+                    <a:lstStyle/>
+                    <a:p>
+                      <a:r>
+                        <a:rPr sz="1300" b="0">
+                          <a:solidFill>
+                            <a:srgbClr val="B6C2D4"/>
+                          </a:solidFill>
+                          <a:latin typeface="Segoe UI"/>
+                        </a:rPr>
+                        <a:t>Direction and scope. Retrofit hardware concept, and the first-generation AI work the shipped models grew out of</a:t>
+                      </a:r>
+                    </a:p>
+                  </a:txBody>
+                  <a:tcPr marL="109728" marR="109728" marT="45720" marB="45720">
+                    <a:solidFill>
+                      <a:srgbClr val="0B1220"/>
+                    </a:solidFill>
+                  </a:tcPr>
+                </a:tc>
+              </a:tr>
+              <a:tr h="384048">
+                <a:tc>
+                  <a:txBody>
+                    <a:bodyPr wrap="square"/>
+                    <a:lstStyle/>
+                    <a:p>
+                      <a:r>
+                        <a:rPr sz="1300" b="1">
+                          <a:solidFill>
+                            <a:srgbClr val="B6C2D4"/>
+                          </a:solidFill>
+                          <a:latin typeface="Segoe UI"/>
+                        </a:rPr>
+                        <a:t>Adrian Justin Salinas</a:t>
+                      </a:r>
+                    </a:p>
+                  </a:txBody>
+                  <a:tcPr marL="109728" marR="109728" marT="45720" marB="45720">
+                    <a:solidFill>
+                      <a:srgbClr val="0B1220"/>
+                    </a:solidFill>
+                  </a:tcPr>
+                </a:tc>
+                <a:tc>
+                  <a:txBody>
+                    <a:bodyPr wrap="square"/>
+                    <a:lstStyle/>
+                    <a:p>
+                      <a:r>
+                        <a:rPr sz="1300" b="0">
+                          <a:solidFill>
+                            <a:srgbClr val="B6C2D4"/>
+                          </a:solidFill>
+                          <a:latin typeface="Segoe UI"/>
+                        </a:rPr>
+                        <a:t>AI &amp; Software Lead</a:t>
+                      </a:r>
+                    </a:p>
+                  </a:txBody>
+                  <a:tcPr marL="109728" marR="109728" marT="45720" marB="45720">
+                    <a:solidFill>
+                      <a:srgbClr val="0B1220"/>
+                    </a:solidFill>
+                  </a:tcPr>
+                </a:tc>
+                <a:tc>
+                  <a:txBody>
+                    <a:bodyPr wrap="square"/>
+                    <a:lstStyle/>
+                    <a:p>
+                      <a:r>
+                        <a:rPr sz="1300" b="0">
+                          <a:solidFill>
+                            <a:srgbClr val="B6C2D4"/>
+                          </a:solidFill>
+                          <a:latin typeface="Segoe UI"/>
+                        </a:rPr>
+                        <a:t>Owns the AI infrastructure end to end — the three modules, the trained models, the API, the console, and the data-ethics and deviations record</a:t>
+                      </a:r>
+                    </a:p>
+                  </a:txBody>
+                  <a:tcPr marL="109728" marR="109728" marT="45720" marB="45720">
+                    <a:solidFill>
+                      <a:srgbClr val="0B1220"/>
+                    </a:solidFill>
+                  </a:tcPr>
+                </a:tc>
+              </a:tr>
+              <a:tr h="384048">
+                <a:tc>
+                  <a:txBody>
+                    <a:bodyPr wrap="square"/>
+                    <a:lstStyle/>
+                    <a:p>
+                      <a:r>
+                        <a:rPr sz="1300" b="1">
+                          <a:solidFill>
+                            <a:srgbClr val="B6C2D4"/>
+                          </a:solidFill>
+                          <a:latin typeface="Segoe UI"/>
+                        </a:rPr>
+                        <a:t>Ramiex Brylle Estudillo</a:t>
+                      </a:r>
+                    </a:p>
+                  </a:txBody>
+                  <a:tcPr marL="109728" marR="109728" marT="45720" marB="45720">
+                    <a:solidFill>
+                      <a:srgbClr val="0B1220"/>
+                    </a:solidFill>
+                  </a:tcPr>
+                </a:tc>
+                <a:tc>
+                  <a:txBody>
+                    <a:bodyPr wrap="square"/>
+                    <a:lstStyle/>
+                    <a:p>
+                      <a:r>
+                        <a:rPr sz="1300" b="0">
+                          <a:solidFill>
+                            <a:srgbClr val="B6C2D4"/>
+                          </a:solidFill>
+                          <a:latin typeface="Segoe UI"/>
+                        </a:rPr>
+                        <a:t>Hardware &amp; Predictive Maintenance</a:t>
+                      </a:r>
+                    </a:p>
+                  </a:txBody>
+                  <a:tcPr marL="109728" marR="109728" marT="45720" marB="45720">
+                    <a:solidFill>
+                      <a:srgbClr val="0B1220"/>
+                    </a:solidFill>
+                  </a:tcPr>
+                </a:tc>
+                <a:tc>
+                  <a:txBody>
+                    <a:bodyPr wrap="square"/>
+                    <a:lstStyle/>
+                    <a:p>
+                      <a:r>
+                        <a:rPr sz="1300" b="0">
+                          <a:solidFill>
+                            <a:srgbClr val="B6C2D4"/>
+                          </a:solidFill>
+                          <a:latin typeface="Segoe UI"/>
+                        </a:rPr>
+                        <a:t>Sensor and engine-loom specification; the degradation and duty-cycle mathematics behind Phase 1</a:t>
+                      </a:r>
+                    </a:p>
+                  </a:txBody>
+                  <a:tcPr marL="109728" marR="109728" marT="45720" marB="45720">
+                    <a:solidFill>
+                      <a:srgbClr val="0B1220"/>
+                    </a:solidFill>
+                  </a:tcPr>
+                </a:tc>
+              </a:tr>
+              <a:tr h="384048">
+                <a:tc>
+                  <a:txBody>
+                    <a:bodyPr wrap="square"/>
+                    <a:lstStyle/>
+                    <a:p>
+                      <a:r>
+                        <a:rPr sz="1300" b="1">
+                          <a:solidFill>
+                            <a:srgbClr val="B6C2D4"/>
+                          </a:solidFill>
+                          <a:latin typeface="Segoe UI"/>
+                        </a:rPr>
+                        <a:t>Kaiser Calasara</a:t>
+                      </a:r>
+                    </a:p>
+                  </a:txBody>
+                  <a:tcPr marL="109728" marR="109728" marT="45720" marB="45720">
+                    <a:solidFill>
+                      <a:srgbClr val="0B1220"/>
+                    </a:solidFill>
+                  </a:tcPr>
+                </a:tc>
+                <a:tc>
+                  <a:txBody>
+                    <a:bodyPr wrap="square"/>
+                    <a:lstStyle/>
+                    <a:p>
+                      <a:r>
+                        <a:rPr sz="1300" b="0">
+                          <a:solidFill>
+                            <a:srgbClr val="B6C2D4"/>
+                          </a:solidFill>
+                          <a:latin typeface="Segoe UI"/>
+                        </a:rPr>
+                        <a:t>Systems Logic &amp; Hardware</a:t>
+                      </a:r>
+                    </a:p>
+                  </a:txBody>
+                  <a:tcPr marL="109728" marR="109728" marT="45720" marB="45720">
+                    <a:solidFill>
+                      <a:srgbClr val="0B1220"/>
+                    </a:solidFill>
+                  </a:tcPr>
+                </a:tc>
+                <a:tc>
+                  <a:txBody>
+                    <a:bodyPr wrap="square"/>
+                    <a:lstStyle/>
+                    <a:p>
+                      <a:r>
+                        <a:rPr sz="1300" b="0">
+                          <a:solidFill>
+                            <a:srgbClr val="B6C2D4"/>
+                          </a:solidFill>
+                          <a:latin typeface="Segoe UI"/>
+                        </a:rPr>
+                        <a:t>Control and failure logic; predictive-maintenance modelling and the supporting mathematics</a:t>
+                      </a:r>
+                    </a:p>
+                  </a:txBody>
+                  <a:tcPr marL="109728" marR="109728" marT="45720" marB="45720">
+                    <a:solidFill>
+                      <a:srgbClr val="0B1220"/>
+                    </a:solidFill>
+                  </a:tcPr>
+                </a:tc>
+              </a:tr>
+              <a:tr h="384048">
+                <a:tc>
+                  <a:txBody>
+                    <a:bodyPr wrap="square"/>
+                    <a:lstStyle/>
+                    <a:p>
+                      <a:r>
+                        <a:rPr sz="1300" b="1">
+                          <a:solidFill>
+                            <a:srgbClr val="B6C2D4"/>
+                          </a:solidFill>
+                          <a:latin typeface="Segoe UI"/>
+                        </a:rPr>
+                        <a:t>Angel Faithe Torrefranca</a:t>
+                      </a:r>
+                    </a:p>
+                  </a:txBody>
+                  <a:tcPr marL="109728" marR="109728" marT="45720" marB="45720">
+                    <a:solidFill>
+                      <a:srgbClr val="0B1220"/>
+                    </a:solidFill>
+                  </a:tcPr>
+                </a:tc>
+                <a:tc>
+                  <a:txBody>
+                    <a:bodyPr wrap="square"/>
+                    <a:lstStyle/>
+                    <a:p>
+                      <a:r>
+                        <a:rPr sz="1300" b="0">
+                          <a:solidFill>
+                            <a:srgbClr val="B6C2D4"/>
+                          </a:solidFill>
+                          <a:latin typeface="Segoe UI"/>
+                        </a:rPr>
+                        <a:t>Pitch &amp; Communications</a:t>
+                      </a:r>
+                    </a:p>
+                  </a:txBody>
+                  <a:tcPr marL="109728" marR="109728" marT="45720" marB="45720">
+                    <a:solidFill>
+                      <a:srgbClr val="0B1220"/>
+                    </a:solidFill>
+                  </a:tcPr>
+                </a:tc>
+                <a:tc>
+                  <a:txBody>
+                    <a:bodyPr wrap="square"/>
+                    <a:lstStyle/>
+                    <a:p>
+                      <a:r>
+                        <a:rPr sz="1300" b="0">
+                          <a:solidFill>
+                            <a:srgbClr val="B6C2D4"/>
+                          </a:solidFill>
+                          <a:latin typeface="Segoe UI"/>
+                        </a:rPr>
+                        <a:t>Narrative, delivery, and how the system is explained to operators and judges</a:t>
+                      </a:r>
+                    </a:p>
+                  </a:txBody>
+                  <a:tcPr marL="109728" marR="109728" marT="45720" marB="45720">
+                    <a:solidFill>
+                      <a:srgbClr val="0B1220"/>
+                    </a:solidFill>
+                  </a:tcPr>
+                </a:tc>
+              </a:tr>
+            </a:tbl>
+          </a:graphicData>
+        </a:graphic>
+      </p:graphicFrame>
+      <p:sp>
+        <p:nvSpPr>
+          <p:cNvPr id="5" name="TextBox 4"/>
           <p:cNvSpPr txBox="1"/>
           <p:nvPr/>
         </p:nvSpPr>
         <p:spPr>
           <a:xfrm>
-            <a:off x="658368" y="1600200"/>
-            <a:ext cx="10874959" cy="4434840"/>
+            <a:off x="658368" y="4178808"/>
+            <a:ext cx="10874959" cy="1856232"/>
           </a:xfrm>
           <a:prstGeom prst="rect">
             <a:avLst/>
@@ -9538,7 +10693,7 @@
               </a:spcAft>
             </a:pPr>
             <a:r>
-              <a:rPr sz="1800">
+              <a:rPr sz="1600">
                 <a:solidFill>
                   <a:srgbClr val="F97316"/>
                 </a:solidFill>
@@ -9547,13 +10702,22 @@
               <a:t>— </a:t>
             </a:r>
             <a:r>
-              <a:rPr sz="1800" b="0">
-                <a:solidFill>
-                  <a:srgbClr val="F8FAFC"/>
-                </a:solidFill>
-                <a:latin typeface="Segoe UI"/>
-              </a:rPr>
-              <a:t>Team SOLMATE — roles.</a:t>
+              <a:rPr sz="1600" b="1">
+                <a:solidFill>
+                  <a:srgbClr val="F8FAFC"/>
+                </a:solidFill>
+                <a:latin typeface="Segoe UI"/>
+              </a:rPr>
+              <a:t>Four of five of us are hardware people.</a:t>
+            </a:r>
+            <a:r>
+              <a:rPr sz="1600" b="0">
+                <a:solidFill>
+                  <a:srgbClr val="F8FAFC"/>
+                </a:solidFill>
+                <a:latin typeface="Segoe UI"/>
+              </a:rPr>
+              <a:t> That is the point: this is a *retrofit* for boats that already exist, specified by people who know the engine room, with the AI built to serve it rather than the other way round.</a:t>
             </a:r>
           </a:p>
           <a:p>
@@ -9563,7 +10727,7 @@
               </a:spcAft>
             </a:pPr>
             <a:r>
-              <a:rPr sz="1800">
+              <a:rPr sz="1600">
                 <a:solidFill>
                   <a:srgbClr val="F97316"/>
                 </a:solidFill>
@@ -9572,7 +10736,7 @@
               <a:t>— </a:t>
             </a:r>
             <a:r>
-              <a:rPr sz="1800" b="0">
+              <a:rPr sz="1600" b="0">
                 <a:solidFill>
                   <a:srgbClr val="F8FAFC"/>
                 </a:solidFill>
@@ -9588,7 +10752,7 @@
               </a:spcAft>
             </a:pPr>
             <a:r>
-              <a:rPr sz="1800">
+              <a:rPr sz="1600">
                 <a:solidFill>
                   <a:srgbClr val="F97316"/>
                 </a:solidFill>
@@ -9597,20 +10761,29 @@
               <a:t>— </a:t>
             </a:r>
             <a:r>
-              <a:rPr sz="1800" b="0">
-                <a:solidFill>
-                  <a:srgbClr val="F8FAFC"/>
-                </a:solidFill>
-                <a:latin typeface="Segoe UI"/>
-              </a:rPr>
-              <a:t>Public demo URL · repo URL · this deck.</a:t>
-            </a:r>
-          </a:p>
-        </p:txBody>
-      </p:sp>
-      <p:sp>
-        <p:nvSpPr>
-          <p:cNvPr id="5" name="Rectangle 4"/>
+              <a:rPr sz="1600" b="1">
+                <a:solidFill>
+                  <a:srgbClr val="F8FAFC"/>
+                </a:solidFill>
+                <a:latin typeface="Segoe UI"/>
+              </a:rPr>
+              <a:t>Live demo: solmate-marine-ai.vercel.app</a:t>
+            </a:r>
+            <a:r>
+              <a:rPr sz="1600" b="0">
+                <a:solidFill>
+                  <a:srgbClr val="F8FAFC"/>
+                </a:solidFill>
+                <a:latin typeface="Segoe UI"/>
+              </a:rPr>
+              <a:t> · repo · screencast · this deck.</a:t>
+            </a:r>
+          </a:p>
+        </p:txBody>
+      </p:sp>
+      <p:sp>
+        <p:nvSpPr>
+          <p:cNvPr id="6" name="Rectangle 5"/>
           <p:cNvSpPr/>
           <p:nvPr/>
         </p:nvSpPr>
@@ -9654,7 +10827,7 @@
       </p:sp>
       <p:sp>
         <p:nvSpPr>
-          <p:cNvPr id="6" name="TextBox 5"/>
+          <p:cNvPr id="7" name="TextBox 6"/>
           <p:cNvSpPr txBox="1"/>
           <p:nvPr/>
         </p:nvSpPr>
@@ -9688,7 +10861,7 @@
       </p:sp>
       <p:sp>
         <p:nvSpPr>
-          <p:cNvPr id="7" name="TextBox 6"/>
+          <p:cNvPr id="8" name="TextBox 7"/>
           <p:cNvSpPr txBox="1"/>
           <p:nvPr/>
         </p:nvSpPr>
@@ -9716,7 +10889,7 @@
                 </a:solidFill>
                 <a:latin typeface="Consolas"/>
               </a:rPr>
-              <a:t>16/17</a:t>
+              <a:t>16/24</a:t>
             </a:r>
           </a:p>
         </p:txBody>
@@ -9776,7 +10949,7 @@
                 </a:solidFill>
                 <a:latin typeface="Segoe UI"/>
               </a:rPr>
-              <a:t>Appendix / backup slides (for Q&amp;A, not in the main flow)</a:t>
+              <a:t>RESERVE 01 · Dataset declarations</a:t>
             </a:r>
           </a:p>
         </p:txBody>
@@ -9825,16 +10998,838 @@
           </a:p>
         </p:txBody>
       </p:sp>
-      <p:sp>
-        <p:nvSpPr>
-          <p:cNvPr id="4" name="TextBox 3"/>
+      <p:graphicFrame>
+        <p:nvGraphicFramePr>
+          <p:cNvPr id="4" name="Table 3"/>
+          <p:cNvGraphicFramePr>
+            <a:graphicFrameLocks noGrp="1"/>
+          </p:cNvGraphicFramePr>
+          <p:nvPr/>
+        </p:nvGraphicFramePr>
+        <p:xfrm>
+          <a:off x="658368" y="1600200"/>
+          <a:ext cx="10874959" cy="2688336"/>
+        </p:xfrm>
+        <a:graphic>
+          <a:graphicData uri="http://schemas.openxmlformats.org/drawingml/2006/table">
+            <a:tbl>
+              <a:tblPr firstRow="1" bandRow="1">
+                <a:tableStyleId>{5C22544A-7EE6-4342-B048-85BDC9FD1C3A}</a:tableStyleId>
+              </a:tblPr>
+              <a:tblGrid>
+                <a:gridCol w="2174991"/>
+                <a:gridCol w="2174991"/>
+                <a:gridCol w="2174991"/>
+                <a:gridCol w="2174991"/>
+                <a:gridCol w="2174995"/>
+              </a:tblGrid>
+              <a:tr h="384048">
+                <a:tc>
+                  <a:txBody>
+                    <a:bodyPr wrap="square"/>
+                    <a:lstStyle/>
+                    <a:p>
+                      <a:r>
+                        <a:rPr sz="1300" b="1">
+                          <a:solidFill>
+                            <a:srgbClr val="F8FAFC"/>
+                          </a:solidFill>
+                          <a:latin typeface="Segoe UI"/>
+                        </a:rPr>
+                        <a:t>Source</a:t>
+                      </a:r>
+                    </a:p>
+                  </a:txBody>
+                  <a:tcPr marL="109728" marR="109728" marT="45720" marB="45720">
+                    <a:solidFill>
+                      <a:srgbClr val="1E293B"/>
+                    </a:solidFill>
+                  </a:tcPr>
+                </a:tc>
+                <a:tc>
+                  <a:txBody>
+                    <a:bodyPr wrap="square"/>
+                    <a:lstStyle/>
+                    <a:p>
+                      <a:r>
+                        <a:rPr sz="1300" b="1">
+                          <a:solidFill>
+                            <a:srgbClr val="F8FAFC"/>
+                          </a:solidFill>
+                          <a:latin typeface="Segoe UI"/>
+                        </a:rPr>
+                        <a:t>Format &amp; size</a:t>
+                      </a:r>
+                    </a:p>
+                  </a:txBody>
+                  <a:tcPr marL="109728" marR="109728" marT="45720" marB="45720">
+                    <a:solidFill>
+                      <a:srgbClr val="1E293B"/>
+                    </a:solidFill>
+                  </a:tcPr>
+                </a:tc>
+                <a:tc>
+                  <a:txBody>
+                    <a:bodyPr wrap="square"/>
+                    <a:lstStyle/>
+                    <a:p>
+                      <a:r>
+                        <a:rPr sz="1300" b="1">
+                          <a:solidFill>
+                            <a:srgbClr val="F8FAFC"/>
+                          </a:solidFill>
+                          <a:latin typeface="Segoe UI"/>
+                        </a:rPr>
+                        <a:t>Purpose</a:t>
+                      </a:r>
+                    </a:p>
+                  </a:txBody>
+                  <a:tcPr marL="109728" marR="109728" marT="45720" marB="45720">
+                    <a:solidFill>
+                      <a:srgbClr val="1E293B"/>
+                    </a:solidFill>
+                  </a:tcPr>
+                </a:tc>
+                <a:tc>
+                  <a:txBody>
+                    <a:bodyPr wrap="square"/>
+                    <a:lstStyle/>
+                    <a:p>
+                      <a:r>
+                        <a:rPr sz="1300" b="1">
+                          <a:solidFill>
+                            <a:srgbClr val="F8FAFC"/>
+                          </a:solidFill>
+                          <a:latin typeface="Segoe UI"/>
+                        </a:rPr>
+                        <a:t>Preprocessing</a:t>
+                      </a:r>
+                    </a:p>
+                  </a:txBody>
+                  <a:tcPr marL="109728" marR="109728" marT="45720" marB="45720">
+                    <a:solidFill>
+                      <a:srgbClr val="1E293B"/>
+                    </a:solidFill>
+                  </a:tcPr>
+                </a:tc>
+                <a:tc>
+                  <a:txBody>
+                    <a:bodyPr wrap="square"/>
+                    <a:lstStyle/>
+                    <a:p>
+                      <a:r>
+                        <a:rPr sz="1300" b="1">
+                          <a:solidFill>
+                            <a:srgbClr val="F8FAFC"/>
+                          </a:solidFill>
+                          <a:latin typeface="Segoe UI"/>
+                        </a:rPr>
+                        <a:t>Licence</a:t>
+                      </a:r>
+                    </a:p>
+                  </a:txBody>
+                  <a:tcPr marL="109728" marR="109728" marT="45720" marB="45720">
+                    <a:solidFill>
+                      <a:srgbClr val="1E293B"/>
+                    </a:solidFill>
+                  </a:tcPr>
+                </a:tc>
+              </a:tr>
+              <a:tr h="384048">
+                <a:tc>
+                  <a:txBody>
+                    <a:bodyPr wrap="square"/>
+                    <a:lstStyle/>
+                    <a:p>
+                      <a:r>
+                        <a:rPr sz="1300" b="0">
+                          <a:solidFill>
+                            <a:srgbClr val="B6C2D4"/>
+                          </a:solidFill>
+                          <a:latin typeface="Segoe UI"/>
+                        </a:rPr>
+                        <a:t>UCI CBM (Coraddu et al., 2014)</a:t>
+                      </a:r>
+                    </a:p>
+                  </a:txBody>
+                  <a:tcPr marL="109728" marR="109728" marT="45720" marB="45720">
+                    <a:solidFill>
+                      <a:srgbClr val="0B1220"/>
+                    </a:solidFill>
+                  </a:tcPr>
+                </a:tc>
+                <a:tc>
+                  <a:txBody>
+                    <a:bodyPr wrap="square"/>
+                    <a:lstStyle/>
+                    <a:p>
+                      <a:r>
+                        <a:rPr sz="1300" b="0">
+                          <a:solidFill>
+                            <a:srgbClr val="B6C2D4"/>
+                          </a:solidFill>
+                          <a:latin typeface="Segoe UI"/>
+                        </a:rPr>
+                        <a:t>CSV, 1,326 wear states</a:t>
+                      </a:r>
+                    </a:p>
+                  </a:txBody>
+                  <a:tcPr marL="109728" marR="109728" marT="45720" marB="45720">
+                    <a:solidFill>
+                      <a:srgbClr val="0B1220"/>
+                    </a:solidFill>
+                  </a:tcPr>
+                </a:tc>
+                <a:tc>
+                  <a:txBody>
+                    <a:bodyPr wrap="square"/>
+                    <a:lstStyle/>
+                    <a:p>
+                      <a:r>
+                        <a:rPr sz="1300" b="0">
+                          <a:solidFill>
+                            <a:srgbClr val="B6C2D4"/>
+                          </a:solidFill>
+                          <a:latin typeface="Segoe UI"/>
+                        </a:rPr>
+                        <a:t>Wear→fuel penalty</a:t>
+                      </a:r>
+                    </a:p>
+                  </a:txBody>
+                  <a:tcPr marL="109728" marR="109728" marT="45720" marB="45720">
+                    <a:solidFill>
+                      <a:srgbClr val="0B1220"/>
+                    </a:solidFill>
+                  </a:tcPr>
+                </a:tc>
+                <a:tc>
+                  <a:txBody>
+                    <a:bodyPr wrap="square"/>
+                    <a:lstStyle/>
+                    <a:p>
+                      <a:r>
+                        <a:rPr sz="1300" b="0">
+                          <a:solidFill>
+                            <a:srgbClr val="B6C2D4"/>
+                          </a:solidFill>
+                          <a:latin typeface="Segoe UI"/>
+                        </a:rPr>
+                        <a:t>Wear states held out of training; ratio-against-healthy cancels boundary bias</a:t>
+                      </a:r>
+                    </a:p>
+                  </a:txBody>
+                  <a:tcPr marL="109728" marR="109728" marT="45720" marB="45720">
+                    <a:solidFill>
+                      <a:srgbClr val="0B1220"/>
+                    </a:solidFill>
+                  </a:tcPr>
+                </a:tc>
+                <a:tc>
+                  <a:txBody>
+                    <a:bodyPr wrap="square"/>
+                    <a:lstStyle/>
+                    <a:p>
+                      <a:r>
+                        <a:rPr sz="1300" b="0">
+                          <a:solidFill>
+                            <a:srgbClr val="B6C2D4"/>
+                          </a:solidFill>
+                          <a:latin typeface="Segoe UI"/>
+                        </a:rPr>
+                        <a:t>CC BY 4.0</a:t>
+                      </a:r>
+                    </a:p>
+                  </a:txBody>
+                  <a:tcPr marL="109728" marR="109728" marT="45720" marB="45720">
+                    <a:solidFill>
+                      <a:srgbClr val="0B1220"/>
+                    </a:solidFill>
+                  </a:tcPr>
+                </a:tc>
+              </a:tr>
+              <a:tr h="384048">
+                <a:tc>
+                  <a:txBody>
+                    <a:bodyPr wrap="square"/>
+                    <a:lstStyle/>
+                    <a:p>
+                      <a:r>
+                        <a:rPr sz="1300" b="0">
+                          <a:solidFill>
+                            <a:srgbClr val="B6C2D4"/>
+                          </a:solidFill>
+                          <a:latin typeface="Segoe UI"/>
+                        </a:rPr>
+                        <a:t>Open-Meteo ERA5 archive</a:t>
+                      </a:r>
+                    </a:p>
+                  </a:txBody>
+                  <a:tcPr marL="109728" marR="109728" marT="45720" marB="45720">
+                    <a:solidFill>
+                      <a:srgbClr val="0B1220"/>
+                    </a:solidFill>
+                  </a:tcPr>
+                </a:tc>
+                <a:tc>
+                  <a:txBody>
+                    <a:bodyPr wrap="square"/>
+                    <a:lstStyle/>
+                    <a:p>
+                      <a:r>
+                        <a:rPr sz="1300" b="0">
+                          <a:solidFill>
+                            <a:srgbClr val="B6C2D4"/>
+                          </a:solidFill>
+                          <a:latin typeface="Segoe UI"/>
+                        </a:rPr>
+                        <a:t>JSON, 2.5 yr × 9-pt grid</a:t>
+                      </a:r>
+                    </a:p>
+                  </a:txBody>
+                  <a:tcPr marL="109728" marR="109728" marT="45720" marB="45720">
+                    <a:solidFill>
+                      <a:srgbClr val="0B1220"/>
+                    </a:solidFill>
+                  </a:tcPr>
+                </a:tc>
+                <a:tc>
+                  <a:txBody>
+                    <a:bodyPr wrap="square"/>
+                    <a:lstStyle/>
+                    <a:p>
+                      <a:r>
+                        <a:rPr sz="1300" b="0">
+                          <a:solidFill>
+                            <a:srgbClr val="B6C2D4"/>
+                          </a:solidFill>
+                          <a:latin typeface="Segoe UI"/>
+                        </a:rPr>
+                        <a:t>Wind/wave direction targets</a:t>
+                      </a:r>
+                    </a:p>
+                  </a:txBody>
+                  <a:tcPr marL="109728" marR="109728" marT="45720" marB="45720">
+                    <a:solidFill>
+                      <a:srgbClr val="0B1220"/>
+                    </a:solidFill>
+                  </a:tcPr>
+                </a:tc>
+                <a:tc>
+                  <a:txBody>
+                    <a:bodyPr wrap="square"/>
+                    <a:lstStyle/>
+                    <a:p>
+                      <a:r>
+                        <a:rPr sz="1300" b="0">
+                          <a:solidFill>
+                            <a:srgbClr val="B6C2D4"/>
+                          </a:solidFill>
+                          <a:latin typeface="Segoe UI"/>
+                        </a:rPr>
+                        <a:t>sin/cos decomposition — direction is circular</a:t>
+                      </a:r>
+                    </a:p>
+                  </a:txBody>
+                  <a:tcPr marL="109728" marR="109728" marT="45720" marB="45720">
+                    <a:solidFill>
+                      <a:srgbClr val="0B1220"/>
+                    </a:solidFill>
+                  </a:tcPr>
+                </a:tc>
+                <a:tc>
+                  <a:txBody>
+                    <a:bodyPr wrap="square"/>
+                    <a:lstStyle/>
+                    <a:p>
+                      <a:r>
+                        <a:rPr sz="1300" b="0">
+                          <a:solidFill>
+                            <a:srgbClr val="B6C2D4"/>
+                          </a:solidFill>
+                          <a:latin typeface="Segoe UI"/>
+                        </a:rPr>
+                        <a:t>CC BY 4.0</a:t>
+                      </a:r>
+                    </a:p>
+                  </a:txBody>
+                  <a:tcPr marL="109728" marR="109728" marT="45720" marB="45720">
+                    <a:solidFill>
+                      <a:srgbClr val="0B1220"/>
+                    </a:solidFill>
+                  </a:tcPr>
+                </a:tc>
+              </a:tr>
+              <a:tr h="384048">
+                <a:tc>
+                  <a:txBody>
+                    <a:bodyPr wrap="square"/>
+                    <a:lstStyle/>
+                    <a:p>
+                      <a:r>
+                        <a:rPr sz="1300" b="0">
+                          <a:solidFill>
+                            <a:srgbClr val="B6C2D4"/>
+                          </a:solidFill>
+                          <a:latin typeface="Segoe UI"/>
+                        </a:rPr>
+                        <a:t>Open-Meteo Marine archive</a:t>
+                      </a:r>
+                    </a:p>
+                  </a:txBody>
+                  <a:tcPr marL="109728" marR="109728" marT="45720" marB="45720">
+                    <a:solidFill>
+                      <a:srgbClr val="0B1220"/>
+                    </a:solidFill>
+                  </a:tcPr>
+                </a:tc>
+                <a:tc>
+                  <a:txBody>
+                    <a:bodyPr wrap="square"/>
+                    <a:lstStyle/>
+                    <a:p>
+                      <a:r>
+                        <a:rPr sz="1300" b="0">
+                          <a:solidFill>
+                            <a:srgbClr val="B6C2D4"/>
+                          </a:solidFill>
+                          <a:latin typeface="Segoe UI"/>
+                        </a:rPr>
+                        <a:t>JSON, same grid &amp; range</a:t>
+                      </a:r>
+                    </a:p>
+                  </a:txBody>
+                  <a:tcPr marL="109728" marR="109728" marT="45720" marB="45720">
+                    <a:solidFill>
+                      <a:srgbClr val="0B1220"/>
+                    </a:solidFill>
+                  </a:tcPr>
+                </a:tc>
+                <a:tc>
+                  <a:txBody>
+                    <a:bodyPr wrap="square"/>
+                    <a:lstStyle/>
+                    <a:p>
+                      <a:r>
+                        <a:rPr sz="1300" b="0">
+                          <a:solidFill>
+                            <a:srgbClr val="B6C2D4"/>
+                          </a:solidFill>
+                          <a:latin typeface="Segoe UI"/>
+                        </a:rPr>
+                        <a:t>Wave + current targets</a:t>
+                      </a:r>
+                    </a:p>
+                  </a:txBody>
+                  <a:tcPr marL="109728" marR="109728" marT="45720" marB="45720">
+                    <a:solidFill>
+                      <a:srgbClr val="0B1220"/>
+                    </a:solidFill>
+                  </a:tcPr>
+                </a:tc>
+                <a:tc>
+                  <a:txBody>
+                    <a:bodyPr wrap="square"/>
+                    <a:lstStyle/>
+                    <a:p>
+                      <a:r>
+                        <a:rPr sz="1300" b="0">
+                          <a:solidFill>
+                            <a:srgbClr val="B6C2D4"/>
+                          </a:solidFill>
+                          <a:latin typeface="Segoe UI"/>
+                        </a:rPr>
+                        <a:t>Magnitudes → climatological lookup</a:t>
+                      </a:r>
+                    </a:p>
+                  </a:txBody>
+                  <a:tcPr marL="109728" marR="109728" marT="45720" marB="45720">
+                    <a:solidFill>
+                      <a:srgbClr val="0B1220"/>
+                    </a:solidFill>
+                  </a:tcPr>
+                </a:tc>
+                <a:tc>
+                  <a:txBody>
+                    <a:bodyPr wrap="square"/>
+                    <a:lstStyle/>
+                    <a:p>
+                      <a:r>
+                        <a:rPr sz="1300" b="0">
+                          <a:solidFill>
+                            <a:srgbClr val="B6C2D4"/>
+                          </a:solidFill>
+                          <a:latin typeface="Segoe UI"/>
+                        </a:rPr>
+                        <a:t>CC BY 4.0</a:t>
+                      </a:r>
+                    </a:p>
+                  </a:txBody>
+                  <a:tcPr marL="109728" marR="109728" marT="45720" marB="45720">
+                    <a:solidFill>
+                      <a:srgbClr val="0B1220"/>
+                    </a:solidFill>
+                  </a:tcPr>
+                </a:tc>
+              </a:tr>
+              <a:tr h="384048">
+                <a:tc>
+                  <a:txBody>
+                    <a:bodyPr wrap="square"/>
+                    <a:lstStyle/>
+                    <a:p>
+                      <a:r>
+                        <a:rPr sz="1300" b="0">
+                          <a:solidFill>
+                            <a:srgbClr val="B6C2D4"/>
+                          </a:solidFill>
+                          <a:latin typeface="Segoe UI"/>
+                        </a:rPr>
+                        <a:t>Sentinel-2 cloudless (EOX)</a:t>
+                      </a:r>
+                    </a:p>
+                  </a:txBody>
+                  <a:tcPr marL="109728" marR="109728" marT="45720" marB="45720">
+                    <a:solidFill>
+                      <a:srgbClr val="0B1220"/>
+                    </a:solidFill>
+                  </a:tcPr>
+                </a:tc>
+                <a:tc>
+                  <a:txBody>
+                    <a:bodyPr wrap="square"/>
+                    <a:lstStyle/>
+                    <a:p>
+                      <a:r>
+                        <a:rPr sz="1300" b="0">
+                          <a:solidFill>
+                            <a:srgbClr val="B6C2D4"/>
+                          </a:solidFill>
+                          <a:latin typeface="Segoe UI"/>
+                        </a:rPr>
+                        <a:t>WMS raster, 2800×2154</a:t>
+                      </a:r>
+                    </a:p>
+                  </a:txBody>
+                  <a:tcPr marL="109728" marR="109728" marT="45720" marB="45720">
+                    <a:solidFill>
+                      <a:srgbClr val="0B1220"/>
+                    </a:solidFill>
+                  </a:tcPr>
+                </a:tc>
+                <a:tc>
+                  <a:txBody>
+                    <a:bodyPr wrap="square"/>
+                    <a:lstStyle/>
+                    <a:p>
+                      <a:r>
+                        <a:rPr sz="1300" b="0">
+                          <a:solidFill>
+                            <a:srgbClr val="B6C2D4"/>
+                          </a:solidFill>
+                          <a:latin typeface="Segoe UI"/>
+                        </a:rPr>
+                        <a:t>Basemap + helm land mask</a:t>
+                      </a:r>
+                    </a:p>
+                  </a:txBody>
+                  <a:tcPr marL="109728" marR="109728" marT="45720" marB="45720">
+                    <a:solidFill>
+                      <a:srgbClr val="0B1220"/>
+                    </a:solidFill>
+                  </a:tcPr>
+                </a:tc>
+                <a:tc>
+                  <a:txBody>
+                    <a:bodyPr wrap="square"/>
+                    <a:lstStyle/>
+                    <a:p>
+                      <a:r>
+                        <a:rPr sz="1300" b="0">
+                          <a:solidFill>
+                            <a:srgbClr val="B6C2D4"/>
+                          </a:solidFill>
+                          <a:latin typeface="Segoe UI"/>
+                        </a:rPr>
+                        <a:t>Native 10 m/px; binarised to a water mask</a:t>
+                      </a:r>
+                    </a:p>
+                  </a:txBody>
+                  <a:tcPr marL="109728" marR="109728" marT="45720" marB="45720">
+                    <a:solidFill>
+                      <a:srgbClr val="0B1220"/>
+                    </a:solidFill>
+                  </a:tcPr>
+                </a:tc>
+                <a:tc>
+                  <a:txBody>
+                    <a:bodyPr wrap="square"/>
+                    <a:lstStyle/>
+                    <a:p>
+                      <a:r>
+                        <a:rPr sz="1300" b="0">
+                          <a:solidFill>
+                            <a:srgbClr val="B6C2D4"/>
+                          </a:solidFill>
+                          <a:latin typeface="Segoe UI"/>
+                        </a:rPr>
+                        <a:t>CC BY 4.0</a:t>
+                      </a:r>
+                    </a:p>
+                  </a:txBody>
+                  <a:tcPr marL="109728" marR="109728" marT="45720" marB="45720">
+                    <a:solidFill>
+                      <a:srgbClr val="0B1220"/>
+                    </a:solidFill>
+                  </a:tcPr>
+                </a:tc>
+              </a:tr>
+              <a:tr h="384048">
+                <a:tc>
+                  <a:txBody>
+                    <a:bodyPr wrap="square"/>
+                    <a:lstStyle/>
+                    <a:p>
+                      <a:r>
+                        <a:rPr sz="1300" b="0">
+                          <a:solidFill>
+                            <a:srgbClr val="B6C2D4"/>
+                          </a:solidFill>
+                          <a:latin typeface="Segoe UI"/>
+                        </a:rPr>
+                        <a:t>Natural Earth 10m</a:t>
+                      </a:r>
+                    </a:p>
+                  </a:txBody>
+                  <a:tcPr marL="109728" marR="109728" marT="45720" marB="45720">
+                    <a:solidFill>
+                      <a:srgbClr val="0B1220"/>
+                    </a:solidFill>
+                  </a:tcPr>
+                </a:tc>
+                <a:tc>
+                  <a:txBody>
+                    <a:bodyPr wrap="square"/>
+                    <a:lstStyle/>
+                    <a:p>
+                      <a:r>
+                        <a:rPr sz="1300" b="0">
+                          <a:solidFill>
+                            <a:srgbClr val="B6C2D4"/>
+                          </a:solidFill>
+                          <a:latin typeface="Segoe UI"/>
+                        </a:rPr>
+                        <a:t>Shapefile</a:t>
+                      </a:r>
+                    </a:p>
+                  </a:txBody>
+                  <a:tcPr marL="109728" marR="109728" marT="45720" marB="45720">
+                    <a:solidFill>
+                      <a:srgbClr val="0B1220"/>
+                    </a:solidFill>
+                  </a:tcPr>
+                </a:tc>
+                <a:tc>
+                  <a:txBody>
+                    <a:bodyPr wrap="square"/>
+                    <a:lstStyle/>
+                    <a:p>
+                      <a:r>
+                        <a:rPr sz="1300" b="0">
+                          <a:solidFill>
+                            <a:srgbClr val="B6C2D4"/>
+                          </a:solidFill>
+                          <a:latin typeface="Segoe UI"/>
+                        </a:rPr>
+                        <a:t>Chart coastline</a:t>
+                      </a:r>
+                    </a:p>
+                  </a:txBody>
+                  <a:tcPr marL="109728" marR="109728" marT="45720" marB="45720">
+                    <a:solidFill>
+                      <a:srgbClr val="0B1220"/>
+                    </a:solidFill>
+                  </a:tcPr>
+                </a:tc>
+                <a:tc>
+                  <a:txBody>
+                    <a:bodyPr wrap="square"/>
+                    <a:lstStyle/>
+                    <a:p>
+                      <a:r>
+                        <a:rPr sz="1300" b="0">
+                          <a:solidFill>
+                            <a:srgbClr val="B6C2D4"/>
+                          </a:solidFill>
+                          <a:latin typeface="Segoe UI"/>
+                        </a:rPr>
+                        <a:t>Projected via </a:t>
+                      </a:r>
+                      <a:r>
+                        <a:rPr sz="1100" b="0">
+                          <a:solidFill>
+                            <a:srgbClr val="B6C2D4"/>
+                          </a:solidFill>
+                          <a:latin typeface="Consolas"/>
+                        </a:rPr>
+                        <a:t>build_chart.normalise</a:t>
+                      </a:r>
+                    </a:p>
+                  </a:txBody>
+                  <a:tcPr marL="109728" marR="109728" marT="45720" marB="45720">
+                    <a:solidFill>
+                      <a:srgbClr val="0B1220"/>
+                    </a:solidFill>
+                  </a:tcPr>
+                </a:tc>
+                <a:tc>
+                  <a:txBody>
+                    <a:bodyPr wrap="square"/>
+                    <a:lstStyle/>
+                    <a:p>
+                      <a:r>
+                        <a:rPr sz="1300" b="0">
+                          <a:solidFill>
+                            <a:srgbClr val="B6C2D4"/>
+                          </a:solidFill>
+                          <a:latin typeface="Segoe UI"/>
+                        </a:rPr>
+                        <a:t>Public domain</a:t>
+                      </a:r>
+                    </a:p>
+                  </a:txBody>
+                  <a:tcPr marL="109728" marR="109728" marT="45720" marB="45720">
+                    <a:solidFill>
+                      <a:srgbClr val="0B1220"/>
+                    </a:solidFill>
+                  </a:tcPr>
+                </a:tc>
+              </a:tr>
+              <a:tr h="384048">
+                <a:tc>
+                  <a:txBody>
+                    <a:bodyPr wrap="square"/>
+                    <a:lstStyle/>
+                    <a:p>
+                      <a:r>
+                        <a:rPr sz="1300" b="0">
+                          <a:solidFill>
+                            <a:srgbClr val="B6C2D4"/>
+                          </a:solidFill>
+                          <a:latin typeface="Segoe UI"/>
+                        </a:rPr>
+                        <a:t>OpenSeaMap seamarks</a:t>
+                      </a:r>
+                    </a:p>
+                  </a:txBody>
+                  <a:tcPr marL="109728" marR="109728" marT="45720" marB="45720">
+                    <a:solidFill>
+                      <a:srgbClr val="0B1220"/>
+                    </a:solidFill>
+                  </a:tcPr>
+                </a:tc>
+                <a:tc>
+                  <a:txBody>
+                    <a:bodyPr wrap="square"/>
+                    <a:lstStyle/>
+                    <a:p>
+                      <a:r>
+                        <a:rPr sz="1300" b="0">
+                          <a:solidFill>
+                            <a:srgbClr val="B6C2D4"/>
+                          </a:solidFill>
+                          <a:latin typeface="Segoe UI"/>
+                        </a:rPr>
+                        <a:t>Overpass JSON → 2.9 kB</a:t>
+                      </a:r>
+                    </a:p>
+                  </a:txBody>
+                  <a:tcPr marL="109728" marR="109728" marT="45720" marB="45720">
+                    <a:solidFill>
+                      <a:srgbClr val="0B1220"/>
+                    </a:solidFill>
+                  </a:tcPr>
+                </a:tc>
+                <a:tc>
+                  <a:txBody>
+                    <a:bodyPr wrap="square"/>
+                    <a:lstStyle/>
+                    <a:p>
+                      <a:r>
+                        <a:rPr sz="1300" b="0">
+                          <a:solidFill>
+                            <a:srgbClr val="B6C2D4"/>
+                          </a:solidFill>
+                          <a:latin typeface="Segoe UI"/>
+                        </a:rPr>
+                        <a:t>10 charted lights, 8 lit</a:t>
+                      </a:r>
+                    </a:p>
+                  </a:txBody>
+                  <a:tcPr marL="109728" marR="109728" marT="45720" marB="45720">
+                    <a:solidFill>
+                      <a:srgbClr val="0B1220"/>
+                    </a:solidFill>
+                  </a:tcPr>
+                </a:tc>
+                <a:tc>
+                  <a:txBody>
+                    <a:bodyPr wrap="square"/>
+                    <a:lstStyle/>
+                    <a:p>
+                      <a:r>
+                        <a:rPr sz="1300" b="0">
+                          <a:solidFill>
+                            <a:srgbClr val="B6C2D4"/>
+                          </a:solidFill>
+                          <a:latin typeface="Segoe UI"/>
+                        </a:rPr>
+                        <a:t>Build-time fetch, committed extract</a:t>
+                      </a:r>
+                    </a:p>
+                  </a:txBody>
+                  <a:tcPr marL="109728" marR="109728" marT="45720" marB="45720">
+                    <a:solidFill>
+                      <a:srgbClr val="0B1220"/>
+                    </a:solidFill>
+                  </a:tcPr>
+                </a:tc>
+                <a:tc>
+                  <a:txBody>
+                    <a:bodyPr wrap="square"/>
+                    <a:lstStyle/>
+                    <a:p>
+                      <a:r>
+                        <a:rPr sz="1300" b="1">
+                          <a:solidFill>
+                            <a:srgbClr val="B6C2D4"/>
+                          </a:solidFill>
+                          <a:latin typeface="Segoe UI"/>
+                        </a:rPr>
+                        <a:t>ODbL 1.0</a:t>
+                      </a:r>
+                    </a:p>
+                  </a:txBody>
+                  <a:tcPr marL="109728" marR="109728" marT="45720" marB="45720">
+                    <a:solidFill>
+                      <a:srgbClr val="0B1220"/>
+                    </a:solidFill>
+                  </a:tcPr>
+                </a:tc>
+              </a:tr>
+            </a:tbl>
+          </a:graphicData>
+        </a:graphic>
+      </p:graphicFrame>
+      <p:sp>
+        <p:nvSpPr>
+          <p:cNvPr id="5" name="TextBox 4"/>
           <p:cNvSpPr txBox="1"/>
           <p:nvPr/>
         </p:nvSpPr>
         <p:spPr>
           <a:xfrm>
-            <a:off x="658368" y="1600200"/>
-            <a:ext cx="10874959" cy="4434840"/>
+            <a:off x="658368" y="4562856"/>
+            <a:ext cx="10874959" cy="1472184"/>
           </a:xfrm>
           <a:prstGeom prst="rect">
             <a:avLst/>
@@ -9868,7 +11863,7 @@
                 </a:solidFill>
                 <a:latin typeface="Segoe UI"/>
               </a:rPr>
-              <a:t>A1 — Fuel model math:</a:t>
+              <a:t>Registered but consumed by nothing: NASA C-MAPSS.</a:t>
             </a:r>
             <a:r>
               <a:rPr sz="1600" b="0">
@@ -9877,7 +11872,43 @@
                 </a:solidFill>
                 <a:latin typeface="Segoe UI"/>
               </a:rPr>
-              <a:t> the BSFC bathtub curve, the derived (not chosen) enrichment coefficient, the idle-burn floor.</a:t>
+              <a:t> It is the intended Phase 2 corpus and pretrains nothing today. </a:t>
+            </a:r>
+            <a:r>
+              <a:rPr sz="1400" b="0">
+                <a:solidFill>
+                  <a:srgbClr val="B6C2D4"/>
+                </a:solidFill>
+                <a:latin typeface="Consolas"/>
+              </a:rPr>
+              <a:t>git grep cmapss -- '*.py'</a:t>
+            </a:r>
+            <a:r>
+              <a:rPr sz="1600" b="0">
+                <a:solidFill>
+                  <a:srgbClr val="F8FAFC"/>
+                </a:solidFill>
+                <a:latin typeface="Segoe UI"/>
+              </a:rPr>
+              <a:t> returns </a:t>
+            </a:r>
+            <a:r>
+              <a:rPr sz="1400" b="0">
+                <a:solidFill>
+                  <a:srgbClr val="B6C2D4"/>
+                </a:solidFill>
+                <a:latin typeface="Consolas"/>
+              </a:rPr>
+              <a:t>data/registry.py</a:t>
+            </a:r>
+            <a:r>
+              <a:rPr sz="1600" b="0">
+                <a:solidFill>
+                  <a:srgbClr val="F8FAFC"/>
+                </a:solidFill>
+                <a:latin typeface="Segoe UI"/>
+              </a:rPr>
+              <a:t> and nothing else.</a:t>
             </a:r>
           </a:p>
           <a:p>
@@ -9902,7 +11933,7 @@
                 </a:solidFill>
                 <a:latin typeface="Segoe UI"/>
               </a:rPr>
-              <a:t>A2 — Why ONNX earned its keep:</a:t>
+              <a:t>Every source is declared in `data/registry.py`, and the download tooling refuses to fetch anything undeclared.</a:t>
             </a:r>
             <a:r>
               <a:rPr sz="1600" b="0">
@@ -9911,229 +11942,14 @@
                 </a:solidFill>
                 <a:latin typeface="Segoe UI"/>
               </a:rPr>
-              <a:t> 358 MB → 85 MB; export gated at 1e-4 drift (observed 1.5e-6).</a:t>
-            </a:r>
-          </a:p>
-          <a:p>
-            <a:pPr>
-              <a:spcAft>
-                <a:spcPts val="900"/>
-              </a:spcAft>
-            </a:pPr>
-            <a:r>
-              <a:rPr sz="1600">
-                <a:solidFill>
-                  <a:srgbClr val="F97316"/>
-                </a:solidFill>
-                <a:latin typeface="Segoe UI"/>
-              </a:rPr>
-              <a:t>— </a:t>
-            </a:r>
-            <a:r>
-              <a:rPr sz="1600" b="1">
-                <a:solidFill>
-                  <a:srgbClr val="F8FAFC"/>
-                </a:solidFill>
-                <a:latin typeface="Segoe UI"/>
-              </a:rPr>
-              <a:t>A3 — Route costing detail:</a:t>
-            </a:r>
-            <a:r>
-              <a:rPr sz="1600" b="0">
-                <a:solidFill>
-                  <a:srgbClr val="F8FAFC"/>
-                </a:solidFill>
-                <a:latin typeface="Segoe UI"/>
-              </a:rPr>
-              <a:t> candidate sweep, per-leg optimiser reuse, the 1e-6 agreement test.</a:t>
-            </a:r>
-          </a:p>
-          <a:p>
-            <a:pPr>
-              <a:spcAft>
-                <a:spcPts val="900"/>
-              </a:spcAft>
-            </a:pPr>
-            <a:r>
-              <a:rPr sz="1600">
-                <a:solidFill>
-                  <a:srgbClr val="F97316"/>
-                </a:solidFill>
-                <a:latin typeface="Segoe UI"/>
-              </a:rPr>
-              <a:t>— </a:t>
-            </a:r>
-            <a:r>
-              <a:rPr sz="1600" b="1">
-                <a:solidFill>
-                  <a:srgbClr val="F8FAFC"/>
-                </a:solidFill>
-                <a:latin typeface="Segoe UI"/>
-              </a:rPr>
-              <a:t>A4 — The wear→fuel bridge:</a:t>
-            </a:r>
-            <a:r>
-              <a:rPr sz="1600" b="0">
-                <a:solidFill>
-                  <a:srgbClr val="F8FAFC"/>
-                </a:solidFill>
-                <a:latin typeface="Segoe UI"/>
-              </a:rPr>
-              <a:t> EGT-excess-over-baseline as the wear signal (</a:t>
-            </a:r>
-            <a:r>
-              <a:rPr sz="1600" b="1">
-                <a:solidFill>
-                  <a:srgbClr val="F8FAFC"/>
-                </a:solidFill>
-                <a:latin typeface="Segoe UI"/>
-              </a:rPr>
-              <a:t>r = 0.97–0.997 at fixed load</a:t>
-            </a:r>
-            <a:r>
-              <a:rPr sz="1600" b="0">
-                <a:solidFill>
-                  <a:srgbClr val="F8FAFC"/>
-                </a:solidFill>
-                <a:latin typeface="Segoe UI"/>
-              </a:rPr>
-              <a:t>, mean 0.986 across the seven load points), ratio-against-healthy to cancel boundary bias. Say "at fixed load" out loud: pooled across loads r is 0.86, because load moves both variables, and that is exactly why </a:t>
-            </a:r>
-            <a:r>
-              <a:rPr sz="1400" b="0">
-                <a:solidFill>
-                  <a:srgbClr val="B6C2D4"/>
-                </a:solidFill>
-                <a:latin typeface="Consolas"/>
-              </a:rPr>
-              <a:t>load_fraction</a:t>
-            </a:r>
-            <a:r>
-              <a:rPr sz="1600" b="0">
-                <a:solidFill>
-                  <a:srgbClr val="F8FAFC"/>
-                </a:solidFill>
-                <a:latin typeface="Segoe UI"/>
-              </a:rPr>
-              <a:t> is the model's second feature rather than a nuisance to be averaged away.</a:t>
-            </a:r>
-          </a:p>
-          <a:p>
-            <a:pPr>
-              <a:spcAft>
-                <a:spcPts val="900"/>
-              </a:spcAft>
-            </a:pPr>
-            <a:r>
-              <a:rPr sz="1600">
-                <a:solidFill>
-                  <a:srgbClr val="F97316"/>
-                </a:solidFill>
-                <a:latin typeface="Segoe UI"/>
-              </a:rPr>
-              <a:t>— </a:t>
-            </a:r>
-            <a:r>
-              <a:rPr sz="1600" b="1">
-                <a:solidFill>
-                  <a:srgbClr val="F8FAFC"/>
-                </a:solidFill>
-                <a:latin typeface="Segoe UI"/>
-              </a:rPr>
-              <a:t>A5 — Full deviations table</a:t>
-            </a:r>
-            <a:r>
-              <a:rPr sz="1600" b="0">
-                <a:solidFill>
-                  <a:srgbClr val="F8FAFC"/>
-                </a:solidFill>
-                <a:latin typeface="Segoe UI"/>
-              </a:rPr>
-              <a:t> (12 deliberate departures from </a:t>
-            </a:r>
-            <a:r>
-              <a:rPr sz="1400" b="0">
-                <a:solidFill>
-                  <a:srgbClr val="B6C2D4"/>
-                </a:solidFill>
-                <a:latin typeface="Consolas"/>
-              </a:rPr>
-              <a:t>DEVIATIONS.md</a:t>
-            </a:r>
-            <a:r>
-              <a:rPr sz="1600" b="0">
-                <a:solidFill>
-                  <a:srgbClr val="F8FAFC"/>
-                </a:solidFill>
-                <a:latin typeface="Segoe UI"/>
-              </a:rPr>
-              <a:t>, plus the "Still outstanding" table of what is not built yet). Bring both. The second one is the harder slide and the more convincing one.</a:t>
-            </a:r>
-          </a:p>
-          <a:p>
-            <a:pPr>
-              <a:spcAft>
-                <a:spcPts val="900"/>
-              </a:spcAft>
-            </a:pPr>
-            <a:r>
-              <a:rPr sz="1600">
-                <a:solidFill>
-                  <a:srgbClr val="F97316"/>
-                </a:solidFill>
-                <a:latin typeface="Segoe UI"/>
-              </a:rPr>
-              <a:t>— </a:t>
-            </a:r>
-            <a:r>
-              <a:rPr sz="1600" b="1">
-                <a:solidFill>
-                  <a:srgbClr val="F8FAFC"/>
-                </a:solidFill>
-                <a:latin typeface="Segoe UI"/>
-              </a:rPr>
-              <a:t>A6 — The safety path:</a:t>
-            </a:r>
-            <a:r>
-              <a:rPr sz="1600" b="0">
-                <a:solidFill>
-                  <a:srgbClr val="F8FAFC"/>
-                </a:solidFill>
-                <a:latin typeface="Segoe UI"/>
-              </a:rPr>
-              <a:t> the rule table, the thresholds, and the test that fails if a model is ever imported into it.</a:t>
-            </a:r>
-          </a:p>
-          <a:p>
-            <a:pPr>
-              <a:spcAft>
-                <a:spcPts val="900"/>
-              </a:spcAft>
-            </a:pPr>
-            <a:r>
-              <a:rPr sz="1600">
-                <a:solidFill>
-                  <a:srgbClr val="F97316"/>
-                </a:solidFill>
-                <a:latin typeface="Segoe UI"/>
-              </a:rPr>
-              <a:t>— </a:t>
-            </a:r>
-            <a:r>
-              <a:rPr sz="1600" b="0">
-                <a:solidFill>
-                  <a:srgbClr val="F8FAFC"/>
-                </a:solidFill>
-                <a:latin typeface="Segoe UI"/>
-              </a:rPr>
-              <a:t>---</a:t>
-            </a:r>
-          </a:p>
-        </p:txBody>
-      </p:sp>
-      <p:sp>
-        <p:nvSpPr>
-          <p:cNvPr id="5" name="Rectangle 4"/>
+              <a:t> That is the control — not a policy sentence.</a:t>
+            </a:r>
+          </a:p>
+        </p:txBody>
+      </p:sp>
+      <p:sp>
+        <p:nvSpPr>
+          <p:cNvPr id="6" name="Rectangle 5"/>
           <p:cNvSpPr/>
           <p:nvPr/>
         </p:nvSpPr>
@@ -10177,7 +11993,7 @@
       </p:sp>
       <p:sp>
         <p:nvSpPr>
-          <p:cNvPr id="6" name="TextBox 5"/>
+          <p:cNvPr id="7" name="TextBox 6"/>
           <p:cNvSpPr txBox="1"/>
           <p:nvPr/>
         </p:nvSpPr>
@@ -10211,7 +12027,7 @@
       </p:sp>
       <p:sp>
         <p:nvSpPr>
-          <p:cNvPr id="7" name="TextBox 6"/>
+          <p:cNvPr id="8" name="TextBox 7"/>
           <p:cNvSpPr txBox="1"/>
           <p:nvPr/>
         </p:nvSpPr>
@@ -10239,7 +12055,7 @@
                 </a:solidFill>
                 <a:latin typeface="Consolas"/>
               </a:rPr>
-              <a:t>17/17</a:t>
+              <a:t>17/24</a:t>
             </a:r>
           </a:p>
         </p:txBody>
@@ -10252,7 +12068,7 @@
 </p:sld>
 </file>
 
-<file path=ppt/slides/slide2.xml><?xml version="1.0" encoding="utf-8"?>
+<file path=ppt/slides/slide19.xml><?xml version="1.0" encoding="utf-8"?>
 <p:sld xmlns:a="http://schemas.openxmlformats.org/drawingml/2006/main" xmlns:p="http://schemas.openxmlformats.org/presentationml/2006/main" xmlns:r="http://schemas.openxmlformats.org/officeDocument/2006/relationships">
   <p:cSld>
     <p:bg>
@@ -10299,7 +12115,7 @@
                 </a:solidFill>
                 <a:latin typeface="Segoe UI"/>
               </a:rPr>
-              <a:t>The problem, in the operator's words</a:t>
+              <a:t>RESERVE 02 · AI tools &amp; external resources</a:t>
             </a:r>
           </a:p>
         </p:txBody>
@@ -10348,16 +12164,638 @@
           </a:p>
         </p:txBody>
       </p:sp>
-      <p:sp>
-        <p:nvSpPr>
-          <p:cNvPr id="4" name="TextBox 3"/>
+      <p:graphicFrame>
+        <p:nvGraphicFramePr>
+          <p:cNvPr id="4" name="Table 3"/>
+          <p:cNvGraphicFramePr>
+            <a:graphicFrameLocks noGrp="1"/>
+          </p:cNvGraphicFramePr>
+          <p:nvPr/>
+        </p:nvGraphicFramePr>
+        <p:xfrm>
+          <a:off x="658368" y="1600200"/>
+          <a:ext cx="10874959" cy="2304288"/>
+        </p:xfrm>
+        <a:graphic>
+          <a:graphicData uri="http://schemas.openxmlformats.org/drawingml/2006/table">
+            <a:tbl>
+              <a:tblPr firstRow="1" bandRow="1">
+                <a:tableStyleId>{5C22544A-7EE6-4342-B048-85BDC9FD1C3A}</a:tableStyleId>
+              </a:tblPr>
+              <a:tblGrid>
+                <a:gridCol w="2718739"/>
+                <a:gridCol w="2718739"/>
+                <a:gridCol w="2718739"/>
+                <a:gridCol w="2718742"/>
+              </a:tblGrid>
+              <a:tr h="384048">
+                <a:tc>
+                  <a:txBody>
+                    <a:bodyPr wrap="square"/>
+                    <a:lstStyle/>
+                    <a:p>
+                      <a:r>
+                        <a:rPr sz="1300" b="1">
+                          <a:solidFill>
+                            <a:srgbClr val="F8FAFC"/>
+                          </a:solidFill>
+                          <a:latin typeface="Segoe UI"/>
+                        </a:rPr>
+                        <a:t>Component</a:t>
+                      </a:r>
+                    </a:p>
+                  </a:txBody>
+                  <a:tcPr marL="109728" marR="109728" marT="45720" marB="45720">
+                    <a:solidFill>
+                      <a:srgbClr val="1E293B"/>
+                    </a:solidFill>
+                  </a:tcPr>
+                </a:tc>
+                <a:tc>
+                  <a:txBody>
+                    <a:bodyPr wrap="square"/>
+                    <a:lstStyle/>
+                    <a:p>
+                      <a:r>
+                        <a:rPr sz="1300" b="1">
+                          <a:solidFill>
+                            <a:srgbClr val="F8FAFC"/>
+                          </a:solidFill>
+                          <a:latin typeface="Segoe UI"/>
+                        </a:rPr>
+                        <a:t>What it is</a:t>
+                      </a:r>
+                    </a:p>
+                  </a:txBody>
+                  <a:tcPr marL="109728" marR="109728" marT="45720" marB="45720">
+                    <a:solidFill>
+                      <a:srgbClr val="1E293B"/>
+                    </a:solidFill>
+                  </a:tcPr>
+                </a:tc>
+                <a:tc>
+                  <a:txBody>
+                    <a:bodyPr wrap="square"/>
+                    <a:lstStyle/>
+                    <a:p>
+                      <a:r>
+                        <a:rPr sz="1300" b="1">
+                          <a:solidFill>
+                            <a:srgbClr val="F8FAFC"/>
+                          </a:solidFill>
+                          <a:latin typeface="Segoe UI"/>
+                        </a:rPr>
+                        <a:t>Artefact</a:t>
+                      </a:r>
+                    </a:p>
+                  </a:txBody>
+                  <a:tcPr marL="109728" marR="109728" marT="45720" marB="45720">
+                    <a:solidFill>
+                      <a:srgbClr val="1E293B"/>
+                    </a:solidFill>
+                  </a:tcPr>
+                </a:tc>
+                <a:tc>
+                  <a:txBody>
+                    <a:bodyPr wrap="square"/>
+                    <a:lstStyle/>
+                    <a:p>
+                      <a:r>
+                        <a:rPr sz="1300" b="1">
+                          <a:solidFill>
+                            <a:srgbClr val="F8FAFC"/>
+                          </a:solidFill>
+                          <a:latin typeface="Segoe UI"/>
+                        </a:rPr>
+                        <a:t>Origin</a:t>
+                      </a:r>
+                    </a:p>
+                  </a:txBody>
+                  <a:tcPr marL="109728" marR="109728" marT="45720" marB="45720">
+                    <a:solidFill>
+                      <a:srgbClr val="1E293B"/>
+                    </a:solidFill>
+                  </a:tcPr>
+                </a:tc>
+              </a:tr>
+              <a:tr h="384048">
+                <a:tc>
+                  <a:txBody>
+                    <a:bodyPr wrap="square"/>
+                    <a:lstStyle/>
+                    <a:p>
+                      <a:r>
+                        <a:rPr sz="1300" b="0">
+                          <a:solidFill>
+                            <a:srgbClr val="B6C2D4"/>
+                          </a:solidFill>
+                          <a:latin typeface="Segoe UI"/>
+                        </a:rPr>
+                        <a:t>Fuel-wear model</a:t>
+                      </a:r>
+                    </a:p>
+                  </a:txBody>
+                  <a:tcPr marL="109728" marR="109728" marT="45720" marB="45720">
+                    <a:solidFill>
+                      <a:srgbClr val="0B1220"/>
+                    </a:solidFill>
+                  </a:tcPr>
+                </a:tc>
+                <a:tc>
+                  <a:txBody>
+                    <a:bodyPr wrap="square"/>
+                    <a:lstStyle/>
+                    <a:p>
+                      <a:r>
+                        <a:rPr sz="1300" b="0">
+                          <a:solidFill>
+                            <a:srgbClr val="B6C2D4"/>
+                          </a:solidFill>
+                          <a:latin typeface="Segoe UI"/>
+                        </a:rPr>
+                        <a:t>XGBoost, 400 est. → </a:t>
+                      </a:r>
+                      <a:r>
+                        <a:rPr sz="1300" b="1">
+                          <a:solidFill>
+                            <a:srgbClr val="B6C2D4"/>
+                          </a:solidFill>
+                          <a:latin typeface="Segoe UI"/>
+                        </a:rPr>
+                        <a:t>ONNX</a:t>
+                      </a:r>
+                    </a:p>
+                  </a:txBody>
+                  <a:tcPr marL="109728" marR="109728" marT="45720" marB="45720">
+                    <a:solidFill>
+                      <a:srgbClr val="0B1220"/>
+                    </a:solidFill>
+                  </a:tcPr>
+                </a:tc>
+                <a:tc>
+                  <a:txBody>
+                    <a:bodyPr wrap="square"/>
+                    <a:lstStyle/>
+                    <a:p>
+                      <a:r>
+                        <a:rPr sz="1100" b="0">
+                          <a:solidFill>
+                            <a:srgbClr val="B6C2D4"/>
+                          </a:solidFill>
+                          <a:latin typeface="Consolas"/>
+                        </a:rPr>
+                        <a:t>fuel_degradation.onnx</a:t>
+                      </a:r>
+                      <a:r>
+                        <a:rPr sz="1300" b="0">
+                          <a:solidFill>
+                            <a:srgbClr val="B6C2D4"/>
+                          </a:solidFill>
+                          <a:latin typeface="Segoe UI"/>
+                        </a:rPr>
+                        <a:t> (364 kB)</a:t>
+                      </a:r>
+                    </a:p>
+                  </a:txBody>
+                  <a:tcPr marL="109728" marR="109728" marT="45720" marB="45720">
+                    <a:solidFill>
+                      <a:srgbClr val="0B1220"/>
+                    </a:solidFill>
+                  </a:tcPr>
+                </a:tc>
+                <a:tc>
+                  <a:txBody>
+                    <a:bodyPr wrap="square"/>
+                    <a:lstStyle/>
+                    <a:p>
+                      <a:r>
+                        <a:rPr sz="1300" b="0">
+                          <a:solidFill>
+                            <a:srgbClr val="B6C2D4"/>
+                          </a:solidFill>
+                          <a:latin typeface="Segoe UI"/>
+                        </a:rPr>
+                        <a:t>Trained by us on UCI CBM</a:t>
+                      </a:r>
+                    </a:p>
+                  </a:txBody>
+                  <a:tcPr marL="109728" marR="109728" marT="45720" marB="45720">
+                    <a:solidFill>
+                      <a:srgbClr val="0B1220"/>
+                    </a:solidFill>
+                  </a:tcPr>
+                </a:tc>
+              </a:tr>
+              <a:tr h="384048">
+                <a:tc>
+                  <a:txBody>
+                    <a:bodyPr wrap="square"/>
+                    <a:lstStyle/>
+                    <a:p>
+                      <a:r>
+                        <a:rPr sz="1300" b="0">
+                          <a:solidFill>
+                            <a:srgbClr val="B6C2D4"/>
+                          </a:solidFill>
+                          <a:latin typeface="Segoe UI"/>
+                        </a:rPr>
+                        <a:t>Route forecaster</a:t>
+                      </a:r>
+                    </a:p>
+                  </a:txBody>
+                  <a:tcPr marL="109728" marR="109728" marT="45720" marB="45720">
+                    <a:solidFill>
+                      <a:srgbClr val="0B1220"/>
+                    </a:solidFill>
+                  </a:tcPr>
+                </a:tc>
+                <a:tc>
+                  <a:txBody>
+                    <a:bodyPr wrap="square"/>
+                    <a:lstStyle/>
+                    <a:p>
+                      <a:r>
+                        <a:rPr sz="1300" b="0">
+                          <a:solidFill>
+                            <a:srgbClr val="B6C2D4"/>
+                          </a:solidFill>
+                          <a:latin typeface="Segoe UI"/>
+                        </a:rPr>
+                        <a:t>XGBoost → </a:t>
+                      </a:r>
+                      <a:r>
+                        <a:rPr sz="1300" b="1">
+                          <a:solidFill>
+                            <a:srgbClr val="B6C2D4"/>
+                          </a:solidFill>
+                          <a:latin typeface="Segoe UI"/>
+                        </a:rPr>
+                        <a:t>4 × ONNX</a:t>
+                      </a:r>
+                      <a:r>
+                        <a:rPr sz="1300" b="0">
+                          <a:solidFill>
+                            <a:srgbClr val="B6C2D4"/>
+                          </a:solidFill>
+                          <a:latin typeface="Segoe UI"/>
+                        </a:rPr>
+                        <a:t> (wind/wave dir, sin+cos)</a:t>
+                      </a:r>
+                    </a:p>
+                  </a:txBody>
+                  <a:tcPr marL="109728" marR="109728" marT="45720" marB="45720">
+                    <a:solidFill>
+                      <a:srgbClr val="0B1220"/>
+                    </a:solidFill>
+                  </a:tcPr>
+                </a:tc>
+                <a:tc>
+                  <a:txBody>
+                    <a:bodyPr wrap="square"/>
+                    <a:lstStyle/>
+                    <a:p>
+                      <a:r>
+                        <a:rPr sz="1100" b="0">
+                          <a:solidFill>
+                            <a:srgbClr val="B6C2D4"/>
+                          </a:solidFill>
+                          <a:latin typeface="Consolas"/>
+                        </a:rPr>
+                        <a:t>models/route_forecast/</a:t>
+                      </a:r>
+                    </a:p>
+                  </a:txBody>
+                  <a:tcPr marL="109728" marR="109728" marT="45720" marB="45720">
+                    <a:solidFill>
+                      <a:srgbClr val="0B1220"/>
+                    </a:solidFill>
+                  </a:tcPr>
+                </a:tc>
+                <a:tc>
+                  <a:txBody>
+                    <a:bodyPr wrap="square"/>
+                    <a:lstStyle/>
+                    <a:p>
+                      <a:r>
+                        <a:rPr sz="1300" b="0">
+                          <a:solidFill>
+                            <a:srgbClr val="B6C2D4"/>
+                          </a:solidFill>
+                          <a:latin typeface="Segoe UI"/>
+                        </a:rPr>
+                        <a:t>Trained by us on Open-Meteo ERA5</a:t>
+                      </a:r>
+                    </a:p>
+                  </a:txBody>
+                  <a:tcPr marL="109728" marR="109728" marT="45720" marB="45720">
+                    <a:solidFill>
+                      <a:srgbClr val="0B1220"/>
+                    </a:solidFill>
+                  </a:tcPr>
+                </a:tc>
+              </a:tr>
+              <a:tr h="384048">
+                <a:tc>
+                  <a:txBody>
+                    <a:bodyPr wrap="square"/>
+                    <a:lstStyle/>
+                    <a:p>
+                      <a:r>
+                        <a:rPr sz="1300" b="0">
+                          <a:solidFill>
+                            <a:srgbClr val="B6C2D4"/>
+                          </a:solidFill>
+                          <a:latin typeface="Segoe UI"/>
+                        </a:rPr>
+                        <a:t>Route magnitudes</a:t>
+                      </a:r>
+                    </a:p>
+                  </a:txBody>
+                  <a:tcPr marL="109728" marR="109728" marT="45720" marB="45720">
+                    <a:solidFill>
+                      <a:srgbClr val="0B1220"/>
+                    </a:solidFill>
+                  </a:tcPr>
+                </a:tc>
+                <a:tc>
+                  <a:txBody>
+                    <a:bodyPr wrap="square"/>
+                    <a:lstStyle/>
+                    <a:p>
+                      <a:r>
+                        <a:rPr sz="1300" b="0">
+                          <a:solidFill>
+                            <a:srgbClr val="B6C2D4"/>
+                          </a:solidFill>
+                          <a:latin typeface="Segoe UI"/>
+                        </a:rPr>
+                        <a:t>Climatological lookup table</a:t>
+                      </a:r>
+                    </a:p>
+                  </a:txBody>
+                  <a:tcPr marL="109728" marR="109728" marT="45720" marB="45720">
+                    <a:solidFill>
+                      <a:srgbClr val="0B1220"/>
+                    </a:solidFill>
+                  </a:tcPr>
+                </a:tc>
+                <a:tc>
+                  <a:txBody>
+                    <a:bodyPr wrap="square"/>
+                    <a:lstStyle/>
+                    <a:p>
+                      <a:r>
+                        <a:rPr sz="1300" b="0">
+                          <a:solidFill>
+                            <a:srgbClr val="B6C2D4"/>
+                          </a:solidFill>
+                          <a:latin typeface="Segoe UI"/>
+                        </a:rPr>
+                        <a:t>in-process</a:t>
+                      </a:r>
+                    </a:p>
+                  </a:txBody>
+                  <a:tcPr marL="109728" marR="109728" marT="45720" marB="45720">
+                    <a:solidFill>
+                      <a:srgbClr val="0B1220"/>
+                    </a:solidFill>
+                  </a:tcPr>
+                </a:tc>
+                <a:tc>
+                  <a:txBody>
+                    <a:bodyPr wrap="square"/>
+                    <a:lstStyle/>
+                    <a:p>
+                      <a:r>
+                        <a:rPr sz="1300" b="0">
+                          <a:solidFill>
+                            <a:srgbClr val="B6C2D4"/>
+                          </a:solidFill>
+                          <a:latin typeface="Segoe UI"/>
+                        </a:rPr>
+                        <a:t>Derived by us</a:t>
+                      </a:r>
+                    </a:p>
+                  </a:txBody>
+                  <a:tcPr marL="109728" marR="109728" marT="45720" marB="45720">
+                    <a:solidFill>
+                      <a:srgbClr val="0B1220"/>
+                    </a:solidFill>
+                  </a:tcPr>
+                </a:tc>
+              </a:tr>
+              <a:tr h="384048">
+                <a:tc>
+                  <a:txBody>
+                    <a:bodyPr wrap="square"/>
+                    <a:lstStyle/>
+                    <a:p>
+                      <a:r>
+                        <a:rPr sz="1300" b="0">
+                          <a:solidFill>
+                            <a:srgbClr val="B6C2D4"/>
+                          </a:solidFill>
+                          <a:latin typeface="Segoe UI"/>
+                        </a:rPr>
+                        <a:t>Anomaly detector</a:t>
+                      </a:r>
+                    </a:p>
+                  </a:txBody>
+                  <a:tcPr marL="109728" marR="109728" marT="45720" marB="45720">
+                    <a:solidFill>
+                      <a:srgbClr val="0B1220"/>
+                    </a:solidFill>
+                  </a:tcPr>
+                </a:tc>
+                <a:tc>
+                  <a:txBody>
+                    <a:bodyPr wrap="square"/>
+                    <a:lstStyle/>
+                    <a:p>
+                      <a:r>
+                        <a:rPr sz="1300" b="0">
+                          <a:solidFill>
+                            <a:srgbClr val="B6C2D4"/>
+                          </a:solidFill>
+                          <a:latin typeface="Segoe UI"/>
+                        </a:rPr>
+                        <a:t>Robust z-score + </a:t>
+                      </a:r>
+                      <a:r>
+                        <a:rPr sz="1300" b="1">
+                          <a:solidFill>
+                            <a:srgbClr val="B6C2D4"/>
+                          </a:solidFill>
+                          <a:latin typeface="Segoe UI"/>
+                        </a:rPr>
+                        <a:t>PCA linear autoencoder</a:t>
+                      </a:r>
+                    </a:p>
+                  </a:txBody>
+                  <a:tcPr marL="109728" marR="109728" marT="45720" marB="45720">
+                    <a:solidFill>
+                      <a:srgbClr val="0B1220"/>
+                    </a:solidFill>
+                  </a:tcPr>
+                </a:tc>
+                <a:tc>
+                  <a:txBody>
+                    <a:bodyPr wrap="square"/>
+                    <a:lstStyle/>
+                    <a:p>
+                      <a:r>
+                        <a:rPr sz="1300" b="0">
+                          <a:solidFill>
+                            <a:srgbClr val="B6C2D4"/>
+                          </a:solidFill>
+                          <a:latin typeface="Segoe UI"/>
+                        </a:rPr>
+                        <a:t>pure NumPy, fitted at runtime</a:t>
+                      </a:r>
+                    </a:p>
+                  </a:txBody>
+                  <a:tcPr marL="109728" marR="109728" marT="45720" marB="45720">
+                    <a:solidFill>
+                      <a:srgbClr val="0B1220"/>
+                    </a:solidFill>
+                  </a:tcPr>
+                </a:tc>
+                <a:tc>
+                  <a:txBody>
+                    <a:bodyPr wrap="square"/>
+                    <a:lstStyle/>
+                    <a:p>
+                      <a:r>
+                        <a:rPr sz="1300" b="0">
+                          <a:solidFill>
+                            <a:srgbClr val="B6C2D4"/>
+                          </a:solidFill>
+                          <a:latin typeface="Segoe UI"/>
+                        </a:rPr>
+                        <a:t>Written by us</a:t>
+                      </a:r>
+                    </a:p>
+                  </a:txBody>
+                  <a:tcPr marL="109728" marR="109728" marT="45720" marB="45720">
+                    <a:solidFill>
+                      <a:srgbClr val="0B1220"/>
+                    </a:solidFill>
+                  </a:tcPr>
+                </a:tc>
+              </a:tr>
+              <a:tr h="384048">
+                <a:tc>
+                  <a:txBody>
+                    <a:bodyPr wrap="square"/>
+                    <a:lstStyle/>
+                    <a:p>
+                      <a:r>
+                        <a:rPr sz="1300" b="0">
+                          <a:solidFill>
+                            <a:srgbClr val="B6C2D4"/>
+                          </a:solidFill>
+                          <a:latin typeface="Segoe UI"/>
+                        </a:rPr>
+                        <a:t>Advisory phrasing</a:t>
+                      </a:r>
+                    </a:p>
+                  </a:txBody>
+                  <a:tcPr marL="109728" marR="109728" marT="45720" marB="45720">
+                    <a:solidFill>
+                      <a:srgbClr val="0B1220"/>
+                    </a:solidFill>
+                  </a:tcPr>
+                </a:tc>
+                <a:tc>
+                  <a:txBody>
+                    <a:bodyPr wrap="square"/>
+                    <a:lstStyle/>
+                    <a:p>
+                      <a:r>
+                        <a:rPr sz="1300" b="1">
+                          <a:solidFill>
+                            <a:srgbClr val="B6C2D4"/>
+                          </a:solidFill>
+                          <a:latin typeface="Segoe UI"/>
+                        </a:rPr>
+                        <a:t>Claude Haiku 4.5</a:t>
+                      </a:r>
+                      <a:r>
+                        <a:rPr sz="1300" b="0">
+                          <a:solidFill>
+                            <a:srgbClr val="B6C2D4"/>
+                          </a:solidFill>
+                          <a:latin typeface="Segoe UI"/>
+                        </a:rPr>
+                        <a:t>, Anthropic API</a:t>
+                      </a:r>
+                    </a:p>
+                  </a:txBody>
+                  <a:tcPr marL="109728" marR="109728" marT="45720" marB="45720">
+                    <a:solidFill>
+                      <a:srgbClr val="0B1220"/>
+                    </a:solidFill>
+                  </a:tcPr>
+                </a:tc>
+                <a:tc>
+                  <a:txBody>
+                    <a:bodyPr wrap="square"/>
+                    <a:lstStyle/>
+                    <a:p>
+                      <a:r>
+                        <a:rPr sz="1100" b="0">
+                          <a:solidFill>
+                            <a:srgbClr val="B6C2D4"/>
+                          </a:solidFill>
+                          <a:latin typeface="Consolas"/>
+                        </a:rPr>
+                        <a:t>services/advisory/phraser.py</a:t>
+                      </a:r>
+                    </a:p>
+                  </a:txBody>
+                  <a:tcPr marL="109728" marR="109728" marT="45720" marB="45720">
+                    <a:solidFill>
+                      <a:srgbClr val="0B1220"/>
+                    </a:solidFill>
+                  </a:tcPr>
+                </a:tc>
+                <a:tc>
+                  <a:txBody>
+                    <a:bodyPr wrap="square"/>
+                    <a:lstStyle/>
+                    <a:p>
+                      <a:r>
+                        <a:rPr sz="1300" b="0">
+                          <a:solidFill>
+                            <a:srgbClr val="B6C2D4"/>
+                          </a:solidFill>
+                          <a:latin typeface="Segoe UI"/>
+                        </a:rPr>
+                        <a:t>External — phrasing only</a:t>
+                      </a:r>
+                    </a:p>
+                  </a:txBody>
+                  <a:tcPr marL="109728" marR="109728" marT="45720" marB="45720">
+                    <a:solidFill>
+                      <a:srgbClr val="0B1220"/>
+                    </a:solidFill>
+                  </a:tcPr>
+                </a:tc>
+              </a:tr>
+            </a:tbl>
+          </a:graphicData>
+        </a:graphic>
+      </p:graphicFrame>
+      <p:sp>
+        <p:nvSpPr>
+          <p:cNvPr id="5" name="TextBox 4"/>
           <p:cNvSpPr txBox="1"/>
           <p:nvPr/>
         </p:nvSpPr>
         <p:spPr>
           <a:xfrm>
-            <a:off x="658368" y="1600200"/>
-            <a:ext cx="10874959" cy="4434840"/>
+            <a:off x="658368" y="4178808"/>
+            <a:ext cx="10874959" cy="1856232"/>
           </a:xfrm>
           <a:prstGeom prst="rect">
             <a:avLst/>
@@ -10376,7 +12814,7 @@
               </a:spcAft>
             </a:pPr>
             <a:r>
-              <a:rPr sz="1800">
+              <a:rPr sz="1600">
                 <a:solidFill>
                   <a:srgbClr val="F97316"/>
                 </a:solidFill>
@@ -10385,13 +12823,22 @@
               <a:t>— </a:t>
             </a:r>
             <a:r>
-              <a:rPr sz="1800" b="0">
-                <a:solidFill>
-                  <a:srgbClr val="F8FAFC"/>
-                </a:solidFill>
-                <a:latin typeface="Segoe UI"/>
-              </a:rPr>
-              <a:t>~5,000+ wooden/fiberglass diesel passenger boats in PH inter-island service.</a:t>
+              <a:rPr sz="1600" b="1">
+                <a:solidFill>
+                  <a:srgbClr val="F8FAFC"/>
+                </a:solidFill>
+                <a:latin typeface="Segoe UI"/>
+              </a:rPr>
+              <a:t>No third-party model weights ship in this repo.</a:t>
+            </a:r>
+            <a:r>
+              <a:rPr sz="1600" b="0">
+                <a:solidFill>
+                  <a:srgbClr val="F8FAFC"/>
+                </a:solidFill>
+                <a:latin typeface="Segoe UI"/>
+              </a:rPr>
+              <a:t> Five ONNX files, all ours.</a:t>
             </a:r>
           </a:p>
           <a:p>
@@ -10401,7 +12848,7 @@
               </a:spcAft>
             </a:pPr>
             <a:r>
-              <a:rPr sz="1800">
+              <a:rPr sz="1600">
                 <a:solidFill>
                   <a:srgbClr val="F97316"/>
                 </a:solidFill>
@@ -10410,70 +12857,101 @@
               <a:t>— </a:t>
             </a:r>
             <a:r>
-              <a:rPr sz="1800" b="0">
-                <a:solidFill>
-                  <a:srgbClr val="F8FAFC"/>
-                </a:solidFill>
-                <a:latin typeface="Segoe UI"/>
-              </a:rPr>
-              <a:t>Fuel is the largest controllable operating cost; captains throttle on instinct.</a:t>
-            </a:r>
-          </a:p>
-          <a:p>
-            <a:pPr>
-              <a:spcAft>
-                <a:spcPts val="900"/>
-              </a:spcAft>
-            </a:pPr>
-            <a:r>
-              <a:rPr sz="1800">
-                <a:solidFill>
-                  <a:srgbClr val="F97316"/>
-                </a:solidFill>
-                <a:latin typeface="Segoe UI"/>
-              </a:rPr>
-              <a:t>— </a:t>
-            </a:r>
-            <a:r>
-              <a:rPr sz="1800" b="0">
-                <a:solidFill>
-                  <a:srgbClr val="F8FAFC"/>
-                </a:solidFill>
-                <a:latin typeface="Segoe UI"/>
-              </a:rPr>
-              <a:t>Breakdowns are discovered at sea, not scheduled at the dock.</a:t>
-            </a:r>
-          </a:p>
-          <a:p>
-            <a:pPr>
-              <a:spcAft>
-                <a:spcPts val="900"/>
-              </a:spcAft>
-            </a:pPr>
-            <a:r>
-              <a:rPr sz="1800">
-                <a:solidFill>
-                  <a:srgbClr val="F97316"/>
-                </a:solidFill>
-                <a:latin typeface="Segoe UI"/>
-              </a:rPr>
-              <a:t>— </a:t>
-            </a:r>
-            <a:r>
-              <a:rPr sz="1800" b="0">
-                <a:solidFill>
-                  <a:srgbClr val="F8FAFC"/>
-                </a:solidFill>
-                <a:latin typeface="Segoe UI"/>
-              </a:rPr>
-              <a:t>No emissions evidence → locked out of green financing and LGU/MARINA incentives.</a:t>
-            </a:r>
-          </a:p>
-        </p:txBody>
-      </p:sp>
-      <p:sp>
-        <p:nvSpPr>
-          <p:cNvPr id="5" name="Rectangle 4"/>
+              <a:rPr sz="1600" b="1">
+                <a:solidFill>
+                  <a:srgbClr val="F8FAFC"/>
+                </a:solidFill>
+                <a:latin typeface="Segoe UI"/>
+              </a:rPr>
+              <a:t>Claude's scope, stated precisely:</a:t>
+            </a:r>
+            <a:r>
+              <a:rPr sz="1600" b="0">
+                <a:solidFill>
+                  <a:srgbClr val="F8FAFC"/>
+                </a:solidFill>
+                <a:latin typeface="Segoe UI"/>
+              </a:rPr>
+              <a:t> it re-words a sentence the deterministic modules already produced. The rewrite is </a:t>
+            </a:r>
+            <a:r>
+              <a:rPr sz="1600" b="1">
+                <a:solidFill>
+                  <a:srgbClr val="F8FAFC"/>
+                </a:solidFill>
+                <a:latin typeface="Segoe UI"/>
+              </a:rPr>
+              <a:t>discarded</a:t>
+            </a:r>
+            <a:r>
+              <a:rPr sz="1600" b="0">
+                <a:solidFill>
+                  <a:srgbClr val="F8FAFC"/>
+                </a:solidFill>
+                <a:latin typeface="Segoe UI"/>
+              </a:rPr>
+              <a:t> if it changes a number or issues an order. </a:t>
+            </a:r>
+            <a:r>
+              <a:rPr sz="1400" b="0">
+                <a:solidFill>
+                  <a:srgbClr val="B6C2D4"/>
+                </a:solidFill>
+                <a:latin typeface="Consolas"/>
+              </a:rPr>
+              <a:t>advisory_source</a:t>
+            </a:r>
+            <a:r>
+              <a:rPr sz="1600" b="0">
+                <a:solidFill>
+                  <a:srgbClr val="F8FAFC"/>
+                </a:solidFill>
+                <a:latin typeface="Segoe UI"/>
+              </a:rPr>
+              <a:t> reports </a:t>
+            </a:r>
+            <a:r>
+              <a:rPr sz="1400" b="0">
+                <a:solidFill>
+                  <a:srgbClr val="B6C2D4"/>
+                </a:solidFill>
+                <a:latin typeface="Consolas"/>
+              </a:rPr>
+              <a:t>"claude"</a:t>
+            </a:r>
+            <a:r>
+              <a:rPr sz="1600" b="0">
+                <a:solidFill>
+                  <a:srgbClr val="F8FAFC"/>
+                </a:solidFill>
+                <a:latin typeface="Segoe UI"/>
+              </a:rPr>
+              <a:t> or </a:t>
+            </a:r>
+            <a:r>
+              <a:rPr sz="1400" b="0">
+                <a:solidFill>
+                  <a:srgbClr val="B6C2D4"/>
+                </a:solidFill>
+                <a:latin typeface="Consolas"/>
+              </a:rPr>
+              <a:t>"template"</a:t>
+            </a:r>
+            <a:r>
+              <a:rPr sz="1600" b="0">
+                <a:solidFill>
+                  <a:srgbClr val="F8FAFC"/>
+                </a:solidFill>
+                <a:latin typeface="Segoe UI"/>
+              </a:rPr>
+              <a:t> per frame, visible on the console.</a:t>
+            </a:r>
+          </a:p>
+        </p:txBody>
+      </p:sp>
+      <p:sp>
+        <p:nvSpPr>
+          <p:cNvPr id="6" name="Rectangle 5"/>
           <p:cNvSpPr/>
           <p:nvPr/>
         </p:nvSpPr>
@@ -10517,7 +12995,7 @@
       </p:sp>
       <p:sp>
         <p:nvSpPr>
-          <p:cNvPr id="6" name="TextBox 5"/>
+          <p:cNvPr id="7" name="TextBox 6"/>
           <p:cNvSpPr txBox="1"/>
           <p:nvPr/>
         </p:nvSpPr>
@@ -10551,7 +13029,7 @@
       </p:sp>
       <p:sp>
         <p:nvSpPr>
-          <p:cNvPr id="7" name="TextBox 6"/>
+          <p:cNvPr id="8" name="TextBox 7"/>
           <p:cNvSpPr txBox="1"/>
           <p:nvPr/>
         </p:nvSpPr>
@@ -10579,7 +13057,4864 @@
                 </a:solidFill>
                 <a:latin typeface="Consolas"/>
               </a:rPr>
-              <a:t>1/17</a:t>
+              <a:t>18/24</a:t>
+            </a:r>
+          </a:p>
+        </p:txBody>
+      </p:sp>
+    </p:spTree>
+  </p:cSld>
+  <p:clrMapOvr>
+    <a:masterClrMapping/>
+  </p:clrMapOvr>
+</p:sld>
+</file>
+
+<file path=ppt/slides/slide2.xml><?xml version="1.0" encoding="utf-8"?>
+<p:sld xmlns:a="http://schemas.openxmlformats.org/drawingml/2006/main" xmlns:p="http://schemas.openxmlformats.org/presentationml/2006/main" xmlns:r="http://schemas.openxmlformats.org/officeDocument/2006/relationships">
+  <p:cSld>
+    <p:bg>
+      <p:bgPr>
+        <a:solidFill>
+          <a:srgbClr val="020617"/>
+        </a:solidFill>
+        <a:effectLst/>
+      </p:bgPr>
+    </p:bg>
+    <p:spTree>
+      <p:nvGrpSpPr>
+        <p:cNvPr id="1" name=""/>
+        <p:cNvGrpSpPr/>
+        <p:nvPr/>
+      </p:nvGrpSpPr>
+      <p:grpSpPr/>
+      <p:sp>
+        <p:nvSpPr>
+          <p:cNvPr id="2" name="TextBox 1"/>
+          <p:cNvSpPr txBox="1"/>
+          <p:nvPr/>
+        </p:nvSpPr>
+        <p:spPr>
+          <a:xfrm>
+            <a:off x="658368" y="475488"/>
+            <a:ext cx="10874959" cy="822960"/>
+          </a:xfrm>
+          <a:prstGeom prst="rect">
+            <a:avLst/>
+          </a:prstGeom>
+          <a:noFill/>
+        </p:spPr>
+        <p:txBody>
+          <a:bodyPr wrap="none">
+            <a:spAutoFit/>
+          </a:bodyPr>
+          <a:lstStyle/>
+          <a:p>
+            <a:r>
+              <a:rPr sz="3000" b="1">
+                <a:solidFill>
+                  <a:srgbClr val="F8FAFC"/>
+                </a:solidFill>
+                <a:latin typeface="Segoe UI"/>
+              </a:rPr>
+              <a:t>The problem, in the operator's words</a:t>
+            </a:r>
+          </a:p>
+        </p:txBody>
+      </p:sp>
+      <p:sp>
+        <p:nvSpPr>
+          <p:cNvPr id="3" name="Rectangle 2"/>
+          <p:cNvSpPr/>
+          <p:nvPr/>
+        </p:nvSpPr>
+        <p:spPr>
+          <a:xfrm>
+            <a:off x="658368" y="1316736"/>
+            <a:ext cx="1005840" cy="38100"/>
+          </a:xfrm>
+          <a:prstGeom prst="rect">
+            <a:avLst/>
+          </a:prstGeom>
+          <a:solidFill>
+            <a:srgbClr val="F97316"/>
+          </a:solidFill>
+          <a:ln>
+            <a:noFill/>
+          </a:ln>
+          <a:effectLst/>
+        </p:spPr>
+        <p:style>
+          <a:lnRef idx="1">
+            <a:schemeClr val="accent1"/>
+          </a:lnRef>
+          <a:fillRef idx="3">
+            <a:schemeClr val="accent1"/>
+          </a:fillRef>
+          <a:effectRef idx="2">
+            <a:schemeClr val="accent1"/>
+          </a:effectRef>
+          <a:fontRef idx="minor">
+            <a:schemeClr val="lt1"/>
+          </a:fontRef>
+        </p:style>
+        <p:txBody>
+          <a:bodyPr rtlCol="0" anchor="ctr"/>
+          <a:lstStyle/>
+          <a:p>
+            <a:pPr algn="ctr"/>
+          </a:p>
+        </p:txBody>
+      </p:sp>
+      <p:sp>
+        <p:nvSpPr>
+          <p:cNvPr id="4" name="TextBox 3"/>
+          <p:cNvSpPr txBox="1"/>
+          <p:nvPr/>
+        </p:nvSpPr>
+        <p:spPr>
+          <a:xfrm>
+            <a:off x="658368" y="1600200"/>
+            <a:ext cx="10874959" cy="4434840"/>
+          </a:xfrm>
+          <a:prstGeom prst="rect">
+            <a:avLst/>
+          </a:prstGeom>
+          <a:noFill/>
+        </p:spPr>
+        <p:txBody>
+          <a:bodyPr wrap="square" anchor="t">
+            <a:spAutoFit/>
+          </a:bodyPr>
+          <a:lstStyle/>
+          <a:p>
+            <a:pPr>
+              <a:spcAft>
+                <a:spcPts val="900"/>
+              </a:spcAft>
+            </a:pPr>
+            <a:r>
+              <a:rPr sz="1800">
+                <a:solidFill>
+                  <a:srgbClr val="F97316"/>
+                </a:solidFill>
+                <a:latin typeface="Segoe UI"/>
+              </a:rPr>
+              <a:t>— </a:t>
+            </a:r>
+            <a:r>
+              <a:rPr sz="1800" b="0">
+                <a:solidFill>
+                  <a:srgbClr val="F8FAFC"/>
+                </a:solidFill>
+                <a:latin typeface="Segoe UI"/>
+              </a:rPr>
+              <a:t>~5,000+ wooden/fiberglass diesel passenger boats in PH inter-island service.</a:t>
+            </a:r>
+          </a:p>
+          <a:p>
+            <a:pPr>
+              <a:spcAft>
+                <a:spcPts val="900"/>
+              </a:spcAft>
+            </a:pPr>
+            <a:r>
+              <a:rPr sz="1800">
+                <a:solidFill>
+                  <a:srgbClr val="F97316"/>
+                </a:solidFill>
+                <a:latin typeface="Segoe UI"/>
+              </a:rPr>
+              <a:t>— </a:t>
+            </a:r>
+            <a:r>
+              <a:rPr sz="1800" b="0">
+                <a:solidFill>
+                  <a:srgbClr val="F8FAFC"/>
+                </a:solidFill>
+                <a:latin typeface="Segoe UI"/>
+              </a:rPr>
+              <a:t>Fuel is the largest controllable operating cost; captains throttle on instinct.</a:t>
+            </a:r>
+          </a:p>
+          <a:p>
+            <a:pPr>
+              <a:spcAft>
+                <a:spcPts val="900"/>
+              </a:spcAft>
+            </a:pPr>
+            <a:r>
+              <a:rPr sz="1800">
+                <a:solidFill>
+                  <a:srgbClr val="F97316"/>
+                </a:solidFill>
+                <a:latin typeface="Segoe UI"/>
+              </a:rPr>
+              <a:t>— </a:t>
+            </a:r>
+            <a:r>
+              <a:rPr sz="1800" b="0">
+                <a:solidFill>
+                  <a:srgbClr val="F8FAFC"/>
+                </a:solidFill>
+                <a:latin typeface="Segoe UI"/>
+              </a:rPr>
+              <a:t>Breakdowns are discovered at sea, not scheduled at the dock.</a:t>
+            </a:r>
+          </a:p>
+          <a:p>
+            <a:pPr>
+              <a:spcAft>
+                <a:spcPts val="900"/>
+              </a:spcAft>
+            </a:pPr>
+            <a:r>
+              <a:rPr sz="1800">
+                <a:solidFill>
+                  <a:srgbClr val="F97316"/>
+                </a:solidFill>
+                <a:latin typeface="Segoe UI"/>
+              </a:rPr>
+              <a:t>— </a:t>
+            </a:r>
+            <a:r>
+              <a:rPr sz="1800" b="0">
+                <a:solidFill>
+                  <a:srgbClr val="F8FAFC"/>
+                </a:solidFill>
+                <a:latin typeface="Segoe UI"/>
+              </a:rPr>
+              <a:t>No emissions evidence → locked out of green financing and LGU/MARINA incentives.</a:t>
+            </a:r>
+          </a:p>
+        </p:txBody>
+      </p:sp>
+      <p:sp>
+        <p:nvSpPr>
+          <p:cNvPr id="5" name="Rectangle 4"/>
+          <p:cNvSpPr/>
+          <p:nvPr/>
+        </p:nvSpPr>
+        <p:spPr>
+          <a:xfrm>
+            <a:off x="658368" y="6199632"/>
+            <a:ext cx="10874959" cy="12700"/>
+          </a:xfrm>
+          <a:prstGeom prst="rect">
+            <a:avLst/>
+          </a:prstGeom>
+          <a:solidFill>
+            <a:srgbClr val="1E293B"/>
+          </a:solidFill>
+          <a:ln>
+            <a:noFill/>
+          </a:ln>
+          <a:effectLst/>
+        </p:spPr>
+        <p:style>
+          <a:lnRef idx="1">
+            <a:schemeClr val="accent1"/>
+          </a:lnRef>
+          <a:fillRef idx="3">
+            <a:schemeClr val="accent1"/>
+          </a:fillRef>
+          <a:effectRef idx="2">
+            <a:schemeClr val="accent1"/>
+          </a:effectRef>
+          <a:fontRef idx="minor">
+            <a:schemeClr val="lt1"/>
+          </a:fontRef>
+        </p:style>
+        <p:txBody>
+          <a:bodyPr rtlCol="0" anchor="ctr"/>
+          <a:lstStyle/>
+          <a:p>
+            <a:pPr algn="ctr"/>
+          </a:p>
+        </p:txBody>
+      </p:sp>
+      <p:sp>
+        <p:nvSpPr>
+          <p:cNvPr id="6" name="TextBox 5"/>
+          <p:cNvSpPr txBox="1"/>
+          <p:nvPr/>
+        </p:nvSpPr>
+        <p:spPr>
+          <a:xfrm>
+            <a:off x="658368" y="6291072"/>
+            <a:ext cx="10874959" cy="292608"/>
+          </a:xfrm>
+          <a:prstGeom prst="rect">
+            <a:avLst/>
+          </a:prstGeom>
+          <a:noFill/>
+        </p:spPr>
+        <p:txBody>
+          <a:bodyPr wrap="none">
+            <a:spAutoFit/>
+          </a:bodyPr>
+          <a:lstStyle/>
+          <a:p>
+            <a:r>
+              <a:rPr sz="1000">
+                <a:solidFill>
+                  <a:srgbClr val="B6C2D4"/>
+                </a:solidFill>
+                <a:latin typeface="Segoe UI"/>
+              </a:rPr>
+              <a:t>Marine-AI  ·  Team SOLMATE  ·  ADVISORY ONLY — CAPTAIN COMMANDS</a:t>
+            </a:r>
+          </a:p>
+        </p:txBody>
+      </p:sp>
+      <p:sp>
+        <p:nvSpPr>
+          <p:cNvPr id="7" name="TextBox 6"/>
+          <p:cNvSpPr txBox="1"/>
+          <p:nvPr/>
+        </p:nvSpPr>
+        <p:spPr>
+          <a:xfrm>
+            <a:off x="10436047" y="6291072"/>
+            <a:ext cx="1097280" cy="292608"/>
+          </a:xfrm>
+          <a:prstGeom prst="rect">
+            <a:avLst/>
+          </a:prstGeom>
+          <a:noFill/>
+        </p:spPr>
+        <p:txBody>
+          <a:bodyPr wrap="none">
+            <a:spAutoFit/>
+          </a:bodyPr>
+          <a:lstStyle/>
+          <a:p>
+            <a:pPr algn="r"/>
+            <a:r>
+              <a:rPr sz="1000">
+                <a:solidFill>
+                  <a:srgbClr val="B6C2D4"/>
+                </a:solidFill>
+                <a:latin typeface="Consolas"/>
+              </a:rPr>
+              <a:t>1/24</a:t>
+            </a:r>
+          </a:p>
+        </p:txBody>
+      </p:sp>
+    </p:spTree>
+  </p:cSld>
+  <p:clrMapOvr>
+    <a:masterClrMapping/>
+  </p:clrMapOvr>
+</p:sld>
+</file>
+
+<file path=ppt/slides/slide20.xml><?xml version="1.0" encoding="utf-8"?>
+<p:sld xmlns:a="http://schemas.openxmlformats.org/drawingml/2006/main" xmlns:p="http://schemas.openxmlformats.org/presentationml/2006/main" xmlns:r="http://schemas.openxmlformats.org/officeDocument/2006/relationships">
+  <p:cSld>
+    <p:bg>
+      <p:bgPr>
+        <a:solidFill>
+          <a:srgbClr val="020617"/>
+        </a:solidFill>
+        <a:effectLst/>
+      </p:bgPr>
+    </p:bg>
+    <p:spTree>
+      <p:nvGrpSpPr>
+        <p:cNvPr id="1" name=""/>
+        <p:cNvGrpSpPr/>
+        <p:nvPr/>
+      </p:nvGrpSpPr>
+      <p:grpSpPr/>
+      <p:sp>
+        <p:nvSpPr>
+          <p:cNvPr id="2" name="TextBox 1"/>
+          <p:cNvSpPr txBox="1"/>
+          <p:nvPr/>
+        </p:nvSpPr>
+        <p:spPr>
+          <a:xfrm>
+            <a:off x="658368" y="475488"/>
+            <a:ext cx="10874959" cy="822960"/>
+          </a:xfrm>
+          <a:prstGeom prst="rect">
+            <a:avLst/>
+          </a:prstGeom>
+          <a:noFill/>
+        </p:spPr>
+        <p:txBody>
+          <a:bodyPr wrap="none">
+            <a:spAutoFit/>
+          </a:bodyPr>
+          <a:lstStyle/>
+          <a:p>
+            <a:r>
+              <a:rPr sz="3000" b="1">
+                <a:solidFill>
+                  <a:srgbClr val="F8FAFC"/>
+                </a:solidFill>
+                <a:latin typeface="Segoe UI"/>
+              </a:rPr>
+              <a:t>RESERVE 03 · Hardware disclosure</a:t>
+            </a:r>
+          </a:p>
+        </p:txBody>
+      </p:sp>
+      <p:sp>
+        <p:nvSpPr>
+          <p:cNvPr id="3" name="Rectangle 2"/>
+          <p:cNvSpPr/>
+          <p:nvPr/>
+        </p:nvSpPr>
+        <p:spPr>
+          <a:xfrm>
+            <a:off x="658368" y="1316736"/>
+            <a:ext cx="1005840" cy="38100"/>
+          </a:xfrm>
+          <a:prstGeom prst="rect">
+            <a:avLst/>
+          </a:prstGeom>
+          <a:solidFill>
+            <a:srgbClr val="F97316"/>
+          </a:solidFill>
+          <a:ln>
+            <a:noFill/>
+          </a:ln>
+          <a:effectLst/>
+        </p:spPr>
+        <p:style>
+          <a:lnRef idx="1">
+            <a:schemeClr val="accent1"/>
+          </a:lnRef>
+          <a:fillRef idx="3">
+            <a:schemeClr val="accent1"/>
+          </a:fillRef>
+          <a:effectRef idx="2">
+            <a:schemeClr val="accent1"/>
+          </a:effectRef>
+          <a:fontRef idx="minor">
+            <a:schemeClr val="lt1"/>
+          </a:fontRef>
+        </p:style>
+        <p:txBody>
+          <a:bodyPr rtlCol="0" anchor="ctr"/>
+          <a:lstStyle/>
+          <a:p>
+            <a:pPr algn="ctr"/>
+          </a:p>
+        </p:txBody>
+      </p:sp>
+      <p:sp>
+        <p:nvSpPr>
+          <p:cNvPr id="4" name="TextBox 3"/>
+          <p:cNvSpPr txBox="1"/>
+          <p:nvPr/>
+        </p:nvSpPr>
+        <p:spPr>
+          <a:xfrm>
+            <a:off x="658368" y="1600200"/>
+            <a:ext cx="10874959" cy="4434840"/>
+          </a:xfrm>
+          <a:prstGeom prst="rect">
+            <a:avLst/>
+          </a:prstGeom>
+          <a:noFill/>
+        </p:spPr>
+        <p:txBody>
+          <a:bodyPr wrap="square" anchor="t">
+            <a:spAutoFit/>
+          </a:bodyPr>
+          <a:lstStyle/>
+          <a:p>
+            <a:pPr>
+              <a:spcAft>
+                <a:spcPts val="900"/>
+              </a:spcAft>
+            </a:pPr>
+            <a:r>
+              <a:rPr sz="1600">
+                <a:solidFill>
+                  <a:srgbClr val="F97316"/>
+                </a:solidFill>
+                <a:latin typeface="Segoe UI"/>
+              </a:rPr>
+              <a:t>— </a:t>
+            </a:r>
+            <a:r>
+              <a:rPr sz="1600" b="1">
+                <a:solidFill>
+                  <a:srgbClr val="F8FAFC"/>
+                </a:solidFill>
+                <a:latin typeface="Segoe UI"/>
+              </a:rPr>
+              <a:t>No hardware was used. Declared, not discovered.</a:t>
+            </a:r>
+            <a:r>
+              <a:rPr sz="1600" b="0">
+                <a:solidFill>
+                  <a:srgbClr val="F8FAFC"/>
+                </a:solidFill>
+                <a:latin typeface="Segoe UI"/>
+              </a:rPr>
+              <a:t> The contract default is </a:t>
+            </a:r>
+            <a:r>
+              <a:rPr sz="1400" b="0">
+                <a:solidFill>
+                  <a:srgbClr val="B6C2D4"/>
+                </a:solidFill>
+                <a:latin typeface="Consolas"/>
+              </a:rPr>
+              <a:t>source="simulator"</a:t>
+            </a:r>
+            <a:r>
+              <a:rPr sz="1600" b="0">
+                <a:solidFill>
+                  <a:srgbClr val="F8FAFC"/>
+                </a:solidFill>
+                <a:latin typeface="Segoe UI"/>
+              </a:rPr>
+              <a:t>, so no telemetry frame can claim otherwise.</a:t>
+            </a:r>
+          </a:p>
+          <a:p>
+            <a:pPr>
+              <a:spcAft>
+                <a:spcPts val="900"/>
+              </a:spcAft>
+            </a:pPr>
+            <a:r>
+              <a:rPr sz="1600">
+                <a:solidFill>
+                  <a:srgbClr val="F97316"/>
+                </a:solidFill>
+                <a:latin typeface="Segoe UI"/>
+              </a:rPr>
+              <a:t>— </a:t>
+            </a:r>
+            <a:r>
+              <a:rPr sz="1600" b="0">
+                <a:solidFill>
+                  <a:srgbClr val="F8FAFC"/>
+                </a:solidFill>
+                <a:latin typeface="Segoe UI"/>
+              </a:rPr>
+              <a:t>Telemetry is an </a:t>
+            </a:r>
+            <a:r>
+              <a:rPr sz="1600" b="1">
+                <a:solidFill>
+                  <a:srgbClr val="F8FAFC"/>
+                </a:solidFill>
+                <a:latin typeface="Segoe UI"/>
+              </a:rPr>
+              <a:t>engine-loom emulation</a:t>
+            </a:r>
+            <a:r>
+              <a:rPr sz="1600" b="0">
+                <a:solidFill>
+                  <a:srgbClr val="F8FAFC"/>
+                </a:solidFill>
+                <a:latin typeface="Segoe UI"/>
+              </a:rPr>
+              <a:t> in </a:t>
+            </a:r>
+            <a:r>
+              <a:rPr sz="1400" b="0">
+                <a:solidFill>
+                  <a:srgbClr val="B6C2D4"/>
+                </a:solidFill>
+                <a:latin typeface="Consolas"/>
+              </a:rPr>
+              <a:t>apps/bridge/lib/telemetry.ts</a:t>
+            </a:r>
+            <a:r>
+              <a:rPr sz="1600" b="0">
+                <a:solidFill>
+                  <a:srgbClr val="F8FAFC"/>
+                </a:solidFill>
+                <a:latin typeface="Segoe UI"/>
+              </a:rPr>
+              <a:t>, driven by the same baseline constants the Python detector scores against.</a:t>
+            </a:r>
+          </a:p>
+          <a:p>
+            <a:pPr>
+              <a:spcAft>
+                <a:spcPts val="900"/>
+              </a:spcAft>
+            </a:pPr>
+            <a:r>
+              <a:rPr sz="1600">
+                <a:solidFill>
+                  <a:srgbClr val="F97316"/>
+                </a:solidFill>
+                <a:latin typeface="Segoe UI"/>
+              </a:rPr>
+              <a:t>— </a:t>
+            </a:r>
+            <a:r>
+              <a:rPr sz="1600" b="1">
+                <a:solidFill>
+                  <a:srgbClr val="F8FAFC"/>
+                </a:solidFill>
+                <a:latin typeface="Segoe UI"/>
+              </a:rPr>
+              <a:t>What a real retrofit needs, in install order:</a:t>
+            </a:r>
+          </a:p>
+        </p:txBody>
+      </p:sp>
+      <p:graphicFrame>
+        <p:nvGraphicFramePr>
+          <p:cNvPr id="5" name="Table 4"/>
+          <p:cNvGraphicFramePr>
+            <a:graphicFrameLocks noGrp="1"/>
+          </p:cNvGraphicFramePr>
+          <p:nvPr/>
+        </p:nvGraphicFramePr>
+        <p:xfrm>
+          <a:off x="658368" y="1600200"/>
+          <a:ext cx="10874959" cy="1920240"/>
+        </p:xfrm>
+        <a:graphic>
+          <a:graphicData uri="http://schemas.openxmlformats.org/drawingml/2006/table">
+            <a:tbl>
+              <a:tblPr firstRow="1" bandRow="1">
+                <a:tableStyleId>{5C22544A-7EE6-4342-B048-85BDC9FD1C3A}</a:tableStyleId>
+              </a:tblPr>
+              <a:tblGrid>
+                <a:gridCol w="3624986"/>
+                <a:gridCol w="3624986"/>
+                <a:gridCol w="3624987"/>
+              </a:tblGrid>
+              <a:tr h="384048">
+                <a:tc>
+                  <a:txBody>
+                    <a:bodyPr wrap="square"/>
+                    <a:lstStyle/>
+                    <a:p>
+                      <a:r>
+                        <a:rPr sz="1300" b="1">
+                          <a:solidFill>
+                            <a:srgbClr val="F8FAFC"/>
+                          </a:solidFill>
+                          <a:latin typeface="Segoe UI"/>
+                        </a:rPr>
+                        <a:t>Sensor</a:t>
+                      </a:r>
+                    </a:p>
+                  </a:txBody>
+                  <a:tcPr marL="109728" marR="109728" marT="45720" marB="45720">
+                    <a:solidFill>
+                      <a:srgbClr val="1E293B"/>
+                    </a:solidFill>
+                  </a:tcPr>
+                </a:tc>
+                <a:tc>
+                  <a:txBody>
+                    <a:bodyPr wrap="square"/>
+                    <a:lstStyle/>
+                    <a:p>
+                      <a:r>
+                        <a:rPr sz="1300" b="1">
+                          <a:solidFill>
+                            <a:srgbClr val="F8FAFC"/>
+                          </a:solidFill>
+                          <a:latin typeface="Segoe UI"/>
+                        </a:rPr>
+                        <a:t>Feeds</a:t>
+                      </a:r>
+                    </a:p>
+                  </a:txBody>
+                  <a:tcPr marL="109728" marR="109728" marT="45720" marB="45720">
+                    <a:solidFill>
+                      <a:srgbClr val="1E293B"/>
+                    </a:solidFill>
+                  </a:tcPr>
+                </a:tc>
+                <a:tc>
+                  <a:txBody>
+                    <a:bodyPr wrap="square"/>
+                    <a:lstStyle/>
+                    <a:p>
+                      <a:r>
+                        <a:rPr sz="1300" b="1">
+                          <a:solidFill>
+                            <a:srgbClr val="F8FAFC"/>
+                          </a:solidFill>
+                          <a:latin typeface="Segoe UI"/>
+                        </a:rPr>
+                        <a:t>Why it matters</a:t>
+                      </a:r>
+                    </a:p>
+                  </a:txBody>
+                  <a:tcPr marL="109728" marR="109728" marT="45720" marB="45720">
+                    <a:solidFill>
+                      <a:srgbClr val="1E293B"/>
+                    </a:solidFill>
+                  </a:tcPr>
+                </a:tc>
+              </a:tr>
+              <a:tr h="384048">
+                <a:tc>
+                  <a:txBody>
+                    <a:bodyPr wrap="square"/>
+                    <a:lstStyle/>
+                    <a:p>
+                      <a:r>
+                        <a:rPr sz="1300" b="0">
+                          <a:solidFill>
+                            <a:srgbClr val="B6C2D4"/>
+                          </a:solidFill>
+                          <a:latin typeface="Segoe UI"/>
+                        </a:rPr>
+                        <a:t>Fuel-flow meter</a:t>
+                      </a:r>
+                    </a:p>
+                  </a:txBody>
+                  <a:tcPr marL="109728" marR="109728" marT="45720" marB="45720">
+                    <a:solidFill>
+                      <a:srgbClr val="0B1220"/>
+                    </a:solidFill>
+                  </a:tcPr>
+                </a:tc>
+                <a:tc>
+                  <a:txBody>
+                    <a:bodyPr wrap="square"/>
+                    <a:lstStyle/>
+                    <a:p>
+                      <a:r>
+                        <a:rPr sz="1300" b="0">
+                          <a:solidFill>
+                            <a:srgbClr val="B6C2D4"/>
+                          </a:solidFill>
+                          <a:latin typeface="Segoe UI"/>
+                        </a:rPr>
+                        <a:t>Calibrates the hybrid model</a:t>
+                      </a:r>
+                    </a:p>
+                  </a:txBody>
+                  <a:tcPr marL="109728" marR="109728" marT="45720" marB="45720">
+                    <a:solidFill>
+                      <a:srgbClr val="0B1220"/>
+                    </a:solidFill>
+                  </a:tcPr>
+                </a:tc>
+                <a:tc>
+                  <a:txBody>
+                    <a:bodyPr wrap="square"/>
+                    <a:lstStyle/>
+                    <a:p>
+                      <a:r>
+                        <a:rPr sz="1300" b="1">
+                          <a:solidFill>
+                            <a:srgbClr val="B6C2D4"/>
+                          </a:solidFill>
+                          <a:latin typeface="Segoe UI"/>
+                        </a:rPr>
+                        <a:t>The load-bearing one</a:t>
+                      </a:r>
+                      <a:r>
+                        <a:rPr sz="1300" b="0">
+                          <a:solidFill>
+                            <a:srgbClr val="B6C2D4"/>
+                          </a:solidFill>
+                          <a:latin typeface="Segoe UI"/>
+                        </a:rPr>
+                        <a:t> — turns a mis-specified physics coefficient into a measurable one</a:t>
+                      </a:r>
+                    </a:p>
+                  </a:txBody>
+                  <a:tcPr marL="109728" marR="109728" marT="45720" marB="45720">
+                    <a:solidFill>
+                      <a:srgbClr val="0B1220"/>
+                    </a:solidFill>
+                  </a:tcPr>
+                </a:tc>
+              </a:tr>
+              <a:tr h="384048">
+                <a:tc>
+                  <a:txBody>
+                    <a:bodyPr wrap="square"/>
+                    <a:lstStyle/>
+                    <a:p>
+                      <a:r>
+                        <a:rPr sz="1300" b="0">
+                          <a:solidFill>
+                            <a:srgbClr val="B6C2D4"/>
+                          </a:solidFill>
+                          <a:latin typeface="Segoe UI"/>
+                        </a:rPr>
+                        <a:t>Engine loom taps — RPM, EGT, coolant, oil pressure, battery</a:t>
+                      </a:r>
+                    </a:p>
+                  </a:txBody>
+                  <a:tcPr marL="109728" marR="109728" marT="45720" marB="45720">
+                    <a:solidFill>
+                      <a:srgbClr val="0B1220"/>
+                    </a:solidFill>
+                  </a:tcPr>
+                </a:tc>
+                <a:tc>
+                  <a:txBody>
+                    <a:bodyPr wrap="square"/>
+                    <a:lstStyle/>
+                    <a:p>
+                      <a:r>
+                        <a:rPr sz="1100" b="0">
+                          <a:solidFill>
+                            <a:srgbClr val="B6C2D4"/>
+                          </a:solidFill>
+                          <a:latin typeface="Consolas"/>
+                        </a:rPr>
+                        <a:t>/maintenance</a:t>
+                      </a:r>
+                      <a:r>
+                        <a:rPr sz="1300" b="0">
+                          <a:solidFill>
+                            <a:srgbClr val="B6C2D4"/>
+                          </a:solidFill>
+                          <a:latin typeface="Segoe UI"/>
+                        </a:rPr>
+                        <a:t>, </a:t>
+                      </a:r>
+                      <a:r>
+                        <a:rPr sz="1100" b="0">
+                          <a:solidFill>
+                            <a:srgbClr val="B6C2D4"/>
+                          </a:solidFill>
+                          <a:latin typeface="Consolas"/>
+                        </a:rPr>
+                        <a:t>/safety</a:t>
+                      </a:r>
+                    </a:p>
+                  </a:txBody>
+                  <a:tcPr marL="109728" marR="109728" marT="45720" marB="45720">
+                    <a:solidFill>
+                      <a:srgbClr val="0B1220"/>
+                    </a:solidFill>
+                  </a:tcPr>
+                </a:tc>
+                <a:tc>
+                  <a:txBody>
+                    <a:bodyPr wrap="square"/>
+                    <a:lstStyle/>
+                    <a:p>
+                      <a:r>
+                        <a:rPr sz="1300" b="0">
+                          <a:solidFill>
+                            <a:srgbClr val="B6C2D4"/>
+                          </a:solidFill>
+                          <a:latin typeface="Segoe UI"/>
+                        </a:rPr>
+                        <a:t>The five streams the detector scores</a:t>
+                      </a:r>
+                    </a:p>
+                  </a:txBody>
+                  <a:tcPr marL="109728" marR="109728" marT="45720" marB="45720">
+                    <a:solidFill>
+                      <a:srgbClr val="0B1220"/>
+                    </a:solidFill>
+                  </a:tcPr>
+                </a:tc>
+              </a:tr>
+              <a:tr h="384048">
+                <a:tc>
+                  <a:txBody>
+                    <a:bodyPr wrap="square"/>
+                    <a:lstStyle/>
+                    <a:p>
+                      <a:r>
+                        <a:rPr sz="1300" b="0">
+                          <a:solidFill>
+                            <a:srgbClr val="B6C2D4"/>
+                          </a:solidFill>
+                          <a:latin typeface="Segoe UI"/>
+                        </a:rPr>
+                        <a:t>GNSS</a:t>
+                      </a:r>
+                    </a:p>
+                  </a:txBody>
+                  <a:tcPr marL="109728" marR="109728" marT="45720" marB="45720">
+                    <a:solidFill>
+                      <a:srgbClr val="0B1220"/>
+                    </a:solidFill>
+                  </a:tcPr>
+                </a:tc>
+                <a:tc>
+                  <a:txBody>
+                    <a:bodyPr wrap="square"/>
+                    <a:lstStyle/>
+                    <a:p>
+                      <a:r>
+                        <a:rPr sz="1100" b="0">
+                          <a:solidFill>
+                            <a:srgbClr val="B6C2D4"/>
+                          </a:solidFill>
+                          <a:latin typeface="Consolas"/>
+                        </a:rPr>
+                        <a:t>/route</a:t>
+                      </a:r>
+                      <a:r>
+                        <a:rPr sz="1300" b="0">
+                          <a:solidFill>
+                            <a:srgbClr val="B6C2D4"/>
+                          </a:solidFill>
+                          <a:latin typeface="Segoe UI"/>
+                        </a:rPr>
+                        <a:t>, voyage log</a:t>
+                      </a:r>
+                    </a:p>
+                  </a:txBody>
+                  <a:tcPr marL="109728" marR="109728" marT="45720" marB="45720">
+                    <a:solidFill>
+                      <a:srgbClr val="0B1220"/>
+                    </a:solidFill>
+                  </a:tcPr>
+                </a:tc>
+                <a:tc>
+                  <a:txBody>
+                    <a:bodyPr wrap="square"/>
+                    <a:lstStyle/>
+                    <a:p>
+                      <a:r>
+                        <a:rPr sz="1300" b="0">
+                          <a:solidFill>
+                            <a:srgbClr val="B6C2D4"/>
+                          </a:solidFill>
+                          <a:latin typeface="Segoe UI"/>
+                        </a:rPr>
+                        <a:t>Position and speed over ground</a:t>
+                      </a:r>
+                    </a:p>
+                  </a:txBody>
+                  <a:tcPr marL="109728" marR="109728" marT="45720" marB="45720">
+                    <a:solidFill>
+                      <a:srgbClr val="0B1220"/>
+                    </a:solidFill>
+                  </a:tcPr>
+                </a:tc>
+              </a:tr>
+              <a:tr h="384048">
+                <a:tc>
+                  <a:txBody>
+                    <a:bodyPr wrap="square"/>
+                    <a:lstStyle/>
+                    <a:p>
+                      <a:r>
+                        <a:rPr sz="1300" b="0">
+                          <a:solidFill>
+                            <a:srgbClr val="B6C2D4"/>
+                          </a:solidFill>
+                          <a:latin typeface="Segoe UI"/>
+                        </a:rPr>
+                        <a:t>IMU (~1 Hz)</a:t>
+                      </a:r>
+                    </a:p>
+                  </a:txBody>
+                  <a:tcPr marL="109728" marR="109728" marT="45720" marB="45720">
+                    <a:solidFill>
+                      <a:srgbClr val="0B1220"/>
+                    </a:solidFill>
+                  </a:tcPr>
+                </a:tc>
+                <a:tc>
+                  <a:txBody>
+                    <a:bodyPr wrap="square"/>
+                    <a:lstStyle/>
+                    <a:p>
+                      <a:r>
+                        <a:rPr sz="1300" b="0">
+                          <a:solidFill>
+                            <a:srgbClr val="B6C2D4"/>
+                          </a:solidFill>
+                          <a:latin typeface="Segoe UI"/>
+                        </a:rPr>
+                        <a:t>Duty cycle, sea state</a:t>
+                      </a:r>
+                    </a:p>
+                  </a:txBody>
+                  <a:tcPr marL="109728" marR="109728" marT="45720" marB="45720">
+                    <a:solidFill>
+                      <a:srgbClr val="0B1220"/>
+                    </a:solidFill>
+                  </a:tcPr>
+                </a:tc>
+                <a:tc>
+                  <a:txBody>
+                    <a:bodyPr wrap="square"/>
+                    <a:lstStyle/>
+                    <a:p>
+                      <a:r>
+                        <a:rPr sz="1300" b="0">
+                          <a:solidFill>
+                            <a:srgbClr val="B6C2D4"/>
+                          </a:solidFill>
+                          <a:latin typeface="Segoe UI"/>
+                        </a:rPr>
+                        <a:t>~1 Hz is the honest ceiling — see the bias slide</a:t>
+                      </a:r>
+                    </a:p>
+                  </a:txBody>
+                  <a:tcPr marL="109728" marR="109728" marT="45720" marB="45720">
+                    <a:solidFill>
+                      <a:srgbClr val="0B1220"/>
+                    </a:solidFill>
+                  </a:tcPr>
+                </a:tc>
+              </a:tr>
+            </a:tbl>
+          </a:graphicData>
+        </a:graphic>
+      </p:graphicFrame>
+      <p:sp>
+        <p:nvSpPr>
+          <p:cNvPr id="6" name="Rectangle 5"/>
+          <p:cNvSpPr/>
+          <p:nvPr/>
+        </p:nvSpPr>
+        <p:spPr>
+          <a:xfrm>
+            <a:off x="658368" y="6199632"/>
+            <a:ext cx="10874959" cy="12700"/>
+          </a:xfrm>
+          <a:prstGeom prst="rect">
+            <a:avLst/>
+          </a:prstGeom>
+          <a:solidFill>
+            <a:srgbClr val="1E293B"/>
+          </a:solidFill>
+          <a:ln>
+            <a:noFill/>
+          </a:ln>
+          <a:effectLst/>
+        </p:spPr>
+        <p:style>
+          <a:lnRef idx="1">
+            <a:schemeClr val="accent1"/>
+          </a:lnRef>
+          <a:fillRef idx="3">
+            <a:schemeClr val="accent1"/>
+          </a:fillRef>
+          <a:effectRef idx="2">
+            <a:schemeClr val="accent1"/>
+          </a:effectRef>
+          <a:fontRef idx="minor">
+            <a:schemeClr val="lt1"/>
+          </a:fontRef>
+        </p:style>
+        <p:txBody>
+          <a:bodyPr rtlCol="0" anchor="ctr"/>
+          <a:lstStyle/>
+          <a:p>
+            <a:pPr algn="ctr"/>
+          </a:p>
+        </p:txBody>
+      </p:sp>
+      <p:sp>
+        <p:nvSpPr>
+          <p:cNvPr id="7" name="TextBox 6"/>
+          <p:cNvSpPr txBox="1"/>
+          <p:nvPr/>
+        </p:nvSpPr>
+        <p:spPr>
+          <a:xfrm>
+            <a:off x="658368" y="6291072"/>
+            <a:ext cx="10874959" cy="292608"/>
+          </a:xfrm>
+          <a:prstGeom prst="rect">
+            <a:avLst/>
+          </a:prstGeom>
+          <a:noFill/>
+        </p:spPr>
+        <p:txBody>
+          <a:bodyPr wrap="none">
+            <a:spAutoFit/>
+          </a:bodyPr>
+          <a:lstStyle/>
+          <a:p>
+            <a:r>
+              <a:rPr sz="1000">
+                <a:solidFill>
+                  <a:srgbClr val="B6C2D4"/>
+                </a:solidFill>
+                <a:latin typeface="Segoe UI"/>
+              </a:rPr>
+              <a:t>Marine-AI  ·  Team SOLMATE  ·  ADVISORY ONLY — CAPTAIN COMMANDS</a:t>
+            </a:r>
+          </a:p>
+        </p:txBody>
+      </p:sp>
+      <p:sp>
+        <p:nvSpPr>
+          <p:cNvPr id="8" name="TextBox 7"/>
+          <p:cNvSpPr txBox="1"/>
+          <p:nvPr/>
+        </p:nvSpPr>
+        <p:spPr>
+          <a:xfrm>
+            <a:off x="10436047" y="6291072"/>
+            <a:ext cx="1097280" cy="292608"/>
+          </a:xfrm>
+          <a:prstGeom prst="rect">
+            <a:avLst/>
+          </a:prstGeom>
+          <a:noFill/>
+        </p:spPr>
+        <p:txBody>
+          <a:bodyPr wrap="none">
+            <a:spAutoFit/>
+          </a:bodyPr>
+          <a:lstStyle/>
+          <a:p>
+            <a:pPr algn="r"/>
+            <a:r>
+              <a:rPr sz="1000">
+                <a:solidFill>
+                  <a:srgbClr val="B6C2D4"/>
+                </a:solidFill>
+                <a:latin typeface="Consolas"/>
+              </a:rPr>
+              <a:t>19/24</a:t>
+            </a:r>
+          </a:p>
+        </p:txBody>
+      </p:sp>
+    </p:spTree>
+  </p:cSld>
+  <p:clrMapOvr>
+    <a:masterClrMapping/>
+  </p:clrMapOvr>
+</p:sld>
+</file>
+
+<file path=ppt/slides/slide21.xml><?xml version="1.0" encoding="utf-8"?>
+<p:sld xmlns:a="http://schemas.openxmlformats.org/drawingml/2006/main" xmlns:p="http://schemas.openxmlformats.org/presentationml/2006/main" xmlns:r="http://schemas.openxmlformats.org/officeDocument/2006/relationships">
+  <p:cSld>
+    <p:bg>
+      <p:bgPr>
+        <a:solidFill>
+          <a:srgbClr val="020617"/>
+        </a:solidFill>
+        <a:effectLst/>
+      </p:bgPr>
+    </p:bg>
+    <p:spTree>
+      <p:nvGrpSpPr>
+        <p:cNvPr id="1" name=""/>
+        <p:cNvGrpSpPr/>
+        <p:nvPr/>
+      </p:nvGrpSpPr>
+      <p:grpSpPr/>
+      <p:sp>
+        <p:nvSpPr>
+          <p:cNvPr id="2" name="TextBox 1"/>
+          <p:cNvSpPr txBox="1"/>
+          <p:nvPr/>
+        </p:nvSpPr>
+        <p:spPr>
+          <a:xfrm>
+            <a:off x="658368" y="475488"/>
+            <a:ext cx="10874959" cy="822960"/>
+          </a:xfrm>
+          <a:prstGeom prst="rect">
+            <a:avLst/>
+          </a:prstGeom>
+          <a:noFill/>
+        </p:spPr>
+        <p:txBody>
+          <a:bodyPr wrap="none">
+            <a:spAutoFit/>
+          </a:bodyPr>
+          <a:lstStyle/>
+          <a:p>
+            <a:r>
+              <a:rPr sz="3000" b="1">
+                <a:solidFill>
+                  <a:srgbClr val="F8FAFC"/>
+                </a:solidFill>
+                <a:latin typeface="Segoe UI"/>
+              </a:rPr>
+              <a:t>RESERVE 04 · Bias &amp; responsible AI</a:t>
+            </a:r>
+          </a:p>
+        </p:txBody>
+      </p:sp>
+      <p:sp>
+        <p:nvSpPr>
+          <p:cNvPr id="3" name="Rectangle 2"/>
+          <p:cNvSpPr/>
+          <p:nvPr/>
+        </p:nvSpPr>
+        <p:spPr>
+          <a:xfrm>
+            <a:off x="658368" y="1316736"/>
+            <a:ext cx="1005840" cy="38100"/>
+          </a:xfrm>
+          <a:prstGeom prst="rect">
+            <a:avLst/>
+          </a:prstGeom>
+          <a:solidFill>
+            <a:srgbClr val="F97316"/>
+          </a:solidFill>
+          <a:ln>
+            <a:noFill/>
+          </a:ln>
+          <a:effectLst/>
+        </p:spPr>
+        <p:style>
+          <a:lnRef idx="1">
+            <a:schemeClr val="accent1"/>
+          </a:lnRef>
+          <a:fillRef idx="3">
+            <a:schemeClr val="accent1"/>
+          </a:fillRef>
+          <a:effectRef idx="2">
+            <a:schemeClr val="accent1"/>
+          </a:effectRef>
+          <a:fontRef idx="minor">
+            <a:schemeClr val="lt1"/>
+          </a:fontRef>
+        </p:style>
+        <p:txBody>
+          <a:bodyPr rtlCol="0" anchor="ctr"/>
+          <a:lstStyle/>
+          <a:p>
+            <a:pPr algn="ctr"/>
+          </a:p>
+        </p:txBody>
+      </p:sp>
+      <p:graphicFrame>
+        <p:nvGraphicFramePr>
+          <p:cNvPr id="4" name="Table 3"/>
+          <p:cNvGraphicFramePr>
+            <a:graphicFrameLocks noGrp="1"/>
+          </p:cNvGraphicFramePr>
+          <p:nvPr/>
+        </p:nvGraphicFramePr>
+        <p:xfrm>
+          <a:off x="658368" y="1600200"/>
+          <a:ext cx="10874959" cy="2304288"/>
+        </p:xfrm>
+        <a:graphic>
+          <a:graphicData uri="http://schemas.openxmlformats.org/drawingml/2006/table">
+            <a:tbl>
+              <a:tblPr firstRow="1" bandRow="1">
+                <a:tableStyleId>{5C22544A-7EE6-4342-B048-85BDC9FD1C3A}</a:tableStyleId>
+              </a:tblPr>
+              <a:tblGrid>
+                <a:gridCol w="3624986"/>
+                <a:gridCol w="3624986"/>
+                <a:gridCol w="3624987"/>
+              </a:tblGrid>
+              <a:tr h="384048">
+                <a:tc>
+                  <a:txBody>
+                    <a:bodyPr wrap="square"/>
+                    <a:lstStyle/>
+                    <a:p>
+                      <a:r>
+                        <a:rPr sz="1300" b="1">
+                          <a:solidFill>
+                            <a:srgbClr val="F8FAFC"/>
+                          </a:solidFill>
+                          <a:latin typeface="Segoe UI"/>
+                        </a:rPr>
+                        <a:t>#</a:t>
+                      </a:r>
+                    </a:p>
+                  </a:txBody>
+                  <a:tcPr marL="109728" marR="109728" marT="45720" marB="45720">
+                    <a:solidFill>
+                      <a:srgbClr val="1E293B"/>
+                    </a:solidFill>
+                  </a:tcPr>
+                </a:tc>
+                <a:tc>
+                  <a:txBody>
+                    <a:bodyPr wrap="square"/>
+                    <a:lstStyle/>
+                    <a:p>
+                      <a:r>
+                        <a:rPr sz="1300" b="1">
+                          <a:solidFill>
+                            <a:srgbClr val="F8FAFC"/>
+                          </a:solidFill>
+                          <a:latin typeface="Segoe UI"/>
+                        </a:rPr>
+                        <a:t>Bias identified</a:t>
+                      </a:r>
+                    </a:p>
+                  </a:txBody>
+                  <a:tcPr marL="109728" marR="109728" marT="45720" marB="45720">
+                    <a:solidFill>
+                      <a:srgbClr val="1E293B"/>
+                    </a:solidFill>
+                  </a:tcPr>
+                </a:tc>
+                <a:tc>
+                  <a:txBody>
+                    <a:bodyPr wrap="square"/>
+                    <a:lstStyle/>
+                    <a:p>
+                      <a:r>
+                        <a:rPr sz="1300" b="1">
+                          <a:solidFill>
+                            <a:srgbClr val="F8FAFC"/>
+                          </a:solidFill>
+                          <a:latin typeface="Segoe UI"/>
+                        </a:rPr>
+                        <a:t>Mitigation shipped</a:t>
+                      </a:r>
+                    </a:p>
+                  </a:txBody>
+                  <a:tcPr marL="109728" marR="109728" marT="45720" marB="45720">
+                    <a:solidFill>
+                      <a:srgbClr val="1E293B"/>
+                    </a:solidFill>
+                  </a:tcPr>
+                </a:tc>
+              </a:tr>
+              <a:tr h="384048">
+                <a:tc>
+                  <a:txBody>
+                    <a:bodyPr wrap="square"/>
+                    <a:lstStyle/>
+                    <a:p>
+                      <a:r>
+                        <a:rPr sz="1300" b="0">
+                          <a:solidFill>
+                            <a:srgbClr val="B6C2D4"/>
+                          </a:solidFill>
+                          <a:latin typeface="Segoe UI"/>
+                        </a:rPr>
+                        <a:t>1</a:t>
+                      </a:r>
+                    </a:p>
+                  </a:txBody>
+                  <a:tcPr marL="109728" marR="109728" marT="45720" marB="45720">
+                    <a:solidFill>
+                      <a:srgbClr val="0B1220"/>
+                    </a:solidFill>
+                  </a:tcPr>
+                </a:tc>
+                <a:tc>
+                  <a:txBody>
+                    <a:bodyPr wrap="square"/>
+                    <a:lstStyle/>
+                    <a:p>
+                      <a:r>
+                        <a:rPr sz="1300" b="1">
+                          <a:solidFill>
+                            <a:srgbClr val="B6C2D4"/>
+                          </a:solidFill>
+                          <a:latin typeface="Segoe UI"/>
+                        </a:rPr>
+                        <a:t>Prime-mover bias</a:t>
+                      </a:r>
+                      <a:r>
+                        <a:rPr sz="1300" b="0">
+                          <a:solidFill>
+                            <a:srgbClr val="B6C2D4"/>
+                          </a:solidFill>
+                          <a:latin typeface="Segoe UI"/>
+                        </a:rPr>
+                        <a:t> — UCI CBM is a *gas turbine*, not a diesel</a:t>
+                      </a:r>
+                    </a:p>
+                  </a:txBody>
+                  <a:tcPr marL="109728" marR="109728" marT="45720" marB="45720">
+                    <a:solidFill>
+                      <a:srgbClr val="0B1220"/>
+                    </a:solidFill>
+                  </a:tcPr>
+                </a:tc>
+                <a:tc>
+                  <a:txBody>
+                    <a:bodyPr wrap="square"/>
+                    <a:lstStyle/>
+                    <a:p>
+                      <a:r>
+                        <a:rPr sz="1300" b="0">
+                          <a:solidFill>
+                            <a:srgbClr val="B6C2D4"/>
+                          </a:solidFill>
+                          <a:latin typeface="Segoe UI"/>
+                        </a:rPr>
+                        <a:t>Only the dimensionless </a:t>
+                      </a:r>
+                      <a:r>
+                        <a:rPr sz="1300" b="1">
+                          <a:solidFill>
+                            <a:srgbClr val="B6C2D4"/>
+                          </a:solidFill>
+                          <a:latin typeface="Segoe UI"/>
+                        </a:rPr>
+                        <a:t>wear penalty</a:t>
+                      </a:r>
+                      <a:r>
+                        <a:rPr sz="1300" b="0">
+                          <a:solidFill>
+                            <a:srgbClr val="B6C2D4"/>
+                          </a:solidFill>
+                          <a:latin typeface="Segoe UI"/>
+                        </a:rPr>
+                        <a:t> transfers. Healthy burn comes from published diesel BSFC. A regression test pins the diesel curve inside published part-load bands so it can never drift back</a:t>
+                      </a:r>
+                    </a:p>
+                  </a:txBody>
+                  <a:tcPr marL="109728" marR="109728" marT="45720" marB="45720">
+                    <a:solidFill>
+                      <a:srgbClr val="0B1220"/>
+                    </a:solidFill>
+                  </a:tcPr>
+                </a:tc>
+              </a:tr>
+              <a:tr h="384048">
+                <a:tc>
+                  <a:txBody>
+                    <a:bodyPr wrap="square"/>
+                    <a:lstStyle/>
+                    <a:p>
+                      <a:r>
+                        <a:rPr sz="1300" b="0">
+                          <a:solidFill>
+                            <a:srgbClr val="B6C2D4"/>
+                          </a:solidFill>
+                          <a:latin typeface="Segoe UI"/>
+                        </a:rPr>
+                        <a:t>2</a:t>
+                      </a:r>
+                    </a:p>
+                  </a:txBody>
+                  <a:tcPr marL="109728" marR="109728" marT="45720" marB="45720">
+                    <a:solidFill>
+                      <a:srgbClr val="0B1220"/>
+                    </a:solidFill>
+                  </a:tcPr>
+                </a:tc>
+                <a:tc>
+                  <a:txBody>
+                    <a:bodyPr wrap="square"/>
+                    <a:lstStyle/>
+                    <a:p>
+                      <a:r>
+                        <a:rPr sz="1300" b="1">
+                          <a:solidFill>
+                            <a:srgbClr val="B6C2D4"/>
+                          </a:solidFill>
+                          <a:latin typeface="Segoe UI"/>
+                        </a:rPr>
+                        <a:t>Sampling bias</a:t>
+                      </a:r>
+                      <a:r>
+                        <a:rPr sz="1300" b="0">
+                          <a:solidFill>
+                            <a:srgbClr val="B6C2D4"/>
+                          </a:solidFill>
+                          <a:latin typeface="Segoe UI"/>
+                        </a:rPr>
+                        <a:t> — wind, current, wave and load do </a:t>
+                      </a:r>
+                      <a:r>
+                        <a:rPr sz="1300" b="1">
+                          <a:solidFill>
+                            <a:srgbClr val="B6C2D4"/>
+                          </a:solidFill>
+                          <a:latin typeface="Segoe UI"/>
+                        </a:rPr>
+                        <a:t>not vary at all</a:t>
+                      </a:r>
+                      <a:r>
+                        <a:rPr sz="1300" b="0">
+                          <a:solidFill>
+                            <a:srgbClr val="B6C2D4"/>
+                          </a:solidFill>
+                          <a:latin typeface="Segoe UI"/>
+                        </a:rPr>
+                        <a:t> in UCI CBM</a:t>
+                      </a:r>
+                    </a:p>
+                  </a:txBody>
+                  <a:tcPr marL="109728" marR="109728" marT="45720" marB="45720">
+                    <a:solidFill>
+                      <a:srgbClr val="0B1220"/>
+                    </a:solidFill>
+                  </a:tcPr>
+                </a:tc>
+                <a:tc>
+                  <a:txBody>
+                    <a:bodyPr wrap="square"/>
+                    <a:lstStyle/>
+                    <a:p>
+                      <a:r>
+                        <a:rPr sz="1300" b="0">
+                          <a:solidFill>
+                            <a:srgbClr val="B6C2D4"/>
+                          </a:solidFill>
+                          <a:latin typeface="Segoe UI"/>
+                        </a:rPr>
+                        <a:t>The model does not claim to have learned them. Physics carries conditions→power; ML carries wear→fuel</a:t>
+                      </a:r>
+                    </a:p>
+                  </a:txBody>
+                  <a:tcPr marL="109728" marR="109728" marT="45720" marB="45720">
+                    <a:solidFill>
+                      <a:srgbClr val="0B1220"/>
+                    </a:solidFill>
+                  </a:tcPr>
+                </a:tc>
+              </a:tr>
+              <a:tr h="384048">
+                <a:tc>
+                  <a:txBody>
+                    <a:bodyPr wrap="square"/>
+                    <a:lstStyle/>
+                    <a:p>
+                      <a:r>
+                        <a:rPr sz="1300" b="0">
+                          <a:solidFill>
+                            <a:srgbClr val="B6C2D4"/>
+                          </a:solidFill>
+                          <a:latin typeface="Segoe UI"/>
+                        </a:rPr>
+                        <a:t>3</a:t>
+                      </a:r>
+                    </a:p>
+                  </a:txBody>
+                  <a:tcPr marL="109728" marR="109728" marT="45720" marB="45720">
+                    <a:solidFill>
+                      <a:srgbClr val="0B1220"/>
+                    </a:solidFill>
+                  </a:tcPr>
+                </a:tc>
+                <a:tc>
+                  <a:txBody>
+                    <a:bodyPr wrap="square"/>
+                    <a:lstStyle/>
+                    <a:p>
+                      <a:r>
+                        <a:rPr sz="1300" b="1">
+                          <a:solidFill>
+                            <a:srgbClr val="B6C2D4"/>
+                          </a:solidFill>
+                          <a:latin typeface="Segoe UI"/>
+                        </a:rPr>
+                        <a:t>Reference-vessel bias</a:t>
+                      </a:r>
+                      <a:r>
+                        <a:rPr sz="1300" b="0">
+                          <a:solidFill>
+                            <a:srgbClr val="B6C2D4"/>
+                          </a:solidFill>
+                          <a:latin typeface="Segoe UI"/>
+                        </a:rPr>
+                        <a:t> — a fleet-average baseline flags a healthy odd vessel</a:t>
+                      </a:r>
+                    </a:p>
+                  </a:txBody>
+                  <a:tcPr marL="109728" marR="109728" marT="45720" marB="45720">
+                    <a:solidFill>
+                      <a:srgbClr val="0B1220"/>
+                    </a:solidFill>
+                  </a:tcPr>
+                </a:tc>
+                <a:tc>
+                  <a:txBody>
+                    <a:bodyPr wrap="square"/>
+                    <a:lstStyle/>
+                    <a:p>
+                      <a:r>
+                        <a:rPr sz="1300" b="0">
+                          <a:solidFill>
+                            <a:srgbClr val="B6C2D4"/>
+                          </a:solidFill>
+                          <a:latin typeface="Segoe UI"/>
+                        </a:rPr>
+                        <a:t>The detector fits </a:t>
+                      </a:r>
+                      <a:r>
+                        <a:rPr sz="1300" b="1">
+                          <a:solidFill>
+                            <a:srgbClr val="B6C2D4"/>
+                          </a:solidFill>
+                          <a:latin typeface="Segoe UI"/>
+                        </a:rPr>
+                        <a:t>each vessel's own</a:t>
+                      </a:r>
+                      <a:r>
+                        <a:rPr sz="1300" b="0">
+                          <a:solidFill>
+                            <a:srgbClr val="B6C2D4"/>
+                          </a:solidFill>
+                          <a:latin typeface="Segoe UI"/>
+                        </a:rPr>
+                        <a:t> baseline. Measured: a healthy 24 V loom against a 12 V reference scored </a:t>
+                      </a:r>
+                      <a:r>
+                        <a:rPr sz="1300" b="1">
+                          <a:solidFill>
+                            <a:srgbClr val="B6C2D4"/>
+                          </a:solidFill>
+                          <a:latin typeface="Segoe UI"/>
+                        </a:rPr>
+                        <a:t>1.000 anomalous, battery z = +75</a:t>
+                      </a:r>
+                      <a:r>
+                        <a:rPr sz="1300" b="0">
+                          <a:solidFill>
+                            <a:srgbClr val="B6C2D4"/>
+                          </a:solidFill>
+                          <a:latin typeface="Segoe UI"/>
+                        </a:rPr>
+                        <a:t>; with its own baseline, </a:t>
+                      </a:r>
+                      <a:r>
+                        <a:rPr sz="1300" b="1">
+                          <a:solidFill>
+                            <a:srgbClr val="B6C2D4"/>
+                          </a:solidFill>
+                          <a:latin typeface="Segoe UI"/>
+                        </a:rPr>
+                        <a:t>0.032 and clear</a:t>
+                      </a:r>
+                      <a:r>
+                        <a:rPr sz="1300" b="0">
+                          <a:solidFill>
+                            <a:srgbClr val="B6C2D4"/>
+                          </a:solidFill>
+                          <a:latin typeface="Segoe UI"/>
+                        </a:rPr>
+                        <a:t> — while a +9 °C coolant drift still fires at 1.000</a:t>
+                      </a:r>
+                    </a:p>
+                  </a:txBody>
+                  <a:tcPr marL="109728" marR="109728" marT="45720" marB="45720">
+                    <a:solidFill>
+                      <a:srgbClr val="0B1220"/>
+                    </a:solidFill>
+                  </a:tcPr>
+                </a:tc>
+              </a:tr>
+              <a:tr h="384048">
+                <a:tc>
+                  <a:txBody>
+                    <a:bodyPr wrap="square"/>
+                    <a:lstStyle/>
+                    <a:p>
+                      <a:r>
+                        <a:rPr sz="1300" b="0">
+                          <a:solidFill>
+                            <a:srgbClr val="B6C2D4"/>
+                          </a:solidFill>
+                          <a:latin typeface="Segoe UI"/>
+                        </a:rPr>
+                        <a:t>4</a:t>
+                      </a:r>
+                    </a:p>
+                  </a:txBody>
+                  <a:tcPr marL="109728" marR="109728" marT="45720" marB="45720">
+                    <a:solidFill>
+                      <a:srgbClr val="0B1220"/>
+                    </a:solidFill>
+                  </a:tcPr>
+                </a:tc>
+                <a:tc>
+                  <a:txBody>
+                    <a:bodyPr wrap="square"/>
+                    <a:lstStyle/>
+                    <a:p>
+                      <a:r>
+                        <a:rPr sz="1300" b="1">
+                          <a:solidFill>
+                            <a:srgbClr val="B6C2D4"/>
+                          </a:solidFill>
+                          <a:latin typeface="Segoe UI"/>
+                        </a:rPr>
+                        <a:t>Sensor-capability bias</a:t>
+                      </a:r>
+                      <a:r>
+                        <a:rPr sz="1300" b="0">
+                          <a:solidFill>
+                            <a:srgbClr val="B6C2D4"/>
+                          </a:solidFill>
+                          <a:latin typeface="Segoe UI"/>
+                        </a:rPr>
+                        <a:t> — FEMTO is 25.6 kHz, our IMU ~1 Hz</a:t>
+                      </a:r>
+                    </a:p>
+                  </a:txBody>
+                  <a:tcPr marL="109728" marR="109728" marT="45720" marB="45720">
+                    <a:solidFill>
+                      <a:srgbClr val="0B1220"/>
+                    </a:solidFill>
+                  </a:tcPr>
+                </a:tc>
+                <a:tc>
+                  <a:txBody>
+                    <a:bodyPr wrap="square"/>
+                    <a:lstStyle/>
+                    <a:p>
+                      <a:r>
+                        <a:rPr sz="1300" b="0">
+                          <a:solidFill>
+                            <a:srgbClr val="B6C2D4"/>
+                          </a:solidFill>
+                          <a:latin typeface="Segoe UI"/>
+                        </a:rPr>
+                        <a:t>Dataset </a:t>
+                      </a:r>
+                      <a:r>
+                        <a:rPr sz="1300" b="1">
+                          <a:solidFill>
+                            <a:srgbClr val="B6C2D4"/>
+                          </a:solidFill>
+                          <a:latin typeface="Segoe UI"/>
+                        </a:rPr>
+                        <a:t>dropped</a:t>
+                      </a:r>
+                      <a:r>
+                        <a:rPr sz="1300" b="0">
+                          <a:solidFill>
+                            <a:srgbClr val="B6C2D4"/>
+                          </a:solidFill>
+                          <a:latin typeface="Segoe UI"/>
+                        </a:rPr>
+                        <a:t>. Using it would imply a diagnostic the sensor physically cannot deliver</a:t>
+                      </a:r>
+                    </a:p>
+                  </a:txBody>
+                  <a:tcPr marL="109728" marR="109728" marT="45720" marB="45720">
+                    <a:solidFill>
+                      <a:srgbClr val="0B1220"/>
+                    </a:solidFill>
+                  </a:tcPr>
+                </a:tc>
+              </a:tr>
+              <a:tr h="384048">
+                <a:tc>
+                  <a:txBody>
+                    <a:bodyPr wrap="square"/>
+                    <a:lstStyle/>
+                    <a:p>
+                      <a:r>
+                        <a:rPr sz="1300" b="0">
+                          <a:solidFill>
+                            <a:srgbClr val="B6C2D4"/>
+                          </a:solidFill>
+                          <a:latin typeface="Segoe UI"/>
+                        </a:rPr>
+                        <a:t>5</a:t>
+                      </a:r>
+                    </a:p>
+                  </a:txBody>
+                  <a:tcPr marL="109728" marR="109728" marT="45720" marB="45720">
+                    <a:solidFill>
+                      <a:srgbClr val="0B1220"/>
+                    </a:solidFill>
+                  </a:tcPr>
+                </a:tc>
+                <a:tc>
+                  <a:txBody>
+                    <a:bodyPr wrap="square"/>
+                    <a:lstStyle/>
+                    <a:p>
+                      <a:r>
+                        <a:rPr sz="1300" b="1">
+                          <a:solidFill>
+                            <a:srgbClr val="B6C2D4"/>
+                          </a:solidFill>
+                          <a:latin typeface="Segoe UI"/>
+                        </a:rPr>
+                        <a:t>Self-serving baseline</a:t>
+                      </a:r>
+                      <a:r>
+                        <a:rPr sz="1300" b="0">
+                          <a:solidFill>
+                            <a:srgbClr val="B6C2D4"/>
+                          </a:solidFill>
+                          <a:latin typeface="Segoe UI"/>
+                        </a:rPr>
+                        <a:t> — a counterfactual we pick flatters us</a:t>
+                      </a:r>
+                    </a:p>
+                  </a:txBody>
+                  <a:tcPr marL="109728" marR="109728" marT="45720" marB="45720">
+                    <a:solidFill>
+                      <a:srgbClr val="0B1220"/>
+                    </a:solidFill>
+                  </a:tcPr>
+                </a:tc>
+                <a:tc>
+                  <a:txBody>
+                    <a:bodyPr wrap="square"/>
+                    <a:lstStyle/>
+                    <a:p>
+                      <a:r>
+                        <a:rPr sz="1300" b="0">
+                          <a:solidFill>
+                            <a:srgbClr val="B6C2D4"/>
+                          </a:solidFill>
+                          <a:latin typeface="Segoe UI"/>
+                        </a:rPr>
+                        <a:t>Emissions baseline is </a:t>
+                      </a:r>
+                      <a:r>
+                        <a:rPr sz="1100" b="0">
+                          <a:solidFill>
+                            <a:srgbClr val="B6C2D4"/>
+                          </a:solidFill>
+                          <a:latin typeface="Consolas"/>
+                        </a:rPr>
+                        <a:t>own_prior_route</a:t>
+                      </a:r>
+                      <a:r>
+                        <a:rPr sz="1300" b="0">
+                          <a:solidFill>
+                            <a:srgbClr val="B6C2D4"/>
+                          </a:solidFill>
+                          <a:latin typeface="Segoe UI"/>
+                        </a:rPr>
+                        <a:t>, the median fuel/nm of ≥3 prior runs. The first three crossings honestly report </a:t>
+                      </a:r>
+                      <a:r>
+                        <a:rPr sz="1300" b="1">
+                          <a:solidFill>
+                            <a:srgbClr val="B6C2D4"/>
+                          </a:solidFill>
+                          <a:latin typeface="Segoe UI"/>
+                        </a:rPr>
+                        <a:t>"no baseline"</a:t>
+                      </a:r>
+                    </a:p>
+                  </a:txBody>
+                  <a:tcPr marL="109728" marR="109728" marT="45720" marB="45720">
+                    <a:solidFill>
+                      <a:srgbClr val="0B1220"/>
+                    </a:solidFill>
+                  </a:tcPr>
+                </a:tc>
+              </a:tr>
+            </a:tbl>
+          </a:graphicData>
+        </a:graphic>
+      </p:graphicFrame>
+      <p:sp>
+        <p:nvSpPr>
+          <p:cNvPr id="5" name="TextBox 4"/>
+          <p:cNvSpPr txBox="1"/>
+          <p:nvPr/>
+        </p:nvSpPr>
+        <p:spPr>
+          <a:xfrm>
+            <a:off x="658368" y="4178808"/>
+            <a:ext cx="10874959" cy="1856232"/>
+          </a:xfrm>
+          <a:prstGeom prst="rect">
+            <a:avLst/>
+          </a:prstGeom>
+          <a:noFill/>
+        </p:spPr>
+        <p:txBody>
+          <a:bodyPr wrap="square" anchor="t">
+            <a:spAutoFit/>
+          </a:bodyPr>
+          <a:lstStyle/>
+          <a:p>
+            <a:pPr>
+              <a:spcAft>
+                <a:spcPts val="900"/>
+              </a:spcAft>
+            </a:pPr>
+            <a:r>
+              <a:rPr sz="1600">
+                <a:solidFill>
+                  <a:srgbClr val="F97316"/>
+                </a:solidFill>
+                <a:latin typeface="Segoe UI"/>
+              </a:rPr>
+              <a:t>— </a:t>
+            </a:r>
+            <a:r>
+              <a:rPr sz="1600" b="1">
+                <a:solidFill>
+                  <a:srgbClr val="F8FAFC"/>
+                </a:solidFill>
+                <a:latin typeface="Segoe UI"/>
+              </a:rPr>
+              <a:t>Language:</a:t>
+            </a:r>
+            <a:r>
+              <a:rPr sz="1600" b="0">
+                <a:solidFill>
+                  <a:srgbClr val="F8FAFC"/>
+                </a:solidFill>
+                <a:latin typeface="Segoe UI"/>
+              </a:rPr>
+              <a:t> advisories are English and Filipino, guarded — numbers preserved exactly, no imperative mood.</a:t>
+            </a:r>
+          </a:p>
+        </p:txBody>
+      </p:sp>
+      <p:sp>
+        <p:nvSpPr>
+          <p:cNvPr id="6" name="Rectangle 5"/>
+          <p:cNvSpPr/>
+          <p:nvPr/>
+        </p:nvSpPr>
+        <p:spPr>
+          <a:xfrm>
+            <a:off x="658368" y="6199632"/>
+            <a:ext cx="10874959" cy="12700"/>
+          </a:xfrm>
+          <a:prstGeom prst="rect">
+            <a:avLst/>
+          </a:prstGeom>
+          <a:solidFill>
+            <a:srgbClr val="1E293B"/>
+          </a:solidFill>
+          <a:ln>
+            <a:noFill/>
+          </a:ln>
+          <a:effectLst/>
+        </p:spPr>
+        <p:style>
+          <a:lnRef idx="1">
+            <a:schemeClr val="accent1"/>
+          </a:lnRef>
+          <a:fillRef idx="3">
+            <a:schemeClr val="accent1"/>
+          </a:fillRef>
+          <a:effectRef idx="2">
+            <a:schemeClr val="accent1"/>
+          </a:effectRef>
+          <a:fontRef idx="minor">
+            <a:schemeClr val="lt1"/>
+          </a:fontRef>
+        </p:style>
+        <p:txBody>
+          <a:bodyPr rtlCol="0" anchor="ctr"/>
+          <a:lstStyle/>
+          <a:p>
+            <a:pPr algn="ctr"/>
+          </a:p>
+        </p:txBody>
+      </p:sp>
+      <p:sp>
+        <p:nvSpPr>
+          <p:cNvPr id="7" name="TextBox 6"/>
+          <p:cNvSpPr txBox="1"/>
+          <p:nvPr/>
+        </p:nvSpPr>
+        <p:spPr>
+          <a:xfrm>
+            <a:off x="658368" y="6291072"/>
+            <a:ext cx="10874959" cy="292608"/>
+          </a:xfrm>
+          <a:prstGeom prst="rect">
+            <a:avLst/>
+          </a:prstGeom>
+          <a:noFill/>
+        </p:spPr>
+        <p:txBody>
+          <a:bodyPr wrap="none">
+            <a:spAutoFit/>
+          </a:bodyPr>
+          <a:lstStyle/>
+          <a:p>
+            <a:r>
+              <a:rPr sz="1000">
+                <a:solidFill>
+                  <a:srgbClr val="B6C2D4"/>
+                </a:solidFill>
+                <a:latin typeface="Segoe UI"/>
+              </a:rPr>
+              <a:t>Marine-AI  ·  Team SOLMATE  ·  ADVISORY ONLY — CAPTAIN COMMANDS</a:t>
+            </a:r>
+          </a:p>
+        </p:txBody>
+      </p:sp>
+      <p:sp>
+        <p:nvSpPr>
+          <p:cNvPr id="8" name="TextBox 7"/>
+          <p:cNvSpPr txBox="1"/>
+          <p:nvPr/>
+        </p:nvSpPr>
+        <p:spPr>
+          <a:xfrm>
+            <a:off x="10436047" y="6291072"/>
+            <a:ext cx="1097280" cy="292608"/>
+          </a:xfrm>
+          <a:prstGeom prst="rect">
+            <a:avLst/>
+          </a:prstGeom>
+          <a:noFill/>
+        </p:spPr>
+        <p:txBody>
+          <a:bodyPr wrap="none">
+            <a:spAutoFit/>
+          </a:bodyPr>
+          <a:lstStyle/>
+          <a:p>
+            <a:pPr algn="r"/>
+            <a:r>
+              <a:rPr sz="1000">
+                <a:solidFill>
+                  <a:srgbClr val="B6C2D4"/>
+                </a:solidFill>
+                <a:latin typeface="Consolas"/>
+              </a:rPr>
+              <a:t>20/24</a:t>
+            </a:r>
+          </a:p>
+        </p:txBody>
+      </p:sp>
+    </p:spTree>
+  </p:cSld>
+  <p:clrMapOvr>
+    <a:masterClrMapping/>
+  </p:clrMapOvr>
+</p:sld>
+</file>
+
+<file path=ppt/slides/slide22.xml><?xml version="1.0" encoding="utf-8"?>
+<p:sld xmlns:a="http://schemas.openxmlformats.org/drawingml/2006/main" xmlns:p="http://schemas.openxmlformats.org/presentationml/2006/main" xmlns:r="http://schemas.openxmlformats.org/officeDocument/2006/relationships">
+  <p:cSld>
+    <p:bg>
+      <p:bgPr>
+        <a:solidFill>
+          <a:srgbClr val="020617"/>
+        </a:solidFill>
+        <a:effectLst/>
+      </p:bgPr>
+    </p:bg>
+    <p:spTree>
+      <p:nvGrpSpPr>
+        <p:cNvPr id="1" name=""/>
+        <p:cNvGrpSpPr/>
+        <p:nvPr/>
+      </p:nvGrpSpPr>
+      <p:grpSpPr/>
+      <p:sp>
+        <p:nvSpPr>
+          <p:cNvPr id="2" name="TextBox 1"/>
+          <p:cNvSpPr txBox="1"/>
+          <p:nvPr/>
+        </p:nvSpPr>
+        <p:spPr>
+          <a:xfrm>
+            <a:off x="658368" y="475488"/>
+            <a:ext cx="10874959" cy="822960"/>
+          </a:xfrm>
+          <a:prstGeom prst="rect">
+            <a:avLst/>
+          </a:prstGeom>
+          <a:noFill/>
+        </p:spPr>
+        <p:txBody>
+          <a:bodyPr wrap="none">
+            <a:spAutoFit/>
+          </a:bodyPr>
+          <a:lstStyle/>
+          <a:p>
+            <a:r>
+              <a:rPr sz="3000" b="1">
+                <a:solidFill>
+                  <a:srgbClr val="F8FAFC"/>
+                </a:solidFill>
+                <a:latin typeface="Segoe UI"/>
+              </a:rPr>
+              <a:t>RESERVE 05 · Extended architecture</a:t>
+            </a:r>
+          </a:p>
+        </p:txBody>
+      </p:sp>
+      <p:sp>
+        <p:nvSpPr>
+          <p:cNvPr id="3" name="Rectangle 2"/>
+          <p:cNvSpPr/>
+          <p:nvPr/>
+        </p:nvSpPr>
+        <p:spPr>
+          <a:xfrm>
+            <a:off x="658368" y="1316736"/>
+            <a:ext cx="1005840" cy="38100"/>
+          </a:xfrm>
+          <a:prstGeom prst="rect">
+            <a:avLst/>
+          </a:prstGeom>
+          <a:solidFill>
+            <a:srgbClr val="F97316"/>
+          </a:solidFill>
+          <a:ln>
+            <a:noFill/>
+          </a:ln>
+          <a:effectLst/>
+        </p:spPr>
+        <p:style>
+          <a:lnRef idx="1">
+            <a:schemeClr val="accent1"/>
+          </a:lnRef>
+          <a:fillRef idx="3">
+            <a:schemeClr val="accent1"/>
+          </a:fillRef>
+          <a:effectRef idx="2">
+            <a:schemeClr val="accent1"/>
+          </a:effectRef>
+          <a:fontRef idx="minor">
+            <a:schemeClr val="lt1"/>
+          </a:fontRef>
+        </p:style>
+        <p:txBody>
+          <a:bodyPr rtlCol="0" anchor="ctr"/>
+          <a:lstStyle/>
+          <a:p>
+            <a:pPr algn="ctr"/>
+          </a:p>
+        </p:txBody>
+      </p:sp>
+      <p:sp>
+        <p:nvSpPr>
+          <p:cNvPr id="4" name="TextBox 3"/>
+          <p:cNvSpPr txBox="1"/>
+          <p:nvPr/>
+        </p:nvSpPr>
+        <p:spPr>
+          <a:xfrm>
+            <a:off x="658368" y="1600200"/>
+            <a:ext cx="10874959" cy="4434840"/>
+          </a:xfrm>
+          <a:prstGeom prst="rect">
+            <a:avLst/>
+          </a:prstGeom>
+          <a:noFill/>
+        </p:spPr>
+        <p:txBody>
+          <a:bodyPr wrap="square" anchor="t">
+            <a:spAutoFit/>
+          </a:bodyPr>
+          <a:lstStyle/>
+          <a:p>
+            <a:pPr>
+              <a:spcAft>
+                <a:spcPts val="900"/>
+              </a:spcAft>
+            </a:pPr>
+            <a:r>
+              <a:rPr sz="1600">
+                <a:solidFill>
+                  <a:srgbClr val="F97316"/>
+                </a:solidFill>
+                <a:latin typeface="Segoe UI"/>
+              </a:rPr>
+              <a:t>— </a:t>
+            </a:r>
+            <a:r>
+              <a:rPr sz="1600" b="1">
+                <a:solidFill>
+                  <a:srgbClr val="F8FAFC"/>
+                </a:solidFill>
+                <a:latin typeface="Segoe UI"/>
+              </a:rPr>
+              <a:t>Three deterministic modules decide · one LLM phrases · the captain commands.</a:t>
+            </a:r>
+          </a:p>
+          <a:p>
+            <a:pPr>
+              <a:spcAft>
+                <a:spcPts val="900"/>
+              </a:spcAft>
+            </a:pPr>
+            <a:r>
+              <a:rPr sz="1600">
+                <a:solidFill>
+                  <a:srgbClr val="F97316"/>
+                </a:solidFill>
+                <a:latin typeface="Segoe UI"/>
+              </a:rPr>
+              <a:t>— </a:t>
+            </a:r>
+            <a:r>
+              <a:rPr sz="1600" b="0">
+                <a:solidFill>
+                  <a:srgbClr val="F8FAFC"/>
+                </a:solidFill>
+                <a:latin typeface="Segoe UI"/>
+              </a:rPr>
+              <a:t>Eight endpoints on one FastAPI service: </a:t>
+            </a:r>
+            <a:r>
+              <a:rPr sz="1400" b="0">
+                <a:solidFill>
+                  <a:srgbClr val="B6C2D4"/>
+                </a:solidFill>
+                <a:latin typeface="Consolas"/>
+              </a:rPr>
+              <a:t>/advise</a:t>
+            </a:r>
+            <a:r>
+              <a:rPr sz="1600" b="0">
+                <a:solidFill>
+                  <a:srgbClr val="F8FAFC"/>
+                </a:solidFill>
+                <a:latin typeface="Segoe UI"/>
+              </a:rPr>
+              <a:t> </a:t>
+            </a:r>
+            <a:r>
+              <a:rPr sz="1400" b="0">
+                <a:solidFill>
+                  <a:srgbClr val="B6C2D4"/>
+                </a:solidFill>
+                <a:latin typeface="Consolas"/>
+              </a:rPr>
+              <a:t>/route</a:t>
+            </a:r>
+            <a:r>
+              <a:rPr sz="1600" b="0">
+                <a:solidFill>
+                  <a:srgbClr val="F8FAFC"/>
+                </a:solidFill>
+                <a:latin typeface="Segoe UI"/>
+              </a:rPr>
+              <a:t> </a:t>
+            </a:r>
+            <a:r>
+              <a:rPr sz="1400" b="0">
+                <a:solidFill>
+                  <a:srgbClr val="B6C2D4"/>
+                </a:solidFill>
+                <a:latin typeface="Consolas"/>
+              </a:rPr>
+              <a:t>/maintenance</a:t>
+            </a:r>
+            <a:r>
+              <a:rPr sz="1600" b="0">
+                <a:solidFill>
+                  <a:srgbClr val="F8FAFC"/>
+                </a:solidFill>
+                <a:latin typeface="Segoe UI"/>
+              </a:rPr>
+              <a:t> </a:t>
+            </a:r>
+            <a:r>
+              <a:rPr sz="1400" b="0">
+                <a:solidFill>
+                  <a:srgbClr val="B6C2D4"/>
+                </a:solidFill>
+                <a:latin typeface="Consolas"/>
+              </a:rPr>
+              <a:t>/safety</a:t>
+            </a:r>
+            <a:r>
+              <a:rPr sz="1600" b="0">
+                <a:solidFill>
+                  <a:srgbClr val="F8FAFC"/>
+                </a:solidFill>
+                <a:latin typeface="Segoe UI"/>
+              </a:rPr>
+              <a:t> </a:t>
+            </a:r>
+            <a:r>
+              <a:rPr sz="1400" b="0">
+                <a:solidFill>
+                  <a:srgbClr val="B6C2D4"/>
+                </a:solidFill>
+                <a:latin typeface="Consolas"/>
+              </a:rPr>
+              <a:t>/voyages</a:t>
+            </a:r>
+            <a:r>
+              <a:rPr sz="1600" b="0">
+                <a:solidFill>
+                  <a:srgbClr val="F8FAFC"/>
+                </a:solidFill>
+                <a:latin typeface="Segoe UI"/>
+              </a:rPr>
+              <a:t> </a:t>
+            </a:r>
+            <a:r>
+              <a:rPr sz="1400" b="0">
+                <a:solidFill>
+                  <a:srgbClr val="B6C2D4"/>
+                </a:solidFill>
+                <a:latin typeface="Consolas"/>
+              </a:rPr>
+              <a:t>/emissions/report(.csv)</a:t>
+            </a:r>
+            <a:r>
+              <a:rPr sz="1600" b="0">
+                <a:solidFill>
+                  <a:srgbClr val="F8FAFC"/>
+                </a:solidFill>
+                <a:latin typeface="Segoe UI"/>
+              </a:rPr>
+              <a:t> </a:t>
+            </a:r>
+            <a:r>
+              <a:rPr sz="1400" b="0">
+                <a:solidFill>
+                  <a:srgbClr val="B6C2D4"/>
+                </a:solidFill>
+                <a:latin typeface="Consolas"/>
+              </a:rPr>
+              <a:t>/health</a:t>
+            </a:r>
+            <a:r>
+              <a:rPr sz="1600" b="0">
+                <a:solidFill>
+                  <a:srgbClr val="F8FAFC"/>
+                </a:solidFill>
+                <a:latin typeface="Segoe UI"/>
+              </a:rPr>
+              <a:t>.</a:t>
+            </a:r>
+          </a:p>
+          <a:p>
+            <a:pPr>
+              <a:spcAft>
+                <a:spcPts val="900"/>
+              </a:spcAft>
+            </a:pPr>
+            <a:r>
+              <a:rPr sz="1600">
+                <a:solidFill>
+                  <a:srgbClr val="F97316"/>
+                </a:solidFill>
+                <a:latin typeface="Segoe UI"/>
+              </a:rPr>
+              <a:t>— </a:t>
+            </a:r>
+            <a:r>
+              <a:rPr sz="1600" b="1">
+                <a:solidFill>
+                  <a:srgbClr val="F8FAFC"/>
+                </a:solidFill>
+                <a:latin typeface="Segoe UI"/>
+              </a:rPr>
+              <a:t>Cadence, measured:</a:t>
+            </a:r>
+            <a:r>
+              <a:rPr sz="1600" b="0">
+                <a:solidFill>
+                  <a:srgbClr val="F8FAFC"/>
+                </a:solidFill>
+                <a:latin typeface="Segoe UI"/>
+              </a:rPr>
+              <a:t> </a:t>
+            </a:r>
+            <a:r>
+              <a:rPr sz="1400" b="0">
+                <a:solidFill>
+                  <a:srgbClr val="B6C2D4"/>
+                </a:solidFill>
+                <a:latin typeface="Consolas"/>
+              </a:rPr>
+              <a:t>/advise</a:t>
+            </a:r>
+            <a:r>
+              <a:rPr sz="1600" b="0">
+                <a:solidFill>
+                  <a:srgbClr val="F8FAFC"/>
+                </a:solidFill>
+                <a:latin typeface="Segoe UI"/>
+              </a:rPr>
+              <a:t> 1 s · </a:t>
+            </a:r>
+            <a:r>
+              <a:rPr sz="1400" b="0">
+                <a:solidFill>
+                  <a:srgbClr val="B6C2D4"/>
+                </a:solidFill>
+                <a:latin typeface="Consolas"/>
+              </a:rPr>
+              <a:t>/maintenance</a:t>
+            </a:r>
+            <a:r>
+              <a:rPr sz="1600" b="0">
+                <a:solidFill>
+                  <a:srgbClr val="F8FAFC"/>
+                </a:solidFill>
+                <a:latin typeface="Segoe UI"/>
+              </a:rPr>
+              <a:t> 4 s · </a:t>
+            </a:r>
+            <a:r>
+              <a:rPr sz="1400" b="0">
+                <a:solidFill>
+                  <a:srgbClr val="B6C2D4"/>
+                </a:solidFill>
+                <a:latin typeface="Consolas"/>
+              </a:rPr>
+              <a:t>/route</a:t>
+            </a:r>
+            <a:r>
+              <a:rPr sz="1600" b="0">
+                <a:solidFill>
+                  <a:srgbClr val="F8FAFC"/>
+                </a:solidFill>
+                <a:latin typeface="Segoe UI"/>
+              </a:rPr>
+              <a:t> event-driven with a 30 s floor. Route is planned at the dock; throttle is per-second.</a:t>
+            </a:r>
+          </a:p>
+          <a:p>
+            <a:pPr>
+              <a:spcAft>
+                <a:spcPts val="900"/>
+              </a:spcAft>
+            </a:pPr>
+            <a:r>
+              <a:rPr sz="1600">
+                <a:solidFill>
+                  <a:srgbClr val="F97316"/>
+                </a:solidFill>
+                <a:latin typeface="Segoe UI"/>
+              </a:rPr>
+              <a:t>— </a:t>
+            </a:r>
+            <a:r>
+              <a:rPr sz="1600" b="1">
+                <a:solidFill>
+                  <a:srgbClr val="F8FAFC"/>
+                </a:solidFill>
+                <a:latin typeface="Segoe UI"/>
+              </a:rPr>
+              <a:t>Two boundaries enforced by tests, not prose:</a:t>
+            </a:r>
+          </a:p>
+          <a:p>
+            <a:pPr lvl="1">
+              <a:spcAft>
+                <a:spcPts val="900"/>
+              </a:spcAft>
+            </a:pPr>
+            <a:r>
+              <a:rPr sz="1350">
+                <a:solidFill>
+                  <a:srgbClr val="B6C2D4"/>
+                </a:solidFill>
+                <a:latin typeface="Segoe UI"/>
+              </a:rPr>
+              <a:t>· </a:t>
+            </a:r>
+            <a:r>
+              <a:rPr sz="1150" b="0">
+                <a:solidFill>
+                  <a:srgbClr val="B6C2D4"/>
+                </a:solidFill>
+                <a:latin typeface="Consolas"/>
+              </a:rPr>
+              <a:t>test_safety_never_imports_a_model</a:t>
+            </a:r>
+            <a:r>
+              <a:rPr sz="1350" b="0">
+                <a:solidFill>
+                  <a:srgbClr val="B6C2D4"/>
+                </a:solidFill>
+                <a:latin typeface="Segoe UI"/>
+              </a:rPr>
+              <a:t> greps the safety module for </a:t>
+            </a:r>
+            <a:r>
+              <a:rPr sz="1150" b="0">
+                <a:solidFill>
+                  <a:srgbClr val="B6C2D4"/>
+                </a:solidFill>
+                <a:latin typeface="Consolas"/>
+              </a:rPr>
+              <a:t>services.speed</a:t>
+            </a:r>
+            <a:r>
+              <a:rPr sz="1350" b="0">
+                <a:solidFill>
+                  <a:srgbClr val="B6C2D4"/>
+                </a:solidFill>
+                <a:latin typeface="Segoe UI"/>
+              </a:rPr>
+              <a:t>, </a:t>
+            </a:r>
+            <a:r>
+              <a:rPr sz="1150" b="0">
+                <a:solidFill>
+                  <a:srgbClr val="B6C2D4"/>
+                </a:solidFill>
+                <a:latin typeface="Consolas"/>
+              </a:rPr>
+              <a:t>services.maintenance</a:t>
+            </a:r>
+            <a:r>
+              <a:rPr sz="1350" b="0">
+                <a:solidFill>
+                  <a:srgbClr val="B6C2D4"/>
+                </a:solidFill>
+                <a:latin typeface="Segoe UI"/>
+              </a:rPr>
+              <a:t>, </a:t>
+            </a:r>
+            <a:r>
+              <a:rPr sz="1150" b="0">
+                <a:solidFill>
+                  <a:srgbClr val="B6C2D4"/>
+                </a:solidFill>
+                <a:latin typeface="Consolas"/>
+              </a:rPr>
+              <a:t>onnxruntime</a:t>
+            </a:r>
+            <a:r>
+              <a:rPr sz="1350" b="0">
+                <a:solidFill>
+                  <a:srgbClr val="B6C2D4"/>
+                </a:solidFill>
+                <a:latin typeface="Segoe UI"/>
+              </a:rPr>
+              <a:t>, </a:t>
+            </a:r>
+            <a:r>
+              <a:rPr sz="1150" b="0">
+                <a:solidFill>
+                  <a:srgbClr val="B6C2D4"/>
+                </a:solidFill>
+                <a:latin typeface="Consolas"/>
+              </a:rPr>
+              <a:t>numpy</a:t>
+            </a:r>
+            <a:r>
+              <a:rPr sz="1350" b="0">
+                <a:solidFill>
+                  <a:srgbClr val="B6C2D4"/>
+                </a:solidFill>
+                <a:latin typeface="Segoe UI"/>
+              </a:rPr>
+              <a:t>. Safety stays rule-based.</a:t>
+            </a:r>
+          </a:p>
+          <a:p>
+            <a:pPr lvl="1">
+              <a:spcAft>
+                <a:spcPts val="900"/>
+              </a:spcAft>
+            </a:pPr>
+            <a:r>
+              <a:rPr sz="1350">
+                <a:solidFill>
+                  <a:srgbClr val="B6C2D4"/>
+                </a:solidFill>
+                <a:latin typeface="Segoe UI"/>
+              </a:rPr>
+              <a:t>· </a:t>
+            </a:r>
+            <a:r>
+              <a:rPr sz="1150" b="0">
+                <a:solidFill>
+                  <a:srgbClr val="B6C2D4"/>
+                </a:solidFill>
+                <a:latin typeface="Consolas"/>
+              </a:rPr>
+              <a:t>test_duty_never_moves_the_anomaly_score</a:t>
+            </a:r>
+            <a:r>
+              <a:rPr sz="1350" b="0">
+                <a:solidFill>
+                  <a:srgbClr val="B6C2D4"/>
+                </a:solidFill>
+                <a:latin typeface="Segoe UI"/>
+              </a:rPr>
+              <a:t> — working an engine hard is exposure, not a fault. Otherwise every busy crossing lights the strip and crews learn to ignore it.</a:t>
+            </a:r>
+          </a:p>
+          <a:p>
+            <a:pPr>
+              <a:spcAft>
+                <a:spcPts val="900"/>
+              </a:spcAft>
+            </a:pPr>
+            <a:r>
+              <a:rPr sz="1600">
+                <a:solidFill>
+                  <a:srgbClr val="F97316"/>
+                </a:solidFill>
+                <a:latin typeface="Segoe UI"/>
+              </a:rPr>
+              <a:t>— </a:t>
+            </a:r>
+            <a:r>
+              <a:rPr sz="1600" b="1">
+                <a:solidFill>
+                  <a:srgbClr val="F8FAFC"/>
+                </a:solidFill>
+                <a:latin typeface="Segoe UI"/>
+              </a:rPr>
+              <a:t>Degrades rather than fails:</a:t>
+            </a:r>
+            <a:r>
+              <a:rPr sz="1600" b="0">
+                <a:solidFill>
+                  <a:srgbClr val="F8FAFC"/>
+                </a:solidFill>
+                <a:latin typeface="Segoe UI"/>
+              </a:rPr>
+              <a:t> missing artefact → analytic default; Postgres down → SQLite; Claude unreachable → deterministic template. </a:t>
+            </a:r>
+            <a:r>
+              <a:rPr sz="1600" b="1">
+                <a:solidFill>
+                  <a:srgbClr val="F8FAFC"/>
+                </a:solidFill>
+                <a:latin typeface="Segoe UI"/>
+              </a:rPr>
+              <a:t>A missing model never produces a missing answer.</a:t>
+            </a:r>
+          </a:p>
+          <a:p>
+            <a:pPr>
+              <a:spcAft>
+                <a:spcPts val="900"/>
+              </a:spcAft>
+            </a:pPr>
+            <a:r>
+              <a:rPr sz="1600">
+                <a:solidFill>
+                  <a:srgbClr val="F97316"/>
+                </a:solidFill>
+                <a:latin typeface="Segoe UI"/>
+              </a:rPr>
+              <a:t>— </a:t>
+            </a:r>
+            <a:r>
+              <a:rPr sz="1600" b="1">
+                <a:solidFill>
+                  <a:srgbClr val="F8FAFC"/>
+                </a:solidFill>
+                <a:latin typeface="Segoe UI"/>
+              </a:rPr>
+              <a:t>334 tests passing.</a:t>
+            </a:r>
+            <a:r>
+              <a:rPr sz="1600" b="0">
+                <a:solidFill>
+                  <a:srgbClr val="F8FAFC"/>
+                </a:solidFill>
+                <a:latin typeface="Segoe UI"/>
+              </a:rPr>
+              <a:t> Serving image is </a:t>
+            </a:r>
+            <a:r>
+              <a:rPr sz="1400" b="0">
+                <a:solidFill>
+                  <a:srgbClr val="B6C2D4"/>
+                </a:solidFill>
+                <a:latin typeface="Consolas"/>
+              </a:rPr>
+              <a:t>fastapi, pydantic, numpy, onnxruntime</a:t>
+            </a:r>
+            <a:r>
+              <a:rPr sz="1600" b="0">
+                <a:solidFill>
+                  <a:srgbClr val="F8FAFC"/>
+                </a:solidFill>
+                <a:latin typeface="Segoe UI"/>
+              </a:rPr>
+              <a:t> — no </a:t>
+            </a:r>
+            <a:r>
+              <a:rPr sz="1400" b="0">
+                <a:solidFill>
+                  <a:srgbClr val="B6C2D4"/>
+                </a:solidFill>
+                <a:latin typeface="Consolas"/>
+              </a:rPr>
+              <a:t>xgboost</a:t>
+            </a:r>
+            <a:r>
+              <a:rPr sz="1600" b="0">
+                <a:solidFill>
+                  <a:srgbClr val="F8FAFC"/>
+                </a:solidFill>
+                <a:latin typeface="Segoe UI"/>
+              </a:rPr>
+              <a:t>, </a:t>
+            </a:r>
+            <a:r>
+              <a:rPr sz="1400" b="0">
+                <a:solidFill>
+                  <a:srgbClr val="B6C2D4"/>
+                </a:solidFill>
+                <a:latin typeface="Consolas"/>
+              </a:rPr>
+              <a:t>scikit-learn</a:t>
+            </a:r>
+            <a:r>
+              <a:rPr sz="1600" b="0">
+                <a:solidFill>
+                  <a:srgbClr val="F8FAFC"/>
+                </a:solidFill>
+                <a:latin typeface="Segoe UI"/>
+              </a:rPr>
+              <a:t>, </a:t>
+            </a:r>
+            <a:r>
+              <a:rPr sz="1400" b="0">
+                <a:solidFill>
+                  <a:srgbClr val="B6C2D4"/>
+                </a:solidFill>
+                <a:latin typeface="Consolas"/>
+              </a:rPr>
+              <a:t>scipy</a:t>
+            </a:r>
+            <a:r>
+              <a:rPr sz="1600" b="0">
+                <a:solidFill>
+                  <a:srgbClr val="F8FAFC"/>
+                </a:solidFill>
+                <a:latin typeface="Segoe UI"/>
+              </a:rPr>
+              <a:t>, </a:t>
+            </a:r>
+            <a:r>
+              <a:rPr sz="1400" b="0">
+                <a:solidFill>
+                  <a:srgbClr val="B6C2D4"/>
+                </a:solidFill>
+                <a:latin typeface="Consolas"/>
+              </a:rPr>
+              <a:t>pandas</a:t>
+            </a:r>
+            <a:r>
+              <a:rPr sz="1600" b="0">
+                <a:solidFill>
+                  <a:srgbClr val="F8FAFC"/>
+                </a:solidFill>
+                <a:latin typeface="Segoe UI"/>
+              </a:rPr>
+              <a:t> or </a:t>
+            </a:r>
+            <a:r>
+              <a:rPr sz="1400" b="0">
+                <a:solidFill>
+                  <a:srgbClr val="B6C2D4"/>
+                </a:solidFill>
+                <a:latin typeface="Consolas"/>
+              </a:rPr>
+              <a:t>torch</a:t>
+            </a:r>
+            <a:r>
+              <a:rPr sz="1600" b="0">
+                <a:solidFill>
+                  <a:srgbClr val="F8FAFC"/>
+                </a:solidFill>
+                <a:latin typeface="Segoe UI"/>
+              </a:rPr>
+              <a:t>.</a:t>
+            </a:r>
+          </a:p>
+        </p:txBody>
+      </p:sp>
+      <p:sp>
+        <p:nvSpPr>
+          <p:cNvPr id="5" name="Rectangle 4"/>
+          <p:cNvSpPr/>
+          <p:nvPr/>
+        </p:nvSpPr>
+        <p:spPr>
+          <a:xfrm>
+            <a:off x="658368" y="6199632"/>
+            <a:ext cx="10874959" cy="12700"/>
+          </a:xfrm>
+          <a:prstGeom prst="rect">
+            <a:avLst/>
+          </a:prstGeom>
+          <a:solidFill>
+            <a:srgbClr val="1E293B"/>
+          </a:solidFill>
+          <a:ln>
+            <a:noFill/>
+          </a:ln>
+          <a:effectLst/>
+        </p:spPr>
+        <p:style>
+          <a:lnRef idx="1">
+            <a:schemeClr val="accent1"/>
+          </a:lnRef>
+          <a:fillRef idx="3">
+            <a:schemeClr val="accent1"/>
+          </a:fillRef>
+          <a:effectRef idx="2">
+            <a:schemeClr val="accent1"/>
+          </a:effectRef>
+          <a:fontRef idx="minor">
+            <a:schemeClr val="lt1"/>
+          </a:fontRef>
+        </p:style>
+        <p:txBody>
+          <a:bodyPr rtlCol="0" anchor="ctr"/>
+          <a:lstStyle/>
+          <a:p>
+            <a:pPr algn="ctr"/>
+          </a:p>
+        </p:txBody>
+      </p:sp>
+      <p:sp>
+        <p:nvSpPr>
+          <p:cNvPr id="6" name="TextBox 5"/>
+          <p:cNvSpPr txBox="1"/>
+          <p:nvPr/>
+        </p:nvSpPr>
+        <p:spPr>
+          <a:xfrm>
+            <a:off x="658368" y="6291072"/>
+            <a:ext cx="10874959" cy="292608"/>
+          </a:xfrm>
+          <a:prstGeom prst="rect">
+            <a:avLst/>
+          </a:prstGeom>
+          <a:noFill/>
+        </p:spPr>
+        <p:txBody>
+          <a:bodyPr wrap="none">
+            <a:spAutoFit/>
+          </a:bodyPr>
+          <a:lstStyle/>
+          <a:p>
+            <a:r>
+              <a:rPr sz="1000">
+                <a:solidFill>
+                  <a:srgbClr val="B6C2D4"/>
+                </a:solidFill>
+                <a:latin typeface="Segoe UI"/>
+              </a:rPr>
+              <a:t>Marine-AI  ·  Team SOLMATE  ·  ADVISORY ONLY — CAPTAIN COMMANDS</a:t>
+            </a:r>
+          </a:p>
+        </p:txBody>
+      </p:sp>
+      <p:sp>
+        <p:nvSpPr>
+          <p:cNvPr id="7" name="TextBox 6"/>
+          <p:cNvSpPr txBox="1"/>
+          <p:nvPr/>
+        </p:nvSpPr>
+        <p:spPr>
+          <a:xfrm>
+            <a:off x="10436047" y="6291072"/>
+            <a:ext cx="1097280" cy="292608"/>
+          </a:xfrm>
+          <a:prstGeom prst="rect">
+            <a:avLst/>
+          </a:prstGeom>
+          <a:noFill/>
+        </p:spPr>
+        <p:txBody>
+          <a:bodyPr wrap="none">
+            <a:spAutoFit/>
+          </a:bodyPr>
+          <a:lstStyle/>
+          <a:p>
+            <a:pPr algn="r"/>
+            <a:r>
+              <a:rPr sz="1000">
+                <a:solidFill>
+                  <a:srgbClr val="B6C2D4"/>
+                </a:solidFill>
+                <a:latin typeface="Consolas"/>
+              </a:rPr>
+              <a:t>21/24</a:t>
+            </a:r>
+          </a:p>
+        </p:txBody>
+      </p:sp>
+    </p:spTree>
+  </p:cSld>
+  <p:clrMapOvr>
+    <a:masterClrMapping/>
+  </p:clrMapOvr>
+</p:sld>
+</file>
+
+<file path=ppt/slides/slide23.xml><?xml version="1.0" encoding="utf-8"?>
+<p:sld xmlns:a="http://schemas.openxmlformats.org/drawingml/2006/main" xmlns:p="http://schemas.openxmlformats.org/presentationml/2006/main" xmlns:r="http://schemas.openxmlformats.org/officeDocument/2006/relationships">
+  <p:cSld>
+    <p:bg>
+      <p:bgPr>
+        <a:solidFill>
+          <a:srgbClr val="020617"/>
+        </a:solidFill>
+        <a:effectLst/>
+      </p:bgPr>
+    </p:bg>
+    <p:spTree>
+      <p:nvGrpSpPr>
+        <p:cNvPr id="1" name=""/>
+        <p:cNvGrpSpPr/>
+        <p:nvPr/>
+      </p:nvGrpSpPr>
+      <p:grpSpPr/>
+      <p:sp>
+        <p:nvSpPr>
+          <p:cNvPr id="2" name="TextBox 1"/>
+          <p:cNvSpPr txBox="1"/>
+          <p:nvPr/>
+        </p:nvSpPr>
+        <p:spPr>
+          <a:xfrm>
+            <a:off x="658368" y="475488"/>
+            <a:ext cx="10874959" cy="822960"/>
+          </a:xfrm>
+          <a:prstGeom prst="rect">
+            <a:avLst/>
+          </a:prstGeom>
+          <a:noFill/>
+        </p:spPr>
+        <p:txBody>
+          <a:bodyPr wrap="none">
+            <a:spAutoFit/>
+          </a:bodyPr>
+          <a:lstStyle/>
+          <a:p>
+            <a:r>
+              <a:rPr sz="3000" b="1">
+                <a:solidFill>
+                  <a:srgbClr val="F8FAFC"/>
+                </a:solidFill>
+                <a:latin typeface="Segoe UI"/>
+              </a:rPr>
+              <a:t>RESERVE 06 · Model validation, with the numbers</a:t>
+            </a:r>
+          </a:p>
+        </p:txBody>
+      </p:sp>
+      <p:sp>
+        <p:nvSpPr>
+          <p:cNvPr id="3" name="Rectangle 2"/>
+          <p:cNvSpPr/>
+          <p:nvPr/>
+        </p:nvSpPr>
+        <p:spPr>
+          <a:xfrm>
+            <a:off x="658368" y="1316736"/>
+            <a:ext cx="1005840" cy="38100"/>
+          </a:xfrm>
+          <a:prstGeom prst="rect">
+            <a:avLst/>
+          </a:prstGeom>
+          <a:solidFill>
+            <a:srgbClr val="F97316"/>
+          </a:solidFill>
+          <a:ln>
+            <a:noFill/>
+          </a:ln>
+          <a:effectLst/>
+        </p:spPr>
+        <p:style>
+          <a:lnRef idx="1">
+            <a:schemeClr val="accent1"/>
+          </a:lnRef>
+          <a:fillRef idx="3">
+            <a:schemeClr val="accent1"/>
+          </a:fillRef>
+          <a:effectRef idx="2">
+            <a:schemeClr val="accent1"/>
+          </a:effectRef>
+          <a:fontRef idx="minor">
+            <a:schemeClr val="lt1"/>
+          </a:fontRef>
+        </p:style>
+        <p:txBody>
+          <a:bodyPr rtlCol="0" anchor="ctr"/>
+          <a:lstStyle/>
+          <a:p>
+            <a:pPr algn="ctr"/>
+          </a:p>
+        </p:txBody>
+      </p:sp>
+      <p:sp>
+        <p:nvSpPr>
+          <p:cNvPr id="4" name="TextBox 3"/>
+          <p:cNvSpPr txBox="1"/>
+          <p:nvPr/>
+        </p:nvSpPr>
+        <p:spPr>
+          <a:xfrm>
+            <a:off x="658368" y="1600200"/>
+            <a:ext cx="10874959" cy="4434840"/>
+          </a:xfrm>
+          <a:prstGeom prst="rect">
+            <a:avLst/>
+          </a:prstGeom>
+          <a:noFill/>
+        </p:spPr>
+        <p:txBody>
+          <a:bodyPr wrap="square" anchor="t">
+            <a:spAutoFit/>
+          </a:bodyPr>
+          <a:lstStyle/>
+          <a:p>
+            <a:pPr>
+              <a:spcAft>
+                <a:spcPts val="900"/>
+              </a:spcAft>
+            </a:pPr>
+            <a:r>
+              <a:rPr sz="1600">
+                <a:solidFill>
+                  <a:srgbClr val="F97316"/>
+                </a:solidFill>
+                <a:latin typeface="Segoe UI"/>
+              </a:rPr>
+              <a:t>— </a:t>
+            </a:r>
+            <a:r>
+              <a:rPr sz="1600" b="1">
+                <a:solidFill>
+                  <a:srgbClr val="F8FAFC"/>
+                </a:solidFill>
+                <a:latin typeface="Segoe UI"/>
+              </a:rPr>
+              <a:t>Wear→fuel bridge:</a:t>
+            </a:r>
+            <a:r>
+              <a:rPr sz="1600" b="0">
+                <a:solidFill>
+                  <a:srgbClr val="F8FAFC"/>
+                </a:solidFill>
+                <a:latin typeface="Segoe UI"/>
+              </a:rPr>
+              <a:t> EGT-excess-over-baseline as the wear signal, </a:t>
+            </a:r>
+            <a:r>
+              <a:rPr sz="1600" b="1">
+                <a:solidFill>
+                  <a:srgbClr val="F8FAFC"/>
+                </a:solidFill>
+                <a:latin typeface="Segoe UI"/>
+              </a:rPr>
+              <a:t>r = 0.97–0.997 at fixed load</a:t>
+            </a:r>
+            <a:r>
+              <a:rPr sz="1600" b="0">
+                <a:solidFill>
+                  <a:srgbClr val="F8FAFC"/>
+                </a:solidFill>
+                <a:latin typeface="Segoe UI"/>
+              </a:rPr>
+              <a:t> (mean 0.986 across seven load points). Say *"at fixed load"* out loud — pooled across loads r is </a:t>
+            </a:r>
+            <a:r>
+              <a:rPr sz="1600" b="1">
+                <a:solidFill>
+                  <a:srgbClr val="F8FAFC"/>
+                </a:solidFill>
+                <a:latin typeface="Segoe UI"/>
+              </a:rPr>
+              <a:t>0.86</a:t>
+            </a:r>
+            <a:r>
+              <a:rPr sz="1600" b="0">
+                <a:solidFill>
+                  <a:srgbClr val="F8FAFC"/>
+                </a:solidFill>
+                <a:latin typeface="Segoe UI"/>
+              </a:rPr>
+              <a:t>, because load moves both variables. That is exactly why </a:t>
+            </a:r>
+            <a:r>
+              <a:rPr sz="1400" b="0">
+                <a:solidFill>
+                  <a:srgbClr val="B6C2D4"/>
+                </a:solidFill>
+                <a:latin typeface="Consolas"/>
+              </a:rPr>
+              <a:t>load_fraction</a:t>
+            </a:r>
+            <a:r>
+              <a:rPr sz="1600" b="0">
+                <a:solidFill>
+                  <a:srgbClr val="F8FAFC"/>
+                </a:solidFill>
+                <a:latin typeface="Segoe UI"/>
+              </a:rPr>
+              <a:t> is the model's second feature rather than a nuisance to be averaged away.</a:t>
+            </a:r>
+          </a:p>
+          <a:p>
+            <a:pPr>
+              <a:spcAft>
+                <a:spcPts val="900"/>
+              </a:spcAft>
+            </a:pPr>
+            <a:r>
+              <a:rPr sz="1600">
+                <a:solidFill>
+                  <a:srgbClr val="F97316"/>
+                </a:solidFill>
+                <a:latin typeface="Segoe UI"/>
+              </a:rPr>
+              <a:t>— </a:t>
+            </a:r>
+            <a:r>
+              <a:rPr sz="1600" b="1">
+                <a:solidFill>
+                  <a:srgbClr val="F8FAFC"/>
+                </a:solidFill>
+                <a:latin typeface="Segoe UI"/>
+              </a:rPr>
+              <a:t>ONNX export is gated:</a:t>
+            </a:r>
+            <a:r>
+              <a:rPr sz="1600" b="0">
+                <a:solidFill>
+                  <a:srgbClr val="F8FAFC"/>
+                </a:solidFill>
+                <a:latin typeface="Segoe UI"/>
+              </a:rPr>
+              <a:t> </a:t>
+            </a:r>
+            <a:r>
+              <a:rPr sz="1400" b="0">
+                <a:solidFill>
+                  <a:srgbClr val="B6C2D4"/>
+                </a:solidFill>
+                <a:latin typeface="Consolas"/>
+              </a:rPr>
+              <a:t>train.py</a:t>
+            </a:r>
+            <a:r>
+              <a:rPr sz="1600" b="0">
+                <a:solidFill>
+                  <a:srgbClr val="F8FAFC"/>
+                </a:solidFill>
+                <a:latin typeface="Segoe UI"/>
+              </a:rPr>
+              <a:t> refuses to write a model drifting &gt;1e-4 from the trained booster. Observed </a:t>
+            </a:r>
+            <a:r>
+              <a:rPr sz="1600" b="1">
+                <a:solidFill>
+                  <a:srgbClr val="F8FAFC"/>
+                </a:solidFill>
+                <a:latin typeface="Segoe UI"/>
+              </a:rPr>
+              <a:t>1.5e-6</a:t>
+            </a:r>
+            <a:r>
+              <a:rPr sz="1600" b="0">
+                <a:solidFill>
+                  <a:srgbClr val="F8FAFC"/>
+                </a:solidFill>
+                <a:latin typeface="Segoe UI"/>
+              </a:rPr>
+              <a:t>. Serving stack </a:t>
+            </a:r>
+            <a:r>
+              <a:rPr sz="1600" b="1">
+                <a:solidFill>
+                  <a:srgbClr val="F8FAFC"/>
+                </a:solidFill>
+                <a:latin typeface="Segoe UI"/>
+              </a:rPr>
+              <a:t>358 MB → 85 MB</a:t>
+            </a:r>
+            <a:r>
+              <a:rPr sz="1600" b="0">
+                <a:solidFill>
+                  <a:srgbClr val="F8FAFC"/>
+                </a:solidFill>
+                <a:latin typeface="Segoe UI"/>
+              </a:rPr>
+              <a:t>.</a:t>
+            </a:r>
+          </a:p>
+          <a:p>
+            <a:pPr>
+              <a:spcAft>
+                <a:spcPts val="900"/>
+              </a:spcAft>
+            </a:pPr>
+            <a:r>
+              <a:rPr sz="1600">
+                <a:solidFill>
+                  <a:srgbClr val="F97316"/>
+                </a:solidFill>
+                <a:latin typeface="Segoe UI"/>
+              </a:rPr>
+              <a:t>— </a:t>
+            </a:r>
+            <a:r>
+              <a:rPr sz="1600" b="1">
+                <a:solidFill>
+                  <a:srgbClr val="F8FAFC"/>
+                </a:solidFill>
+                <a:latin typeface="Segoe UI"/>
+              </a:rPr>
+              <a:t>Route agrees with Speed to 1e-6</a:t>
+            </a:r>
+            <a:r>
+              <a:rPr sz="1600" b="0">
+                <a:solidFill>
+                  <a:srgbClr val="F8FAFC"/>
+                </a:solidFill>
+                <a:latin typeface="Segoe UI"/>
+              </a:rPr>
+              <a:t> — </a:t>
+            </a:r>
+            <a:r>
+              <a:rPr sz="1400" b="0">
+                <a:solidFill>
+                  <a:srgbClr val="B6C2D4"/>
+                </a:solidFill>
+                <a:latin typeface="Consolas"/>
+              </a:rPr>
+              <a:t>test_one_leg_route_agrees_with_the_throttle_optimizer</a:t>
+            </a:r>
+            <a:r>
+              <a:rPr sz="1600" b="0">
+                <a:solidFill>
+                  <a:srgbClr val="F8FAFC"/>
+                </a:solidFill>
+                <a:latin typeface="Segoe UI"/>
+              </a:rPr>
+              <a:t>. One shared fuel model; the test fails if the two modules ever diverge.</a:t>
+            </a:r>
+          </a:p>
+          <a:p>
+            <a:pPr>
+              <a:spcAft>
+                <a:spcPts val="900"/>
+              </a:spcAft>
+            </a:pPr>
+            <a:r>
+              <a:rPr sz="1600">
+                <a:solidFill>
+                  <a:srgbClr val="F97316"/>
+                </a:solidFill>
+                <a:latin typeface="Segoe UI"/>
+              </a:rPr>
+              <a:t>— </a:t>
+            </a:r>
+            <a:r>
+              <a:rPr sz="1600" b="1">
+                <a:solidFill>
+                  <a:srgbClr val="F8FAFC"/>
+                </a:solidFill>
+                <a:latin typeface="Segoe UI"/>
+              </a:rPr>
+              <a:t>The load-bearing demo beat:</a:t>
+            </a:r>
+            <a:r>
+              <a:rPr sz="1600" b="0">
+                <a:solidFill>
+                  <a:srgbClr val="F8FAFC"/>
+                </a:solidFill>
+                <a:latin typeface="Segoe UI"/>
+              </a:rPr>
+              <a:t> open the throttle and coolant *and* EGT rise together → the panel stays </a:t>
+            </a:r>
+            <a:r>
+              <a:rPr sz="1600" b="1">
+                <a:solidFill>
+                  <a:srgbClr val="F8FAFC"/>
+                </a:solidFill>
+                <a:latin typeface="Segoe UI"/>
+              </a:rPr>
+              <a:t>nominal, 0.09</a:t>
+            </a:r>
+            <a:r>
+              <a:rPr sz="1600" b="0">
+                <a:solidFill>
+                  <a:srgbClr val="F8FAFC"/>
+                </a:solidFill>
+                <a:latin typeface="Segoe UI"/>
+              </a:rPr>
+              <a:t>. That correlation is what the PCA half learned. Inject a coolant creep alone → </a:t>
+            </a:r>
+            <a:r>
+              <a:rPr sz="1600" b="1">
+                <a:solidFill>
+                  <a:srgbClr val="F8FAFC"/>
+                </a:solidFill>
+                <a:latin typeface="Segoe UI"/>
+              </a:rPr>
+              <a:t>0.99</a:t>
+            </a:r>
+            <a:r>
+              <a:rPr sz="1600" b="0">
+                <a:solidFill>
+                  <a:srgbClr val="F8FAFC"/>
+                </a:solidFill>
+                <a:latin typeface="Segoe UI"/>
+              </a:rPr>
+              <a:t>, naming the coolant stream. </a:t>
+            </a:r>
+            <a:r>
+              <a:rPr sz="1600" b="1">
+                <a:solidFill>
+                  <a:srgbClr val="F8FAFC"/>
+                </a:solidFill>
+                <a:latin typeface="Segoe UI"/>
+              </a:rPr>
+              <a:t>A threshold detector alarms on the first one.</a:t>
+            </a:r>
+          </a:p>
+          <a:p>
+            <a:pPr>
+              <a:spcAft>
+                <a:spcPts val="900"/>
+              </a:spcAft>
+            </a:pPr>
+            <a:r>
+              <a:rPr sz="1600">
+                <a:solidFill>
+                  <a:srgbClr val="F97316"/>
+                </a:solidFill>
+                <a:latin typeface="Segoe UI"/>
+              </a:rPr>
+              <a:t>— </a:t>
+            </a:r>
+            <a:r>
+              <a:rPr sz="1600" b="1">
+                <a:solidFill>
+                  <a:srgbClr val="F8FAFC"/>
+                </a:solidFill>
+                <a:latin typeface="Segoe UI"/>
+              </a:rPr>
+              <a:t>In flat weather `/route` honestly returns the direct track with zero saving.</a:t>
+            </a:r>
+            <a:r>
+              <a:rPr sz="1600" b="0">
+                <a:solidFill>
+                  <a:srgbClr val="F8FAFC"/>
+                </a:solidFill>
+                <a:latin typeface="Segoe UI"/>
+              </a:rPr>
+              <a:t> Correct, not a bug — place a weather cell first.</a:t>
+            </a:r>
+          </a:p>
+        </p:txBody>
+      </p:sp>
+      <p:sp>
+        <p:nvSpPr>
+          <p:cNvPr id="5" name="Rectangle 4"/>
+          <p:cNvSpPr/>
+          <p:nvPr/>
+        </p:nvSpPr>
+        <p:spPr>
+          <a:xfrm>
+            <a:off x="658368" y="6199632"/>
+            <a:ext cx="10874959" cy="12700"/>
+          </a:xfrm>
+          <a:prstGeom prst="rect">
+            <a:avLst/>
+          </a:prstGeom>
+          <a:solidFill>
+            <a:srgbClr val="1E293B"/>
+          </a:solidFill>
+          <a:ln>
+            <a:noFill/>
+          </a:ln>
+          <a:effectLst/>
+        </p:spPr>
+        <p:style>
+          <a:lnRef idx="1">
+            <a:schemeClr val="accent1"/>
+          </a:lnRef>
+          <a:fillRef idx="3">
+            <a:schemeClr val="accent1"/>
+          </a:fillRef>
+          <a:effectRef idx="2">
+            <a:schemeClr val="accent1"/>
+          </a:effectRef>
+          <a:fontRef idx="minor">
+            <a:schemeClr val="lt1"/>
+          </a:fontRef>
+        </p:style>
+        <p:txBody>
+          <a:bodyPr rtlCol="0" anchor="ctr"/>
+          <a:lstStyle/>
+          <a:p>
+            <a:pPr algn="ctr"/>
+          </a:p>
+        </p:txBody>
+      </p:sp>
+      <p:sp>
+        <p:nvSpPr>
+          <p:cNvPr id="6" name="TextBox 5"/>
+          <p:cNvSpPr txBox="1"/>
+          <p:nvPr/>
+        </p:nvSpPr>
+        <p:spPr>
+          <a:xfrm>
+            <a:off x="658368" y="6291072"/>
+            <a:ext cx="10874959" cy="292608"/>
+          </a:xfrm>
+          <a:prstGeom prst="rect">
+            <a:avLst/>
+          </a:prstGeom>
+          <a:noFill/>
+        </p:spPr>
+        <p:txBody>
+          <a:bodyPr wrap="none">
+            <a:spAutoFit/>
+          </a:bodyPr>
+          <a:lstStyle/>
+          <a:p>
+            <a:r>
+              <a:rPr sz="1000">
+                <a:solidFill>
+                  <a:srgbClr val="B6C2D4"/>
+                </a:solidFill>
+                <a:latin typeface="Segoe UI"/>
+              </a:rPr>
+              <a:t>Marine-AI  ·  Team SOLMATE  ·  ADVISORY ONLY — CAPTAIN COMMANDS</a:t>
+            </a:r>
+          </a:p>
+        </p:txBody>
+      </p:sp>
+      <p:sp>
+        <p:nvSpPr>
+          <p:cNvPr id="7" name="TextBox 6"/>
+          <p:cNvSpPr txBox="1"/>
+          <p:nvPr/>
+        </p:nvSpPr>
+        <p:spPr>
+          <a:xfrm>
+            <a:off x="10436047" y="6291072"/>
+            <a:ext cx="1097280" cy="292608"/>
+          </a:xfrm>
+          <a:prstGeom prst="rect">
+            <a:avLst/>
+          </a:prstGeom>
+          <a:noFill/>
+        </p:spPr>
+        <p:txBody>
+          <a:bodyPr wrap="none">
+            <a:spAutoFit/>
+          </a:bodyPr>
+          <a:lstStyle/>
+          <a:p>
+            <a:pPr algn="r"/>
+            <a:r>
+              <a:rPr sz="1000">
+                <a:solidFill>
+                  <a:srgbClr val="B6C2D4"/>
+                </a:solidFill>
+                <a:latin typeface="Consolas"/>
+              </a:rPr>
+              <a:t>22/24</a:t>
+            </a:r>
+          </a:p>
+        </p:txBody>
+      </p:sp>
+    </p:spTree>
+  </p:cSld>
+  <p:clrMapOvr>
+    <a:masterClrMapping/>
+  </p:clrMapOvr>
+</p:sld>
+</file>
+
+<file path=ppt/slides/slide24.xml><?xml version="1.0" encoding="utf-8"?>
+<p:sld xmlns:a="http://schemas.openxmlformats.org/drawingml/2006/main" xmlns:p="http://schemas.openxmlformats.org/presentationml/2006/main" xmlns:r="http://schemas.openxmlformats.org/officeDocument/2006/relationships">
+  <p:cSld>
+    <p:bg>
+      <p:bgPr>
+        <a:solidFill>
+          <a:srgbClr val="020617"/>
+        </a:solidFill>
+        <a:effectLst/>
+      </p:bgPr>
+    </p:bg>
+    <p:spTree>
+      <p:nvGrpSpPr>
+        <p:cNvPr id="1" name=""/>
+        <p:cNvGrpSpPr/>
+        <p:nvPr/>
+      </p:nvGrpSpPr>
+      <p:grpSpPr/>
+      <p:sp>
+        <p:nvSpPr>
+          <p:cNvPr id="2" name="TextBox 1"/>
+          <p:cNvSpPr txBox="1"/>
+          <p:nvPr/>
+        </p:nvSpPr>
+        <p:spPr>
+          <a:xfrm>
+            <a:off x="658368" y="475488"/>
+            <a:ext cx="10874959" cy="822960"/>
+          </a:xfrm>
+          <a:prstGeom prst="rect">
+            <a:avLst/>
+          </a:prstGeom>
+          <a:noFill/>
+        </p:spPr>
+        <p:txBody>
+          <a:bodyPr wrap="none">
+            <a:spAutoFit/>
+          </a:bodyPr>
+          <a:lstStyle/>
+          <a:p>
+            <a:r>
+              <a:rPr sz="3000" b="1">
+                <a:solidFill>
+                  <a:srgbClr val="F8FAFC"/>
+                </a:solidFill>
+                <a:latin typeface="Segoe UI"/>
+              </a:rPr>
+              <a:t>RESERVE 07 · Feasibility: the three practical questions</a:t>
+            </a:r>
+          </a:p>
+        </p:txBody>
+      </p:sp>
+      <p:sp>
+        <p:nvSpPr>
+          <p:cNvPr id="3" name="Rectangle 2"/>
+          <p:cNvSpPr/>
+          <p:nvPr/>
+        </p:nvSpPr>
+        <p:spPr>
+          <a:xfrm>
+            <a:off x="658368" y="1316736"/>
+            <a:ext cx="1005840" cy="38100"/>
+          </a:xfrm>
+          <a:prstGeom prst="rect">
+            <a:avLst/>
+          </a:prstGeom>
+          <a:solidFill>
+            <a:srgbClr val="F97316"/>
+          </a:solidFill>
+          <a:ln>
+            <a:noFill/>
+          </a:ln>
+          <a:effectLst/>
+        </p:spPr>
+        <p:style>
+          <a:lnRef idx="1">
+            <a:schemeClr val="accent1"/>
+          </a:lnRef>
+          <a:fillRef idx="3">
+            <a:schemeClr val="accent1"/>
+          </a:fillRef>
+          <a:effectRef idx="2">
+            <a:schemeClr val="accent1"/>
+          </a:effectRef>
+          <a:fontRef idx="minor">
+            <a:schemeClr val="lt1"/>
+          </a:fontRef>
+        </p:style>
+        <p:txBody>
+          <a:bodyPr rtlCol="0" anchor="ctr"/>
+          <a:lstStyle/>
+          <a:p>
+            <a:pPr algn="ctr"/>
+          </a:p>
+        </p:txBody>
+      </p:sp>
+      <p:graphicFrame>
+        <p:nvGraphicFramePr>
+          <p:cNvPr id="4" name="Table 3"/>
+          <p:cNvGraphicFramePr>
+            <a:graphicFrameLocks noGrp="1"/>
+          </p:cNvGraphicFramePr>
+          <p:nvPr/>
+        </p:nvGraphicFramePr>
+        <p:xfrm>
+          <a:off x="658368" y="1600200"/>
+          <a:ext cx="10874959" cy="1536192"/>
+        </p:xfrm>
+        <a:graphic>
+          <a:graphicData uri="http://schemas.openxmlformats.org/drawingml/2006/table">
+            <a:tbl>
+              <a:tblPr firstRow="1" bandRow="1">
+                <a:tableStyleId>{5C22544A-7EE6-4342-B048-85BDC9FD1C3A}</a:tableStyleId>
+              </a:tblPr>
+              <a:tblGrid>
+                <a:gridCol w="5437479"/>
+                <a:gridCol w="5437480"/>
+              </a:tblGrid>
+              <a:tr h="384048">
+                <a:tc>
+                  <a:txBody>
+                    <a:bodyPr wrap="square"/>
+                    <a:lstStyle/>
+                    <a:p>
+                      <a:r>
+                        <a:rPr sz="1300" b="1">
+                          <a:solidFill>
+                            <a:srgbClr val="F8FAFC"/>
+                          </a:solidFill>
+                          <a:latin typeface="Segoe UI"/>
+                        </a:rPr>
+                        <a:t>Question</a:t>
+                      </a:r>
+                    </a:p>
+                  </a:txBody>
+                  <a:tcPr marL="109728" marR="109728" marT="45720" marB="45720">
+                    <a:solidFill>
+                      <a:srgbClr val="1E293B"/>
+                    </a:solidFill>
+                  </a:tcPr>
+                </a:tc>
+                <a:tc>
+                  <a:txBody>
+                    <a:bodyPr wrap="square"/>
+                    <a:lstStyle/>
+                    <a:p>
+                      <a:r>
+                        <a:rPr sz="1300" b="1">
+                          <a:solidFill>
+                            <a:srgbClr val="F8FAFC"/>
+                          </a:solidFill>
+                          <a:latin typeface="Segoe UI"/>
+                        </a:rPr>
+                        <a:t>Our answer</a:t>
+                      </a:r>
+                    </a:p>
+                  </a:txBody>
+                  <a:tcPr marL="109728" marR="109728" marT="45720" marB="45720">
+                    <a:solidFill>
+                      <a:srgbClr val="1E293B"/>
+                    </a:solidFill>
+                  </a:tcPr>
+                </a:tc>
+              </a:tr>
+              <a:tr h="384048">
+                <a:tc>
+                  <a:txBody>
+                    <a:bodyPr wrap="square"/>
+                    <a:lstStyle/>
+                    <a:p>
+                      <a:r>
+                        <a:rPr sz="1300" b="1">
+                          <a:solidFill>
+                            <a:srgbClr val="B6C2D4"/>
+                          </a:solidFill>
+                          <a:latin typeface="Segoe UI"/>
+                        </a:rPr>
+                        <a:t>How easy is it to start?</a:t>
+                      </a:r>
+                    </a:p>
+                  </a:txBody>
+                  <a:tcPr marL="109728" marR="109728" marT="45720" marB="45720">
+                    <a:solidFill>
+                      <a:srgbClr val="0B1220"/>
+                    </a:solidFill>
+                  </a:tcPr>
+                </a:tc>
+                <a:tc>
+                  <a:txBody>
+                    <a:bodyPr wrap="square"/>
+                    <a:lstStyle/>
+                    <a:p>
+                      <a:r>
+                        <a:rPr sz="1300" b="1">
+                          <a:solidFill>
+                            <a:srgbClr val="B6C2D4"/>
+                          </a:solidFill>
+                          <a:latin typeface="Segoe UI"/>
+                        </a:rPr>
+                        <a:t>No new hardware to evaluate it.</a:t>
+                      </a:r>
+                      <a:r>
+                        <a:rPr sz="1300" b="0">
+                          <a:solidFill>
+                            <a:srgbClr val="B6C2D4"/>
+                          </a:solidFill>
+                          <a:latin typeface="Segoe UI"/>
+                        </a:rPr>
+                        <a:t> The console runs on simulated telemetry, so an operator sees their own route, vessel and fuel numbers before buying a single sensor. Retrofit is incremental — the fuel-flow meter alone unlocks the fuel claim</a:t>
+                      </a:r>
+                    </a:p>
+                  </a:txBody>
+                  <a:tcPr marL="109728" marR="109728" marT="45720" marB="45720">
+                    <a:solidFill>
+                      <a:srgbClr val="0B1220"/>
+                    </a:solidFill>
+                  </a:tcPr>
+                </a:tc>
+              </a:tr>
+              <a:tr h="384048">
+                <a:tc>
+                  <a:txBody>
+                    <a:bodyPr wrap="square"/>
+                    <a:lstStyle/>
+                    <a:p>
+                      <a:r>
+                        <a:rPr sz="1300" b="1">
+                          <a:solidFill>
+                            <a:srgbClr val="B6C2D4"/>
+                          </a:solidFill>
+                          <a:latin typeface="Segoe UI"/>
+                        </a:rPr>
+                        <a:t>How do you survive 18 months?</a:t>
+                      </a:r>
+                    </a:p>
+                  </a:txBody>
+                  <a:tcPr marL="109728" marR="109728" marT="45720" marB="45720">
+                    <a:solidFill>
+                      <a:srgbClr val="0B1220"/>
+                    </a:solidFill>
+                  </a:tcPr>
+                </a:tc>
+                <a:tc>
+                  <a:txBody>
+                    <a:bodyPr wrap="square"/>
+                    <a:lstStyle/>
+                    <a:p>
+                      <a:r>
+                        <a:rPr sz="1300" b="1">
+                          <a:solidFill>
+                            <a:srgbClr val="B6C2D4"/>
+                          </a:solidFill>
+                          <a:latin typeface="Segoe UI"/>
+                        </a:rPr>
+                        <a:t>Months 1–6:</a:t>
+                      </a:r>
+                      <a:r>
+                        <a:rPr sz="1300" b="0">
+                          <a:solidFill>
+                            <a:srgbClr val="B6C2D4"/>
+                          </a:solidFill>
+                          <a:latin typeface="Segoe UI"/>
+                        </a:rPr>
+                        <a:t> R&amp;D grant — finish Phase 2 RUL and the MQTT edge path, no sales pressure. </a:t>
+                      </a:r>
+                      <a:r>
+                        <a:rPr sz="1300" b="1">
+                          <a:solidFill>
+                            <a:srgbClr val="B6C2D4"/>
+                          </a:solidFill>
+                          <a:latin typeface="Segoe UI"/>
+                        </a:rPr>
+                        <a:t>Months 6–12:</a:t>
+                      </a:r>
+                      <a:r>
+                        <a:rPr sz="1300" b="0">
+                          <a:solidFill>
+                            <a:srgbClr val="B6C2D4"/>
+                          </a:solidFill>
+                          <a:latin typeface="Segoe UI"/>
+                        </a:rPr>
+                        <a:t> one paid pilot with a named operator through a high-risk season. </a:t>
+                      </a:r>
+                      <a:r>
+                        <a:rPr sz="1300" b="1">
+                          <a:solidFill>
+                            <a:srgbClr val="B6C2D4"/>
+                          </a:solidFill>
+                          <a:latin typeface="Segoe UI"/>
+                        </a:rPr>
+                        <a:t>Month 12+:</a:t>
+                      </a:r>
+                      <a:r>
+                        <a:rPr sz="1300" b="0">
+                          <a:solidFill>
+                            <a:srgbClr val="B6C2D4"/>
+                          </a:solidFill>
+                          <a:latin typeface="Segoe UI"/>
+                        </a:rPr>
+                        <a:t> annual subscription, priced per vessel</a:t>
+                      </a:r>
+                    </a:p>
+                  </a:txBody>
+                  <a:tcPr marL="109728" marR="109728" marT="45720" marB="45720">
+                    <a:solidFill>
+                      <a:srgbClr val="0B1220"/>
+                    </a:solidFill>
+                  </a:tcPr>
+                </a:tc>
+              </a:tr>
+              <a:tr h="384048">
+                <a:tc>
+                  <a:txBody>
+                    <a:bodyPr wrap="square"/>
+                    <a:lstStyle/>
+                    <a:p>
+                      <a:r>
+                        <a:rPr sz="1300" b="1">
+                          <a:solidFill>
+                            <a:srgbClr val="B6C2D4"/>
+                          </a:solidFill>
+                          <a:latin typeface="Segoe UI"/>
+                        </a:rPr>
+                        <a:t>How does it grow without breaking?</a:t>
+                      </a:r>
+                    </a:p>
+                  </a:txBody>
+                  <a:tcPr marL="109728" marR="109728" marT="45720" marB="45720">
+                    <a:solidFill>
+                      <a:srgbClr val="0B1220"/>
+                    </a:solidFill>
+                  </a:tcPr>
+                </a:tc>
+                <a:tc>
+                  <a:txBody>
+                    <a:bodyPr wrap="square"/>
+                    <a:lstStyle/>
+                    <a:p>
+                      <a:r>
+                        <a:rPr sz="1300" b="1">
+                          <a:solidFill>
+                            <a:srgbClr val="B6C2D4"/>
+                          </a:solidFill>
+                          <a:latin typeface="Segoe UI"/>
+                        </a:rPr>
+                        <a:t>Each new vessel costs one baseline fit, not a retrained fleet model</a:t>
+                      </a:r>
+                      <a:r>
+                        <a:rPr sz="1300" b="0">
+                          <a:solidFill>
+                            <a:srgbClr val="B6C2D4"/>
+                          </a:solidFill>
+                          <a:latin typeface="Segoe UI"/>
+                        </a:rPr>
+                        <a:t> — the detector learns that vessel's own normal. Stateless HTTP, so scaling is replicas. ONNX is small enough to run on-device, which matters because the Iloilo Strait has no reliable connectivity</a:t>
+                      </a:r>
+                    </a:p>
+                  </a:txBody>
+                  <a:tcPr marL="109728" marR="109728" marT="45720" marB="45720">
+                    <a:solidFill>
+                      <a:srgbClr val="0B1220"/>
+                    </a:solidFill>
+                  </a:tcPr>
+                </a:tc>
+              </a:tr>
+            </a:tbl>
+          </a:graphicData>
+        </a:graphic>
+      </p:graphicFrame>
+      <p:sp>
+        <p:nvSpPr>
+          <p:cNvPr id="5" name="TextBox 4"/>
+          <p:cNvSpPr txBox="1"/>
+          <p:nvPr/>
+        </p:nvSpPr>
+        <p:spPr>
+          <a:xfrm>
+            <a:off x="658368" y="3410712"/>
+            <a:ext cx="10874959" cy="2624328"/>
+          </a:xfrm>
+          <a:prstGeom prst="rect">
+            <a:avLst/>
+          </a:prstGeom>
+          <a:noFill/>
+        </p:spPr>
+        <p:txBody>
+          <a:bodyPr wrap="square" anchor="t">
+            <a:spAutoFit/>
+          </a:bodyPr>
+          <a:lstStyle/>
+          <a:p>
+            <a:pPr>
+              <a:spcAft>
+                <a:spcPts val="900"/>
+              </a:spcAft>
+            </a:pPr>
+            <a:r>
+              <a:rPr sz="1600">
+                <a:solidFill>
+                  <a:srgbClr val="F97316"/>
+                </a:solidFill>
+                <a:latin typeface="Segoe UI"/>
+              </a:rPr>
+              <a:t>— </a:t>
+            </a:r>
+            <a:r>
+              <a:rPr sz="1600" b="1">
+                <a:solidFill>
+                  <a:srgbClr val="F8FAFC"/>
+                </a:solidFill>
+                <a:latin typeface="Segoe UI"/>
+              </a:rPr>
+              <a:t>Tie it to a real loss:</a:t>
+            </a:r>
+            <a:r>
+              <a:rPr sz="1600" b="0">
+                <a:solidFill>
+                  <a:srgbClr val="F8FAFC"/>
+                </a:solidFill>
+                <a:latin typeface="Segoe UI"/>
+              </a:rPr>
+              <a:t> one breakdown mid-strait strands a full passenger load and costs a day's revenue. One un-forecast squall costs a crossing.</a:t>
+            </a:r>
+          </a:p>
+          <a:p>
+            <a:pPr>
+              <a:spcAft>
+                <a:spcPts val="900"/>
+              </a:spcAft>
+            </a:pPr>
+            <a:r>
+              <a:rPr sz="1600">
+                <a:solidFill>
+                  <a:srgbClr val="F97316"/>
+                </a:solidFill>
+                <a:latin typeface="Segoe UI"/>
+              </a:rPr>
+              <a:t>— </a:t>
+            </a:r>
+            <a:r>
+              <a:rPr sz="1600" b="1">
+                <a:solidFill>
+                  <a:srgbClr val="F8FAFC"/>
+                </a:solidFill>
+                <a:latin typeface="Segoe UI"/>
+              </a:rPr>
+              <a:t>We are not claiming millions in Year 1.</a:t>
+            </a:r>
+            <a:r>
+              <a:rPr sz="1600" b="0">
+                <a:solidFill>
+                  <a:srgbClr val="F8FAFC"/>
+                </a:solidFill>
+                <a:latin typeface="Segoe UI"/>
+              </a:rPr>
+              <a:t> One pilot operator, measured.</a:t>
+            </a:r>
+          </a:p>
+        </p:txBody>
+      </p:sp>
+      <p:sp>
+        <p:nvSpPr>
+          <p:cNvPr id="6" name="Rectangle 5"/>
+          <p:cNvSpPr/>
+          <p:nvPr/>
+        </p:nvSpPr>
+        <p:spPr>
+          <a:xfrm>
+            <a:off x="658368" y="6199632"/>
+            <a:ext cx="10874959" cy="12700"/>
+          </a:xfrm>
+          <a:prstGeom prst="rect">
+            <a:avLst/>
+          </a:prstGeom>
+          <a:solidFill>
+            <a:srgbClr val="1E293B"/>
+          </a:solidFill>
+          <a:ln>
+            <a:noFill/>
+          </a:ln>
+          <a:effectLst/>
+        </p:spPr>
+        <p:style>
+          <a:lnRef idx="1">
+            <a:schemeClr val="accent1"/>
+          </a:lnRef>
+          <a:fillRef idx="3">
+            <a:schemeClr val="accent1"/>
+          </a:fillRef>
+          <a:effectRef idx="2">
+            <a:schemeClr val="accent1"/>
+          </a:effectRef>
+          <a:fontRef idx="minor">
+            <a:schemeClr val="lt1"/>
+          </a:fontRef>
+        </p:style>
+        <p:txBody>
+          <a:bodyPr rtlCol="0" anchor="ctr"/>
+          <a:lstStyle/>
+          <a:p>
+            <a:pPr algn="ctr"/>
+          </a:p>
+        </p:txBody>
+      </p:sp>
+      <p:sp>
+        <p:nvSpPr>
+          <p:cNvPr id="7" name="TextBox 6"/>
+          <p:cNvSpPr txBox="1"/>
+          <p:nvPr/>
+        </p:nvSpPr>
+        <p:spPr>
+          <a:xfrm>
+            <a:off x="658368" y="6291072"/>
+            <a:ext cx="10874959" cy="292608"/>
+          </a:xfrm>
+          <a:prstGeom prst="rect">
+            <a:avLst/>
+          </a:prstGeom>
+          <a:noFill/>
+        </p:spPr>
+        <p:txBody>
+          <a:bodyPr wrap="none">
+            <a:spAutoFit/>
+          </a:bodyPr>
+          <a:lstStyle/>
+          <a:p>
+            <a:r>
+              <a:rPr sz="1000">
+                <a:solidFill>
+                  <a:srgbClr val="B6C2D4"/>
+                </a:solidFill>
+                <a:latin typeface="Segoe UI"/>
+              </a:rPr>
+              <a:t>Marine-AI  ·  Team SOLMATE  ·  ADVISORY ONLY — CAPTAIN COMMANDS</a:t>
+            </a:r>
+          </a:p>
+        </p:txBody>
+      </p:sp>
+      <p:sp>
+        <p:nvSpPr>
+          <p:cNvPr id="8" name="TextBox 7"/>
+          <p:cNvSpPr txBox="1"/>
+          <p:nvPr/>
+        </p:nvSpPr>
+        <p:spPr>
+          <a:xfrm>
+            <a:off x="10436047" y="6291072"/>
+            <a:ext cx="1097280" cy="292608"/>
+          </a:xfrm>
+          <a:prstGeom prst="rect">
+            <a:avLst/>
+          </a:prstGeom>
+          <a:noFill/>
+        </p:spPr>
+        <p:txBody>
+          <a:bodyPr wrap="none">
+            <a:spAutoFit/>
+          </a:bodyPr>
+          <a:lstStyle/>
+          <a:p>
+            <a:pPr algn="r"/>
+            <a:r>
+              <a:rPr sz="1000">
+                <a:solidFill>
+                  <a:srgbClr val="B6C2D4"/>
+                </a:solidFill>
+                <a:latin typeface="Consolas"/>
+              </a:rPr>
+              <a:t>23/24</a:t>
+            </a:r>
+          </a:p>
+        </p:txBody>
+      </p:sp>
+    </p:spTree>
+  </p:cSld>
+  <p:clrMapOvr>
+    <a:masterClrMapping/>
+  </p:clrMapOvr>
+</p:sld>
+</file>
+
+<file path=ppt/slides/slide25.xml><?xml version="1.0" encoding="utf-8"?>
+<p:sld xmlns:a="http://schemas.openxmlformats.org/drawingml/2006/main" xmlns:p="http://schemas.openxmlformats.org/presentationml/2006/main" xmlns:r="http://schemas.openxmlformats.org/officeDocument/2006/relationships">
+  <p:cSld>
+    <p:bg>
+      <p:bgPr>
+        <a:solidFill>
+          <a:srgbClr val="020617"/>
+        </a:solidFill>
+        <a:effectLst/>
+      </p:bgPr>
+    </p:bg>
+    <p:spTree>
+      <p:nvGrpSpPr>
+        <p:cNvPr id="1" name=""/>
+        <p:cNvGrpSpPr/>
+        <p:nvPr/>
+      </p:nvGrpSpPr>
+      <p:grpSpPr/>
+      <p:sp>
+        <p:nvSpPr>
+          <p:cNvPr id="2" name="TextBox 1"/>
+          <p:cNvSpPr txBox="1"/>
+          <p:nvPr/>
+        </p:nvSpPr>
+        <p:spPr>
+          <a:xfrm>
+            <a:off x="658368" y="475488"/>
+            <a:ext cx="10874959" cy="822960"/>
+          </a:xfrm>
+          <a:prstGeom prst="rect">
+            <a:avLst/>
+          </a:prstGeom>
+          <a:noFill/>
+        </p:spPr>
+        <p:txBody>
+          <a:bodyPr wrap="none">
+            <a:spAutoFit/>
+          </a:bodyPr>
+          <a:lstStyle/>
+          <a:p>
+            <a:r>
+              <a:rPr sz="3000" b="1">
+                <a:solidFill>
+                  <a:srgbClr val="F8FAFC"/>
+                </a:solidFill>
+                <a:latin typeface="Segoe UI"/>
+              </a:rPr>
+              <a:t>RESERVE 08 · What is NOT built</a:t>
+            </a:r>
+          </a:p>
+        </p:txBody>
+      </p:sp>
+      <p:sp>
+        <p:nvSpPr>
+          <p:cNvPr id="3" name="Rectangle 2"/>
+          <p:cNvSpPr/>
+          <p:nvPr/>
+        </p:nvSpPr>
+        <p:spPr>
+          <a:xfrm>
+            <a:off x="658368" y="1316736"/>
+            <a:ext cx="1005840" cy="38100"/>
+          </a:xfrm>
+          <a:prstGeom prst="rect">
+            <a:avLst/>
+          </a:prstGeom>
+          <a:solidFill>
+            <a:srgbClr val="F97316"/>
+          </a:solidFill>
+          <a:ln>
+            <a:noFill/>
+          </a:ln>
+          <a:effectLst/>
+        </p:spPr>
+        <p:style>
+          <a:lnRef idx="1">
+            <a:schemeClr val="accent1"/>
+          </a:lnRef>
+          <a:fillRef idx="3">
+            <a:schemeClr val="accent1"/>
+          </a:fillRef>
+          <a:effectRef idx="2">
+            <a:schemeClr val="accent1"/>
+          </a:effectRef>
+          <a:fontRef idx="minor">
+            <a:schemeClr val="lt1"/>
+          </a:fontRef>
+        </p:style>
+        <p:txBody>
+          <a:bodyPr rtlCol="0" anchor="ctr"/>
+          <a:lstStyle/>
+          <a:p>
+            <a:pPr algn="ctr"/>
+          </a:p>
+        </p:txBody>
+      </p:sp>
+      <p:sp>
+        <p:nvSpPr>
+          <p:cNvPr id="4" name="TextBox 3"/>
+          <p:cNvSpPr txBox="1"/>
+          <p:nvPr/>
+        </p:nvSpPr>
+        <p:spPr>
+          <a:xfrm>
+            <a:off x="658368" y="1600200"/>
+            <a:ext cx="10874959" cy="4434840"/>
+          </a:xfrm>
+          <a:prstGeom prst="rect">
+            <a:avLst/>
+          </a:prstGeom>
+          <a:noFill/>
+        </p:spPr>
+        <p:txBody>
+          <a:bodyPr wrap="square" anchor="t">
+            <a:spAutoFit/>
+          </a:bodyPr>
+          <a:lstStyle/>
+          <a:p>
+            <a:pPr>
+              <a:spcAft>
+                <a:spcPts val="900"/>
+              </a:spcAft>
+            </a:pPr>
+            <a:r>
+              <a:rPr sz="1600">
+                <a:solidFill>
+                  <a:srgbClr val="F97316"/>
+                </a:solidFill>
+                <a:latin typeface="Segoe UI"/>
+              </a:rPr>
+              <a:t>— </a:t>
+            </a:r>
+            <a:r>
+              <a:rPr sz="1600" b="0">
+                <a:solidFill>
+                  <a:srgbClr val="F8FAFC"/>
+                </a:solidFill>
+                <a:latin typeface="Segoe UI"/>
+              </a:rPr>
+              <a:t>We keep </a:t>
+            </a:r>
+            <a:r>
+              <a:rPr sz="1400" b="0">
+                <a:solidFill>
+                  <a:srgbClr val="B6C2D4"/>
+                </a:solidFill>
+                <a:latin typeface="Consolas"/>
+              </a:rPr>
+              <a:t>docs/DEVIATIONS.md</a:t>
+            </a:r>
+            <a:r>
+              <a:rPr sz="1600" b="0">
+                <a:solidFill>
+                  <a:srgbClr val="F8FAFC"/>
+                </a:solidFill>
+                <a:latin typeface="Segoe UI"/>
+              </a:rPr>
+              <a:t>: </a:t>
+            </a:r>
+            <a:r>
+              <a:rPr sz="1600" b="1">
+                <a:solidFill>
+                  <a:srgbClr val="F8FAFC"/>
+                </a:solidFill>
+                <a:latin typeface="Segoe UI"/>
+              </a:rPr>
+              <a:t>12 deliberate departures</a:t>
+            </a:r>
+            <a:r>
+              <a:rPr sz="1600" b="0">
+                <a:solidFill>
+                  <a:srgbClr val="F8FAFC"/>
+                </a:solidFill>
+                <a:latin typeface="Segoe UI"/>
+              </a:rPr>
+              <a:t> from our submitted profile, each with reasoning — plus a </a:t>
+            </a:r>
+            <a:r>
+              <a:rPr sz="1600" b="1">
+                <a:solidFill>
+                  <a:srgbClr val="F8FAFC"/>
+                </a:solidFill>
+                <a:latin typeface="Segoe UI"/>
+              </a:rPr>
+              <a:t>"Still outstanding"</a:t>
+            </a:r>
+            <a:r>
+              <a:rPr sz="1600" b="0">
+                <a:solidFill>
+                  <a:srgbClr val="F8FAFC"/>
+                </a:solidFill>
+                <a:latin typeface="Segoe UI"/>
+              </a:rPr>
+              <a:t> table of what is simply not built.</a:t>
+            </a:r>
+          </a:p>
+        </p:txBody>
+      </p:sp>
+      <p:graphicFrame>
+        <p:nvGraphicFramePr>
+          <p:cNvPr id="5" name="Table 4"/>
+          <p:cNvGraphicFramePr>
+            <a:graphicFrameLocks noGrp="1"/>
+          </p:cNvGraphicFramePr>
+          <p:nvPr/>
+        </p:nvGraphicFramePr>
+        <p:xfrm>
+          <a:off x="658368" y="1600200"/>
+          <a:ext cx="10874959" cy="1920240"/>
+        </p:xfrm>
+        <a:graphic>
+          <a:graphicData uri="http://schemas.openxmlformats.org/drawingml/2006/table">
+            <a:tbl>
+              <a:tblPr firstRow="1" bandRow="1">
+                <a:tableStyleId>{5C22544A-7EE6-4342-B048-85BDC9FD1C3A}</a:tableStyleId>
+              </a:tblPr>
+              <a:tblGrid>
+                <a:gridCol w="3624986"/>
+                <a:gridCol w="3624986"/>
+                <a:gridCol w="3624987"/>
+              </a:tblGrid>
+              <a:tr h="384048">
+                <a:tc>
+                  <a:txBody>
+                    <a:bodyPr wrap="square"/>
+                    <a:lstStyle/>
+                    <a:p>
+                      <a:r>
+                        <a:rPr sz="1300" b="1">
+                          <a:solidFill>
+                            <a:srgbClr val="F8FAFC"/>
+                          </a:solidFill>
+                          <a:latin typeface="Segoe UI"/>
+                        </a:rPr>
+                        <a:t>#</a:t>
+                      </a:r>
+                    </a:p>
+                  </a:txBody>
+                  <a:tcPr marL="109728" marR="109728" marT="45720" marB="45720">
+                    <a:solidFill>
+                      <a:srgbClr val="1E293B"/>
+                    </a:solidFill>
+                  </a:tcPr>
+                </a:tc>
+                <a:tc>
+                  <a:txBody>
+                    <a:bodyPr wrap="square"/>
+                    <a:lstStyle/>
+                    <a:p>
+                      <a:r>
+                        <a:rPr sz="1300" b="1">
+                          <a:solidFill>
+                            <a:srgbClr val="F8FAFC"/>
+                          </a:solidFill>
+                          <a:latin typeface="Segoe UI"/>
+                        </a:rPr>
+                        <a:t>Profile says</a:t>
+                      </a:r>
+                    </a:p>
+                  </a:txBody>
+                  <a:tcPr marL="109728" marR="109728" marT="45720" marB="45720">
+                    <a:solidFill>
+                      <a:srgbClr val="1E293B"/>
+                    </a:solidFill>
+                  </a:tcPr>
+                </a:tc>
+                <a:tc>
+                  <a:txBody>
+                    <a:bodyPr wrap="square"/>
+                    <a:lstStyle/>
+                    <a:p>
+                      <a:r>
+                        <a:rPr sz="1300" b="1">
+                          <a:solidFill>
+                            <a:srgbClr val="F8FAFC"/>
+                          </a:solidFill>
+                          <a:latin typeface="Segoe UI"/>
+                        </a:rPr>
+                        <a:t>Status</a:t>
+                      </a:r>
+                    </a:p>
+                  </a:txBody>
+                  <a:tcPr marL="109728" marR="109728" marT="45720" marB="45720">
+                    <a:solidFill>
+                      <a:srgbClr val="1E293B"/>
+                    </a:solidFill>
+                  </a:tcPr>
+                </a:tc>
+              </a:tr>
+              <a:tr h="384048">
+                <a:tc>
+                  <a:txBody>
+                    <a:bodyPr wrap="square"/>
+                    <a:lstStyle/>
+                    <a:p>
+                      <a:r>
+                        <a:rPr sz="1300" b="0">
+                          <a:solidFill>
+                            <a:srgbClr val="B6C2D4"/>
+                          </a:solidFill>
+                          <a:latin typeface="Segoe UI"/>
+                        </a:rPr>
+                        <a:t>C</a:t>
+                      </a:r>
+                    </a:p>
+                  </a:txBody>
+                  <a:tcPr marL="109728" marR="109728" marT="45720" marB="45720">
+                    <a:solidFill>
+                      <a:srgbClr val="0B1220"/>
+                    </a:solidFill>
+                  </a:tcPr>
+                </a:tc>
+                <a:tc>
+                  <a:txBody>
+                    <a:bodyPr wrap="square"/>
+                    <a:lstStyle/>
+                    <a:p>
+                      <a:r>
+                        <a:rPr sz="1300" b="0">
+                          <a:solidFill>
+                            <a:srgbClr val="B6C2D4"/>
+                          </a:solidFill>
+                          <a:latin typeface="Segoe UI"/>
+                        </a:rPr>
+                        <a:t>MPC loop re-solves the route continuously</a:t>
+                      </a:r>
+                    </a:p>
+                  </a:txBody>
+                  <a:tcPr marL="109728" marR="109728" marT="45720" marB="45720">
+                    <a:solidFill>
+                      <a:srgbClr val="0B1220"/>
+                    </a:solidFill>
+                  </a:tcPr>
+                </a:tc>
+                <a:tc>
+                  <a:txBody>
+                    <a:bodyPr wrap="square"/>
+                    <a:lstStyle/>
+                    <a:p>
+                      <a:r>
+                        <a:rPr sz="1300" b="1">
+                          <a:solidFill>
+                            <a:srgbClr val="B6C2D4"/>
+                          </a:solidFill>
+                          <a:latin typeface="Segoe UI"/>
+                        </a:rPr>
+                        <a:t>Not built</a:t>
+                      </a:r>
+                      <a:r>
+                        <a:rPr sz="1300" b="0">
+                          <a:solidFill>
+                            <a:srgbClr val="B6C2D4"/>
+                          </a:solidFill>
+                          <a:latin typeface="Segoe UI"/>
+                        </a:rPr>
+                        <a:t> — brute-force sweep, re-planned on event</a:t>
+                      </a:r>
+                    </a:p>
+                  </a:txBody>
+                  <a:tcPr marL="109728" marR="109728" marT="45720" marB="45720">
+                    <a:solidFill>
+                      <a:srgbClr val="0B1220"/>
+                    </a:solidFill>
+                  </a:tcPr>
+                </a:tc>
+              </a:tr>
+              <a:tr h="384048">
+                <a:tc>
+                  <a:txBody>
+                    <a:bodyPr wrap="square"/>
+                    <a:lstStyle/>
+                    <a:p>
+                      <a:r>
+                        <a:rPr sz="1300" b="0">
+                          <a:solidFill>
+                            <a:srgbClr val="B6C2D4"/>
+                          </a:solidFill>
+                          <a:latin typeface="Segoe UI"/>
+                        </a:rPr>
+                        <a:t>F</a:t>
+                      </a:r>
+                    </a:p>
+                  </a:txBody>
+                  <a:tcPr marL="109728" marR="109728" marT="45720" marB="45720">
+                    <a:solidFill>
+                      <a:srgbClr val="0B1220"/>
+                    </a:solidFill>
+                  </a:tcPr>
+                </a:tc>
+                <a:tc>
+                  <a:txBody>
+                    <a:bodyPr wrap="square"/>
+                    <a:lstStyle/>
+                    <a:p>
+                      <a:r>
+                        <a:rPr sz="1300" b="0">
+                          <a:solidFill>
+                            <a:srgbClr val="B6C2D4"/>
+                          </a:solidFill>
+                          <a:latin typeface="Segoe UI"/>
+                        </a:rPr>
+                        <a:t>MQTT telemetry transport</a:t>
+                      </a:r>
+                    </a:p>
+                  </a:txBody>
+                  <a:tcPr marL="109728" marR="109728" marT="45720" marB="45720">
+                    <a:solidFill>
+                      <a:srgbClr val="0B1220"/>
+                    </a:solidFill>
+                  </a:tcPr>
+                </a:tc>
+                <a:tc>
+                  <a:txBody>
+                    <a:bodyPr wrap="square"/>
+                    <a:lstStyle/>
+                    <a:p>
+                      <a:r>
+                        <a:rPr sz="1300" b="1">
+                          <a:solidFill>
+                            <a:srgbClr val="B6C2D4"/>
+                          </a:solidFill>
+                          <a:latin typeface="Segoe UI"/>
+                        </a:rPr>
+                        <a:t>Not built</a:t>
+                      </a:r>
+                      <a:r>
+                        <a:rPr sz="1300" b="0">
+                          <a:solidFill>
+                            <a:srgbClr val="B6C2D4"/>
+                          </a:solidFill>
+                          <a:latin typeface="Segoe UI"/>
+                        </a:rPr>
+                        <a:t> — HTTP/JSON</a:t>
+                      </a:r>
+                    </a:p>
+                  </a:txBody>
+                  <a:tcPr marL="109728" marR="109728" marT="45720" marB="45720">
+                    <a:solidFill>
+                      <a:srgbClr val="0B1220"/>
+                    </a:solidFill>
+                  </a:tcPr>
+                </a:tc>
+              </a:tr>
+              <a:tr h="384048">
+                <a:tc>
+                  <a:txBody>
+                    <a:bodyPr wrap="square"/>
+                    <a:lstStyle/>
+                    <a:p>
+                      <a:r>
+                        <a:rPr sz="1300" b="0">
+                          <a:solidFill>
+                            <a:srgbClr val="B6C2D4"/>
+                          </a:solidFill>
+                          <a:latin typeface="Segoe UI"/>
+                        </a:rPr>
+                        <a:t>G</a:t>
+                      </a:r>
+                    </a:p>
+                  </a:txBody>
+                  <a:tcPr marL="109728" marR="109728" marT="45720" marB="45720">
+                    <a:solidFill>
+                      <a:srgbClr val="0B1220"/>
+                    </a:solidFill>
+                  </a:tcPr>
+                </a:tc>
+                <a:tc>
+                  <a:txBody>
+                    <a:bodyPr wrap="square"/>
+                    <a:lstStyle/>
+                    <a:p>
+                      <a:r>
+                        <a:rPr sz="1300" b="0">
+                          <a:solidFill>
+                            <a:srgbClr val="B6C2D4"/>
+                          </a:solidFill>
+                          <a:latin typeface="Segoe UI"/>
+                        </a:rPr>
+                        <a:t>Phase 1 pretrained on NASA C-MAPSS</a:t>
+                      </a:r>
+                    </a:p>
+                  </a:txBody>
+                  <a:tcPr marL="109728" marR="109728" marT="45720" marB="45720">
+                    <a:solidFill>
+                      <a:srgbClr val="0B1220"/>
+                    </a:solidFill>
+                  </a:tcPr>
+                </a:tc>
+                <a:tc>
+                  <a:txBody>
+                    <a:bodyPr wrap="square"/>
+                    <a:lstStyle/>
+                    <a:p>
+                      <a:r>
+                        <a:rPr sz="1300" b="1">
+                          <a:solidFill>
+                            <a:srgbClr val="B6C2D4"/>
+                          </a:solidFill>
+                          <a:latin typeface="Segoe UI"/>
+                        </a:rPr>
+                        <a:t>Not built</a:t>
+                      </a:r>
+                      <a:r>
+                        <a:rPr sz="1300" b="0">
+                          <a:solidFill>
+                            <a:srgbClr val="B6C2D4"/>
+                          </a:solidFill>
+                          <a:latin typeface="Segoe UI"/>
+                        </a:rPr>
+                        <a:t> — fits a per-vessel baseline instead</a:t>
+                      </a:r>
+                    </a:p>
+                  </a:txBody>
+                  <a:tcPr marL="109728" marR="109728" marT="45720" marB="45720">
+                    <a:solidFill>
+                      <a:srgbClr val="0B1220"/>
+                    </a:solidFill>
+                  </a:tcPr>
+                </a:tc>
+              </a:tr>
+              <a:tr h="384048">
+                <a:tc>
+                  <a:txBody>
+                    <a:bodyPr wrap="square"/>
+                    <a:lstStyle/>
+                    <a:p>
+                      <a:r>
+                        <a:rPr sz="1300" b="0">
+                          <a:solidFill>
+                            <a:srgbClr val="B6C2D4"/>
+                          </a:solidFill>
+                          <a:latin typeface="Segoe UI"/>
+                        </a:rPr>
+                        <a:t>H</a:t>
+                      </a:r>
+                    </a:p>
+                  </a:txBody>
+                  <a:tcPr marL="109728" marR="109728" marT="45720" marB="45720">
+                    <a:solidFill>
+                      <a:srgbClr val="0B1220"/>
+                    </a:solidFill>
+                  </a:tcPr>
+                </a:tc>
+                <a:tc>
+                  <a:txBody>
+                    <a:bodyPr wrap="square"/>
+                    <a:lstStyle/>
+                    <a:p>
+                      <a:r>
+                        <a:rPr sz="1300" b="0">
+                          <a:solidFill>
+                            <a:srgbClr val="B6C2D4"/>
+                          </a:solidFill>
+                          <a:latin typeface="Segoe UI"/>
+                        </a:rPr>
+                        <a:t>*Cumulative* run-hours per load band</a:t>
+                      </a:r>
+                    </a:p>
+                  </a:txBody>
+                  <a:tcPr marL="109728" marR="109728" marT="45720" marB="45720">
+                    <a:solidFill>
+                      <a:srgbClr val="0B1220"/>
+                    </a:solidFill>
+                  </a:tcPr>
+                </a:tc>
+                <a:tc>
+                  <a:txBody>
+                    <a:bodyPr wrap="square"/>
+                    <a:lstStyle/>
+                    <a:p>
+                      <a:r>
+                        <a:rPr sz="1300" b="1">
+                          <a:solidFill>
+                            <a:srgbClr val="B6C2D4"/>
+                          </a:solidFill>
+                          <a:latin typeface="Segoe UI"/>
+                        </a:rPr>
+                        <a:t>Partly</a:t>
+                      </a:r>
+                      <a:r>
+                        <a:rPr sz="1300" b="0">
+                          <a:solidFill>
+                            <a:srgbClr val="B6C2D4"/>
+                          </a:solidFill>
+                          <a:latin typeface="Segoe UI"/>
+                        </a:rPr>
+                        <a:t> — window-only. The rate survives honestly; lifetime hours do not</a:t>
+                      </a:r>
+                    </a:p>
+                  </a:txBody>
+                  <a:tcPr marL="109728" marR="109728" marT="45720" marB="45720">
+                    <a:solidFill>
+                      <a:srgbClr val="0B1220"/>
+                    </a:solidFill>
+                  </a:tcPr>
+                </a:tc>
+              </a:tr>
+            </a:tbl>
+          </a:graphicData>
+        </a:graphic>
+      </p:graphicFrame>
+      <p:sp>
+        <p:nvSpPr>
+          <p:cNvPr id="6" name="TextBox 5"/>
+          <p:cNvSpPr txBox="1"/>
+          <p:nvPr/>
+        </p:nvSpPr>
+        <p:spPr>
+          <a:xfrm>
+            <a:off x="658368" y="3794760"/>
+            <a:ext cx="10874959" cy="2240280"/>
+          </a:xfrm>
+          <a:prstGeom prst="rect">
+            <a:avLst/>
+          </a:prstGeom>
+          <a:noFill/>
+        </p:spPr>
+        <p:txBody>
+          <a:bodyPr wrap="square" anchor="t">
+            <a:spAutoFit/>
+          </a:bodyPr>
+          <a:lstStyle/>
+          <a:p>
+            <a:pPr>
+              <a:spcAft>
+                <a:spcPts val="900"/>
+              </a:spcAft>
+            </a:pPr>
+            <a:r>
+              <a:rPr sz="1600">
+                <a:solidFill>
+                  <a:srgbClr val="F97316"/>
+                </a:solidFill>
+                <a:latin typeface="Segoe UI"/>
+              </a:rPr>
+              <a:t>— </a:t>
+            </a:r>
+            <a:r>
+              <a:rPr sz="1600" b="1">
+                <a:solidFill>
+                  <a:srgbClr val="F8FAFC"/>
+                </a:solidFill>
+                <a:latin typeface="Segoe UI"/>
+              </a:rPr>
+              <a:t>Phase 2 RUL is absent, and that is compliant</a:t>
+            </a:r>
+            <a:r>
+              <a:rPr sz="1600" b="0">
+                <a:solidFill>
+                  <a:srgbClr val="F8FAFC"/>
+                </a:solidFill>
+                <a:latin typeface="Segoe UI"/>
+              </a:rPr>
+              <a:t> — our own profile (p.10) says demo Phase 1 and show Phase 2 as roadmap.</a:t>
+            </a:r>
+          </a:p>
+          <a:p>
+            <a:pPr>
+              <a:spcAft>
+                <a:spcPts val="900"/>
+              </a:spcAft>
+            </a:pPr>
+            <a:r>
+              <a:rPr sz="1600">
+                <a:solidFill>
+                  <a:srgbClr val="F97316"/>
+                </a:solidFill>
+                <a:latin typeface="Segoe UI"/>
+              </a:rPr>
+              <a:t>— </a:t>
+            </a:r>
+            <a:r>
+              <a:rPr sz="1600" b="1">
+                <a:solidFill>
+                  <a:srgbClr val="F8FAFC"/>
+                </a:solidFill>
+                <a:latin typeface="Segoe UI"/>
+              </a:rPr>
+              <a:t>The honest engineering gap:</a:t>
+            </a:r>
+            <a:r>
+              <a:rPr sz="1600" b="0">
+                <a:solidFill>
+                  <a:srgbClr val="F8FAFC"/>
+                </a:solidFill>
+                <a:latin typeface="Segoe UI"/>
+              </a:rPr>
+              <a:t> </a:t>
+            </a:r>
+            <a:r>
+              <a:rPr sz="1400" b="0">
+                <a:solidFill>
+                  <a:srgbClr val="B6C2D4"/>
+                </a:solidFill>
+                <a:latin typeface="Consolas"/>
+              </a:rPr>
+              <a:t>apps/bridge</a:t>
+            </a:r>
+            <a:r>
+              <a:rPr sz="1600" b="0">
+                <a:solidFill>
+                  <a:srgbClr val="F8FAFC"/>
+                </a:solidFill>
+                <a:latin typeface="Segoe UI"/>
+              </a:rPr>
+              <a:t> has no TypeScript test runner. 334 tests cover the Python; nothing in the display is unit-tested. Every UI defect this project found needed a human or a browser to see.</a:t>
+            </a:r>
+          </a:p>
+        </p:txBody>
+      </p:sp>
+      <p:sp>
+        <p:nvSpPr>
+          <p:cNvPr id="7" name="Rectangle 6"/>
+          <p:cNvSpPr/>
+          <p:nvPr/>
+        </p:nvSpPr>
+        <p:spPr>
+          <a:xfrm>
+            <a:off x="658368" y="6199632"/>
+            <a:ext cx="10874959" cy="12700"/>
+          </a:xfrm>
+          <a:prstGeom prst="rect">
+            <a:avLst/>
+          </a:prstGeom>
+          <a:solidFill>
+            <a:srgbClr val="1E293B"/>
+          </a:solidFill>
+          <a:ln>
+            <a:noFill/>
+          </a:ln>
+          <a:effectLst/>
+        </p:spPr>
+        <p:style>
+          <a:lnRef idx="1">
+            <a:schemeClr val="accent1"/>
+          </a:lnRef>
+          <a:fillRef idx="3">
+            <a:schemeClr val="accent1"/>
+          </a:fillRef>
+          <a:effectRef idx="2">
+            <a:schemeClr val="accent1"/>
+          </a:effectRef>
+          <a:fontRef idx="minor">
+            <a:schemeClr val="lt1"/>
+          </a:fontRef>
+        </p:style>
+        <p:txBody>
+          <a:bodyPr rtlCol="0" anchor="ctr"/>
+          <a:lstStyle/>
+          <a:p>
+            <a:pPr algn="ctr"/>
+          </a:p>
+        </p:txBody>
+      </p:sp>
+      <p:sp>
+        <p:nvSpPr>
+          <p:cNvPr id="8" name="TextBox 7"/>
+          <p:cNvSpPr txBox="1"/>
+          <p:nvPr/>
+        </p:nvSpPr>
+        <p:spPr>
+          <a:xfrm>
+            <a:off x="658368" y="6291072"/>
+            <a:ext cx="10874959" cy="292608"/>
+          </a:xfrm>
+          <a:prstGeom prst="rect">
+            <a:avLst/>
+          </a:prstGeom>
+          <a:noFill/>
+        </p:spPr>
+        <p:txBody>
+          <a:bodyPr wrap="none">
+            <a:spAutoFit/>
+          </a:bodyPr>
+          <a:lstStyle/>
+          <a:p>
+            <a:r>
+              <a:rPr sz="1000">
+                <a:solidFill>
+                  <a:srgbClr val="B6C2D4"/>
+                </a:solidFill>
+                <a:latin typeface="Segoe UI"/>
+              </a:rPr>
+              <a:t>Marine-AI  ·  Team SOLMATE  ·  ADVISORY ONLY — CAPTAIN COMMANDS</a:t>
+            </a:r>
+          </a:p>
+        </p:txBody>
+      </p:sp>
+      <p:sp>
+        <p:nvSpPr>
+          <p:cNvPr id="9" name="TextBox 8"/>
+          <p:cNvSpPr txBox="1"/>
+          <p:nvPr/>
+        </p:nvSpPr>
+        <p:spPr>
+          <a:xfrm>
+            <a:off x="10436047" y="6291072"/>
+            <a:ext cx="1097280" cy="292608"/>
+          </a:xfrm>
+          <a:prstGeom prst="rect">
+            <a:avLst/>
+          </a:prstGeom>
+          <a:noFill/>
+        </p:spPr>
+        <p:txBody>
+          <a:bodyPr wrap="none">
+            <a:spAutoFit/>
+          </a:bodyPr>
+          <a:lstStyle/>
+          <a:p>
+            <a:pPr algn="r"/>
+            <a:r>
+              <a:rPr sz="1000">
+                <a:solidFill>
+                  <a:srgbClr val="B6C2D4"/>
+                </a:solidFill>
+                <a:latin typeface="Consolas"/>
+              </a:rPr>
+              <a:t>24/24</a:t>
             </a:r>
           </a:p>
         </p:txBody>
@@ -11720,7 +19055,7 @@
                 </a:solidFill>
                 <a:latin typeface="Consolas"/>
               </a:rPr>
-              <a:t>2/17</a:t>
+              <a:t>2/24</a:t>
             </a:r>
           </a:p>
         </p:txBody>
@@ -12148,7 +19483,7 @@
                 </a:solidFill>
                 <a:latin typeface="Consolas"/>
               </a:rPr>
-              <a:t>3/17</a:t>
+              <a:t>3/24</a:t>
             </a:r>
           </a:p>
         </p:txBody>
@@ -12481,7 +19816,7 @@
                 </a:solidFill>
                 <a:latin typeface="Consolas"/>
               </a:rPr>
-              <a:t>4/17</a:t>
+              <a:t>4/24</a:t>
             </a:r>
           </a:p>
         </p:txBody>
@@ -12868,7 +20203,7 @@
                 </a:solidFill>
                 <a:latin typeface="Consolas"/>
               </a:rPr>
-              <a:t>5/17</a:t>
+              <a:t>5/24</a:t>
             </a:r>
           </a:p>
         </p:txBody>
@@ -13404,7 +20739,7 @@
                 </a:solidFill>
                 <a:latin typeface="Consolas"/>
               </a:rPr>
-              <a:t>6/17</a:t>
+              <a:t>6/24</a:t>
             </a:r>
           </a:p>
         </p:txBody>
@@ -14302,7 +21637,7 @@
                 </a:solidFill>
                 <a:latin typeface="Consolas"/>
               </a:rPr>
-              <a:t>7/17</a:t>
+              <a:t>7/24</a:t>
             </a:r>
           </a:p>
         </p:txBody>
@@ -14707,7 +22042,7 @@
                 </a:solidFill>
                 <a:latin typeface="Consolas"/>
               </a:rPr>
-              <a:t>8/17</a:t>
+              <a:t>8/24</a:t>
             </a:r>
           </a:p>
         </p:txBody>
